--- a/docs/deliverables/Project_Demo_Deck.pptx
+++ b/docs/deliverables/Project_Demo_Deck.pptx
@@ -5,33 +5,34 @@
     <p:sldMasterId id="2147483704" r:id="rId4"/>
   </p:sldMasterIdLst>
   <p:notesMasterIdLst>
-    <p:notesMasterId r:id="rId13"/>
+    <p:notesMasterId r:id="rId16"/>
   </p:notesMasterIdLst>
   <p:sldIdLst>
-    <p:sldId id="256" r:id="rId19"/>
-    <p:sldId id="257" r:id="rId20"/>
-    <p:sldId id="258" r:id="rId21"/>
-    <p:sldId id="259" r:id="rId22"/>
-    <p:sldId id="260" r:id="rId23"/>
-    <p:sldId id="261" r:id="rId24"/>
-    <p:sldId id="262" r:id="rId25"/>
-    <p:sldId id="263" r:id="rId26"/>
-    <p:sldId id="264" r:id="rId27"/>
-    <p:sldId id="265" r:id="rId28"/>
+    <p:sldId id="256" r:id="rId5"/>
+    <p:sldId id="257" r:id="rId6"/>
+    <p:sldId id="258" r:id="rId7"/>
+    <p:sldId id="266" r:id="rId8"/>
+    <p:sldId id="259" r:id="rId9"/>
+    <p:sldId id="260" r:id="rId10"/>
+    <p:sldId id="261" r:id="rId11"/>
+    <p:sldId id="262" r:id="rId12"/>
+    <p:sldId id="263" r:id="rId13"/>
+    <p:sldId id="265" r:id="rId14"/>
+    <p:sldId id="264" r:id="rId15"/>
   </p:sldIdLst>
   <p:sldSz cx="14631988" cy="8231188"/>
   <p:notesSz cx="6761163" cy="9942513"/>
   <p:embeddedFontLst>
     <p:embeddedFont>
-      <p:font typeface="Quattrocento Sans" panose="020B0604020202020204" charset="0"/>
-      <p:regular r:id="rId14"/>
+      <p:font typeface="Quattrocento Sans" panose="020B0502050000020003" pitchFamily="34" charset="0"/>
+      <p:regular r:id="rId17"/>
     </p:embeddedFont>
     <p:embeddedFont>
       <p:font typeface="Segoe UI" panose="020B0502040204020203" pitchFamily="34" charset="0"/>
-      <p:regular r:id="rId15"/>
-      <p:bold r:id="rId16"/>
-      <p:italic r:id="rId17"/>
-      <p:boldItalic r:id="rId18"/>
+      <p:regular r:id="rId18"/>
+      <p:bold r:id="rId19"/>
+      <p:italic r:id="rId20"/>
+      <p:boldItalic r:id="rId21"/>
     </p:embeddedFont>
   </p:embeddedFontLst>
   <p:defaultTextStyle>
@@ -335,1366 +336,6 @@
     <p1510:client id="{B31982AD-DD78-4204-86D6-95684A153739}" v="83" dt="2026-10-06T07:24:53.389"/>
   </p1510:revLst>
 </p1510:revInfo>
-</file>
-
-<file path=ppt/changesInfos/changesInfo1.xml><?xml version="1.0" encoding="utf-8"?>
-<pc:chgInfo xmlns:a="http://schemas.openxmlformats.org/drawingml/2006/main" xmlns:r="http://schemas.openxmlformats.org/officeDocument/2006/relationships" xmlns:ac="http://schemas.microsoft.com/office/drawing/2013/main/command" xmlns:pc="http://schemas.microsoft.com/office/powerpoint/2013/main/command">
-  <pc:docChgLst>
-    <pc:chgData name="Umesh Nikam" userId="S::umesh.nikam@softdel.com::5fee19d9-82ef-4b27-8766-eff6e0932e5e" providerId="AD" clId="Web-{773713F9-1949-582D-971C-203BF568B042}"/>
-    <pc:docChg chg="modSld">
-      <pc:chgData name="Umesh Nikam" userId="S::umesh.nikam@softdel.com::5fee19d9-82ef-4b27-8766-eff6e0932e5e" providerId="AD" clId="Web-{773713F9-1949-582D-971C-203BF568B042}" dt="2026-10-05T11:35:02.035" v="1" actId="20577"/>
-      <pc:docMkLst>
-        <pc:docMk/>
-      </pc:docMkLst>
-      <pc:sldChg chg="modSp">
-        <pc:chgData name="Umesh Nikam" userId="S::umesh.nikam@softdel.com::5fee19d9-82ef-4b27-8766-eff6e0932e5e" providerId="AD" clId="Web-{773713F9-1949-582D-971C-203BF568B042}" dt="2026-10-05T11:35:02.035" v="1" actId="20577"/>
-        <pc:sldMkLst>
-          <pc:docMk/>
-          <pc:sldMk cId="0" sldId="4723"/>
-        </pc:sldMkLst>
-        <pc:spChg chg="mod">
-          <ac:chgData name="Umesh Nikam" userId="S::umesh.nikam@softdel.com::5fee19d9-82ef-4b27-8766-eff6e0932e5e" providerId="AD" clId="Web-{773713F9-1949-582D-971C-203BF568B042}" dt="2026-10-05T11:35:02.035" v="1" actId="20577"/>
-          <ac:spMkLst>
-            <pc:docMk/>
-            <pc:sldMk cId="0" sldId="4723"/>
-            <ac:spMk id="13" creationId="{00000000-0000-0000-0000-000000000000}"/>
-          </ac:spMkLst>
-        </pc:spChg>
-      </pc:sldChg>
-    </pc:docChg>
-  </pc:docChgLst>
-  <pc:docChgLst>
-    <pc:chgData name="Vigneshkumar Sambath" userId="5dcf8a5f-1a18-42c8-b425-a273ddff87b0" providerId="ADAL" clId="{2E122F07-A039-41DA-9A6C-623DB3096030}"/>
-    <pc:docChg chg="custSel addSld delSld modSld delSection modSection">
-      <pc:chgData name="Vigneshkumar Sambath" userId="5dcf8a5f-1a18-42c8-b425-a273ddff87b0" providerId="ADAL" clId="{2E122F07-A039-41DA-9A6C-623DB3096030}" dt="2026-10-06T07:24:53.389" v="143"/>
-      <pc:docMkLst>
-        <pc:docMk/>
-      </pc:docMkLst>
-      <pc:sldChg chg="delSp modSp mod">
-        <pc:chgData name="Vigneshkumar Sambath" userId="5dcf8a5f-1a18-42c8-b425-a273ddff87b0" providerId="ADAL" clId="{2E122F07-A039-41DA-9A6C-623DB3096030}" dt="2026-10-06T07:20:27.256" v="81" actId="20577"/>
-        <pc:sldMkLst>
-          <pc:docMk/>
-          <pc:sldMk cId="0" sldId="4719"/>
-        </pc:sldMkLst>
-        <pc:spChg chg="del">
-          <ac:chgData name="Vigneshkumar Sambath" userId="5dcf8a5f-1a18-42c8-b425-a273ddff87b0" providerId="ADAL" clId="{2E122F07-A039-41DA-9A6C-623DB3096030}" dt="2026-10-05T13:26:31.029" v="6" actId="478"/>
-          <ac:spMkLst>
-            <pc:docMk/>
-            <pc:sldMk cId="0" sldId="4719"/>
-            <ac:spMk id="3" creationId="{00000000-0000-0000-0000-000000000000}"/>
-          </ac:spMkLst>
-        </pc:spChg>
-        <pc:spChg chg="mod">
-          <ac:chgData name="Vigneshkumar Sambath" userId="5dcf8a5f-1a18-42c8-b425-a273ddff87b0" providerId="ADAL" clId="{2E122F07-A039-41DA-9A6C-623DB3096030}" dt="2026-10-06T07:20:27.256" v="81" actId="20577"/>
-          <ac:spMkLst>
-            <pc:docMk/>
-            <pc:sldMk cId="0" sldId="4719"/>
-            <ac:spMk id="6" creationId="{00000000-0000-0000-0000-000000000000}"/>
-          </ac:spMkLst>
-        </pc:spChg>
-        <pc:spChg chg="del">
-          <ac:chgData name="Vigneshkumar Sambath" userId="5dcf8a5f-1a18-42c8-b425-a273ddff87b0" providerId="ADAL" clId="{2E122F07-A039-41DA-9A6C-623DB3096030}" dt="2026-10-05T13:26:25.831" v="2" actId="478"/>
-          <ac:spMkLst>
-            <pc:docMk/>
-            <pc:sldMk cId="0" sldId="4719"/>
-            <ac:spMk id="7" creationId="{00000000-0000-0000-0000-000000000000}"/>
-          </ac:spMkLst>
-        </pc:spChg>
-        <pc:spChg chg="del">
-          <ac:chgData name="Vigneshkumar Sambath" userId="5dcf8a5f-1a18-42c8-b425-a273ddff87b0" providerId="ADAL" clId="{2E122F07-A039-41DA-9A6C-623DB3096030}" dt="2026-10-05T13:26:27" v="3" actId="478"/>
-          <ac:spMkLst>
-            <pc:docMk/>
-            <pc:sldMk cId="0" sldId="4719"/>
-            <ac:spMk id="11" creationId="{00000000-0000-0000-0000-000000000000}"/>
-          </ac:spMkLst>
-        </pc:spChg>
-        <pc:spChg chg="del">
-          <ac:chgData name="Vigneshkumar Sambath" userId="5dcf8a5f-1a18-42c8-b425-a273ddff87b0" providerId="ADAL" clId="{2E122F07-A039-41DA-9A6C-623DB3096030}" dt="2026-10-05T13:26:28.250" v="4" actId="478"/>
-          <ac:spMkLst>
-            <pc:docMk/>
-            <pc:sldMk cId="0" sldId="4719"/>
-            <ac:spMk id="15" creationId="{00000000-0000-0000-0000-000000000000}"/>
-          </ac:spMkLst>
-        </pc:spChg>
-        <pc:spChg chg="del">
-          <ac:chgData name="Vigneshkumar Sambath" userId="5dcf8a5f-1a18-42c8-b425-a273ddff87b0" providerId="ADAL" clId="{2E122F07-A039-41DA-9A6C-623DB3096030}" dt="2026-10-05T13:26:29.291" v="5" actId="478"/>
-          <ac:spMkLst>
-            <pc:docMk/>
-            <pc:sldMk cId="0" sldId="4719"/>
-            <ac:spMk id="19" creationId="{00000000-0000-0000-0000-000000000000}"/>
-          </ac:spMkLst>
-        </pc:spChg>
-      </pc:sldChg>
-      <pc:sldChg chg="mod modShow">
-        <pc:chgData name="Vigneshkumar Sambath" userId="5dcf8a5f-1a18-42c8-b425-a273ddff87b0" providerId="ADAL" clId="{2E122F07-A039-41DA-9A6C-623DB3096030}" dt="2026-10-05T13:27:14.061" v="9" actId="729"/>
-        <pc:sldMkLst>
-          <pc:docMk/>
-          <pc:sldMk cId="0" sldId="4720"/>
-        </pc:sldMkLst>
-      </pc:sldChg>
-      <pc:sldChg chg="delSp modSp mod">
-        <pc:chgData name="Vigneshkumar Sambath" userId="5dcf8a5f-1a18-42c8-b425-a273ddff87b0" providerId="ADAL" clId="{2E122F07-A039-41DA-9A6C-623DB3096030}" dt="2026-10-06T07:22:11.863" v="131" actId="20577"/>
-        <pc:sldMkLst>
-          <pc:docMk/>
-          <pc:sldMk cId="0" sldId="4721"/>
-        </pc:sldMkLst>
-        <pc:spChg chg="mod">
-          <ac:chgData name="Vigneshkumar Sambath" userId="5dcf8a5f-1a18-42c8-b425-a273ddff87b0" providerId="ADAL" clId="{2E122F07-A039-41DA-9A6C-623DB3096030}" dt="2026-10-06T07:20:33.313" v="101" actId="20577"/>
-          <ac:spMkLst>
-            <pc:docMk/>
-            <pc:sldMk cId="0" sldId="4721"/>
-            <ac:spMk id="2" creationId="{00000000-0000-0000-0000-000000000000}"/>
-          </ac:spMkLst>
-        </pc:spChg>
-        <pc:spChg chg="del">
-          <ac:chgData name="Vigneshkumar Sambath" userId="5dcf8a5f-1a18-42c8-b425-a273ddff87b0" providerId="ADAL" clId="{2E122F07-A039-41DA-9A6C-623DB3096030}" dt="2026-10-05T13:26:48.875" v="8" actId="478"/>
-          <ac:spMkLst>
-            <pc:docMk/>
-            <pc:sldMk cId="0" sldId="4721"/>
-            <ac:spMk id="3" creationId="{00000000-0000-0000-0000-000000000000}"/>
-          </ac:spMkLst>
-        </pc:spChg>
-        <pc:spChg chg="mod">
-          <ac:chgData name="Vigneshkumar Sambath" userId="5dcf8a5f-1a18-42c8-b425-a273ddff87b0" providerId="ADAL" clId="{2E122F07-A039-41DA-9A6C-623DB3096030}" dt="2026-10-06T07:20:44.514" v="104" actId="20577"/>
-          <ac:spMkLst>
-            <pc:docMk/>
-            <pc:sldMk cId="0" sldId="4721"/>
-            <ac:spMk id="6" creationId="{00000000-0000-0000-0000-000000000000}"/>
-          </ac:spMkLst>
-        </pc:spChg>
-        <pc:spChg chg="mod">
-          <ac:chgData name="Vigneshkumar Sambath" userId="5dcf8a5f-1a18-42c8-b425-a273ddff87b0" providerId="ADAL" clId="{2E122F07-A039-41DA-9A6C-623DB3096030}" dt="2026-10-06T07:21:49.800" v="112" actId="20577"/>
-          <ac:spMkLst>
-            <pc:docMk/>
-            <pc:sldMk cId="0" sldId="4721"/>
-            <ac:spMk id="19" creationId="{00000000-0000-0000-0000-000000000000}"/>
-          </ac:spMkLst>
-        </pc:spChg>
-        <pc:spChg chg="mod">
-          <ac:chgData name="Vigneshkumar Sambath" userId="5dcf8a5f-1a18-42c8-b425-a273ddff87b0" providerId="ADAL" clId="{2E122F07-A039-41DA-9A6C-623DB3096030}" dt="2026-10-06T01:47:14.898" v="33" actId="20577"/>
-          <ac:spMkLst>
-            <pc:docMk/>
-            <pc:sldMk cId="0" sldId="4721"/>
-            <ac:spMk id="30" creationId="{00000000-0000-0000-0000-000000000000}"/>
-          </ac:spMkLst>
-        </pc:spChg>
-        <pc:spChg chg="mod">
-          <ac:chgData name="Vigneshkumar Sambath" userId="5dcf8a5f-1a18-42c8-b425-a273ddff87b0" providerId="ADAL" clId="{2E122F07-A039-41DA-9A6C-623DB3096030}" dt="2026-10-06T07:22:11.863" v="131" actId="20577"/>
-          <ac:spMkLst>
-            <pc:docMk/>
-            <pc:sldMk cId="0" sldId="4721"/>
-            <ac:spMk id="31" creationId="{00000000-0000-0000-0000-000000000000}"/>
-          </ac:spMkLst>
-        </pc:spChg>
-      </pc:sldChg>
-      <pc:sldChg chg="mod modShow">
-        <pc:chgData name="Vigneshkumar Sambath" userId="5dcf8a5f-1a18-42c8-b425-a273ddff87b0" providerId="ADAL" clId="{2E122F07-A039-41DA-9A6C-623DB3096030}" dt="2026-10-05T13:27:23.766" v="10" actId="729"/>
-        <pc:sldMkLst>
-          <pc:docMk/>
-          <pc:sldMk cId="0" sldId="4722"/>
-        </pc:sldMkLst>
-      </pc:sldChg>
-      <pc:sldChg chg="mod modShow">
-        <pc:chgData name="Vigneshkumar Sambath" userId="5dcf8a5f-1a18-42c8-b425-a273ddff87b0" providerId="ADAL" clId="{2E122F07-A039-41DA-9A6C-623DB3096030}" dt="2026-10-05T13:27:30.956" v="11" actId="729"/>
-        <pc:sldMkLst>
-          <pc:docMk/>
-          <pc:sldMk cId="0" sldId="4723"/>
-        </pc:sldMkLst>
-      </pc:sldChg>
-      <pc:sldChg chg="mod modShow">
-        <pc:chgData name="Vigneshkumar Sambath" userId="5dcf8a5f-1a18-42c8-b425-a273ddff87b0" providerId="ADAL" clId="{2E122F07-A039-41DA-9A6C-623DB3096030}" dt="2026-10-05T13:27:35.221" v="12" actId="729"/>
-        <pc:sldMkLst>
-          <pc:docMk/>
-          <pc:sldMk cId="0" sldId="4724"/>
-        </pc:sldMkLst>
-      </pc:sldChg>
-      <pc:sldChg chg="mod modShow">
-        <pc:chgData name="Vigneshkumar Sambath" userId="5dcf8a5f-1a18-42c8-b425-a273ddff87b0" providerId="ADAL" clId="{2E122F07-A039-41DA-9A6C-623DB3096030}" dt="2026-10-05T13:27:55.897" v="13" actId="729"/>
-        <pc:sldMkLst>
-          <pc:docMk/>
-          <pc:sldMk cId="0" sldId="4725"/>
-        </pc:sldMkLst>
-      </pc:sldChg>
-      <pc:sldChg chg="modSp del mod">
-        <pc:chgData name="Vigneshkumar Sambath" userId="5dcf8a5f-1a18-42c8-b425-a273ddff87b0" providerId="ADAL" clId="{2E122F07-A039-41DA-9A6C-623DB3096030}" dt="2026-10-06T07:24:49.296" v="141"/>
-        <pc:sldMkLst>
-          <pc:docMk/>
-          <pc:sldMk cId="0" sldId="4726"/>
-        </pc:sldMkLst>
-        <pc:spChg chg="mod">
-          <ac:chgData name="Vigneshkumar Sambath" userId="5dcf8a5f-1a18-42c8-b425-a273ddff87b0" providerId="ADAL" clId="{2E122F07-A039-41DA-9A6C-623DB3096030}" dt="2026-10-06T01:48:07.732" v="34" actId="13926"/>
-          <ac:spMkLst>
-            <pc:docMk/>
-            <pc:sldMk cId="0" sldId="4726"/>
-            <ac:spMk id="6" creationId="{00000000-0000-0000-0000-000000000000}"/>
-          </ac:spMkLst>
-        </pc:spChg>
-        <pc:graphicFrameChg chg="modGraphic">
-          <ac:chgData name="Vigneshkumar Sambath" userId="5dcf8a5f-1a18-42c8-b425-a273ddff87b0" providerId="ADAL" clId="{2E122F07-A039-41DA-9A6C-623DB3096030}" dt="2026-10-06T07:22:45.376" v="139" actId="20577"/>
-          <ac:graphicFrameMkLst>
-            <pc:docMk/>
-            <pc:sldMk cId="0" sldId="4726"/>
-            <ac:graphicFrameMk id="5" creationId="{00000000-0000-0000-0000-000000000000}"/>
-          </ac:graphicFrameMkLst>
-        </pc:graphicFrameChg>
-      </pc:sldChg>
-      <pc:sldChg chg="modSp del mod">
-        <pc:chgData name="Vigneshkumar Sambath" userId="5dcf8a5f-1a18-42c8-b425-a273ddff87b0" providerId="ADAL" clId="{2E122F07-A039-41DA-9A6C-623DB3096030}" dt="2026-10-06T07:24:53.389" v="143"/>
-        <pc:sldMkLst>
-          <pc:docMk/>
-          <pc:sldMk cId="0" sldId="4727"/>
-        </pc:sldMkLst>
-        <pc:spChg chg="mod">
-          <ac:chgData name="Vigneshkumar Sambath" userId="5dcf8a5f-1a18-42c8-b425-a273ddff87b0" providerId="ADAL" clId="{2E122F07-A039-41DA-9A6C-623DB3096030}" dt="2026-10-06T01:49:41.480" v="42" actId="20577"/>
-          <ac:spMkLst>
-            <pc:docMk/>
-            <pc:sldMk cId="0" sldId="4727"/>
-            <ac:spMk id="2" creationId="{00000000-0000-0000-0000-000000000000}"/>
-          </ac:spMkLst>
-        </pc:spChg>
-      </pc:sldChg>
-      <pc:sldChg chg="modSp mod">
-        <pc:chgData name="Vigneshkumar Sambath" userId="5dcf8a5f-1a18-42c8-b425-a273ddff87b0" providerId="ADAL" clId="{2E122F07-A039-41DA-9A6C-623DB3096030}" dt="2026-10-05T13:29:17.326" v="26" actId="13926"/>
-        <pc:sldMkLst>
-          <pc:docMk/>
-          <pc:sldMk cId="0" sldId="4728"/>
-        </pc:sldMkLst>
-        <pc:spChg chg="mod">
-          <ac:chgData name="Vigneshkumar Sambath" userId="5dcf8a5f-1a18-42c8-b425-a273ddff87b0" providerId="ADAL" clId="{2E122F07-A039-41DA-9A6C-623DB3096030}" dt="2026-10-05T13:29:17.326" v="26" actId="13926"/>
-          <ac:spMkLst>
-            <pc:docMk/>
-            <pc:sldMk cId="0" sldId="4728"/>
-            <ac:spMk id="2" creationId="{00000000-0000-0000-0000-000000000000}"/>
-          </ac:spMkLst>
-        </pc:spChg>
-        <pc:spChg chg="mod">
-          <ac:chgData name="Vigneshkumar Sambath" userId="5dcf8a5f-1a18-42c8-b425-a273ddff87b0" providerId="ADAL" clId="{2E122F07-A039-41DA-9A6C-623DB3096030}" dt="2026-10-05T13:29:15.339" v="25" actId="6549"/>
-          <ac:spMkLst>
-            <pc:docMk/>
-            <pc:sldMk cId="0" sldId="4728"/>
-            <ac:spMk id="4" creationId="{00000000-0000-0000-0000-000000000000}"/>
-          </ac:spMkLst>
-        </pc:spChg>
-      </pc:sldChg>
-      <pc:sldChg chg="del">
-        <pc:chgData name="Vigneshkumar Sambath" userId="5dcf8a5f-1a18-42c8-b425-a273ddff87b0" providerId="ADAL" clId="{2E122F07-A039-41DA-9A6C-623DB3096030}" dt="2026-10-05T13:14:29.291" v="1" actId="2696"/>
-        <pc:sldMkLst>
-          <pc:docMk/>
-          <pc:sldMk cId="0" sldId="4729"/>
-        </pc:sldMkLst>
-      </pc:sldChg>
-      <pc:sldChg chg="modSp mod">
-        <pc:chgData name="Vigneshkumar Sambath" userId="5dcf8a5f-1a18-42c8-b425-a273ddff87b0" providerId="ADAL" clId="{2E122F07-A039-41DA-9A6C-623DB3096030}" dt="2026-10-06T01:52:43.659" v="63" actId="207"/>
-        <pc:sldMkLst>
-          <pc:docMk/>
-          <pc:sldMk cId="0" sldId="4730"/>
-        </pc:sldMkLst>
-        <pc:spChg chg="mod">
-          <ac:chgData name="Vigneshkumar Sambath" userId="5dcf8a5f-1a18-42c8-b425-a273ddff87b0" providerId="ADAL" clId="{2E122F07-A039-41DA-9A6C-623DB3096030}" dt="2026-10-06T01:52:43.659" v="63" actId="207"/>
-          <ac:spMkLst>
-            <pc:docMk/>
-            <pc:sldMk cId="0" sldId="4730"/>
-            <ac:spMk id="8" creationId="{00000000-0000-0000-0000-000000000000}"/>
-          </ac:spMkLst>
-        </pc:spChg>
-        <pc:spChg chg="mod">
-          <ac:chgData name="Vigneshkumar Sambath" userId="5dcf8a5f-1a18-42c8-b425-a273ddff87b0" providerId="ADAL" clId="{2E122F07-A039-41DA-9A6C-623DB3096030}" dt="2026-10-06T01:51:37.507" v="62" actId="6549"/>
-          <ac:spMkLst>
-            <pc:docMk/>
-            <pc:sldMk cId="0" sldId="4730"/>
-            <ac:spMk id="15" creationId="{00000000-0000-0000-0000-000000000000}"/>
-          </ac:spMkLst>
-        </pc:spChg>
-      </pc:sldChg>
-      <pc:sldChg chg="del">
-        <pc:chgData name="Vigneshkumar Sambath" userId="5dcf8a5f-1a18-42c8-b425-a273ddff87b0" providerId="ADAL" clId="{2E122F07-A039-41DA-9A6C-623DB3096030}" dt="2026-10-05T13:14:25.921" v="0" actId="2696"/>
-        <pc:sldMkLst>
-          <pc:docMk/>
-          <pc:sldMk cId="0" sldId="4731"/>
-        </pc:sldMkLst>
-      </pc:sldChg>
-      <pc:sldChg chg="add">
-        <pc:chgData name="Vigneshkumar Sambath" userId="5dcf8a5f-1a18-42c8-b425-a273ddff87b0" providerId="ADAL" clId="{2E122F07-A039-41DA-9A6C-623DB3096030}" dt="2026-10-06T07:24:49.290" v="140"/>
-        <pc:sldMkLst>
-          <pc:docMk/>
-          <pc:sldMk cId="439790532" sldId="4733"/>
-        </pc:sldMkLst>
-      </pc:sldChg>
-      <pc:sldChg chg="add">
-        <pc:chgData name="Vigneshkumar Sambath" userId="5dcf8a5f-1a18-42c8-b425-a273ddff87b0" providerId="ADAL" clId="{2E122F07-A039-41DA-9A6C-623DB3096030}" dt="2026-10-06T07:24:53.385" v="142"/>
-        <pc:sldMkLst>
-          <pc:docMk/>
-          <pc:sldMk cId="932344670" sldId="4734"/>
-        </pc:sldMkLst>
-      </pc:sldChg>
-    </pc:docChg>
-  </pc:docChgLst>
-  <pc:docChgLst>
-    <pc:chgData name="Umesh Nikam" userId="S::umesh.nikam@softdel.com::5fee19d9-82ef-4b27-8766-eff6e0932e5e" providerId="AD" clId="Web-{33DB9F50-2544-3621-50E4-59889045D8DE}"/>
-    <pc:docChg chg="modSld">
-      <pc:chgData name="Umesh Nikam" userId="S::umesh.nikam@softdel.com::5fee19d9-82ef-4b27-8766-eff6e0932e5e" providerId="AD" clId="Web-{33DB9F50-2544-3621-50E4-59889045D8DE}" dt="2026-10-06T04:49:47.536" v="223" actId="20577"/>
-      <pc:docMkLst>
-        <pc:docMk/>
-      </pc:docMkLst>
-      <pc:sldChg chg="delSp modSp">
-        <pc:chgData name="Umesh Nikam" userId="S::umesh.nikam@softdel.com::5fee19d9-82ef-4b27-8766-eff6e0932e5e" providerId="AD" clId="Web-{33DB9F50-2544-3621-50E4-59889045D8DE}" dt="2026-10-06T04:33:52.406" v="140"/>
-        <pc:sldMkLst>
-          <pc:docMk/>
-          <pc:sldMk cId="0" sldId="4726"/>
-        </pc:sldMkLst>
-        <pc:spChg chg="del mod">
-          <ac:chgData name="Umesh Nikam" userId="S::umesh.nikam@softdel.com::5fee19d9-82ef-4b27-8766-eff6e0932e5e" providerId="AD" clId="Web-{33DB9F50-2544-3621-50E4-59889045D8DE}" dt="2026-10-06T04:33:52.406" v="140"/>
-          <ac:spMkLst>
-            <pc:docMk/>
-            <pc:sldMk cId="0" sldId="4726"/>
-            <ac:spMk id="6" creationId="{00000000-0000-0000-0000-000000000000}"/>
-          </ac:spMkLst>
-        </pc:spChg>
-        <pc:graphicFrameChg chg="mod modGraphic">
-          <ac:chgData name="Umesh Nikam" userId="S::umesh.nikam@softdel.com::5fee19d9-82ef-4b27-8766-eff6e0932e5e" providerId="AD" clId="Web-{33DB9F50-2544-3621-50E4-59889045D8DE}" dt="2026-10-06T04:32:52.483" v="135"/>
-          <ac:graphicFrameMkLst>
-            <pc:docMk/>
-            <pc:sldMk cId="0" sldId="4726"/>
-            <ac:graphicFrameMk id="5" creationId="{00000000-0000-0000-0000-000000000000}"/>
-          </ac:graphicFrameMkLst>
-        </pc:graphicFrameChg>
-      </pc:sldChg>
-      <pc:sldChg chg="delSp modSp">
-        <pc:chgData name="Umesh Nikam" userId="S::umesh.nikam@softdel.com::5fee19d9-82ef-4b27-8766-eff6e0932e5e" providerId="AD" clId="Web-{33DB9F50-2544-3621-50E4-59889045D8DE}" dt="2026-10-06T04:34:39.500" v="187"/>
-        <pc:sldMkLst>
-          <pc:docMk/>
-          <pc:sldMk cId="0" sldId="4727"/>
-        </pc:sldMkLst>
-        <pc:spChg chg="del">
-          <ac:chgData name="Umesh Nikam" userId="S::umesh.nikam@softdel.com::5fee19d9-82ef-4b27-8766-eff6e0932e5e" providerId="AD" clId="Web-{33DB9F50-2544-3621-50E4-59889045D8DE}" dt="2026-10-06T04:34:39.500" v="187"/>
-          <ac:spMkLst>
-            <pc:docMk/>
-            <pc:sldMk cId="0" sldId="4727"/>
-            <ac:spMk id="6" creationId="{00000000-0000-0000-0000-000000000000}"/>
-          </ac:spMkLst>
-        </pc:spChg>
-        <pc:graphicFrameChg chg="mod modGraphic">
-          <ac:chgData name="Umesh Nikam" userId="S::umesh.nikam@softdel.com::5fee19d9-82ef-4b27-8766-eff6e0932e5e" providerId="AD" clId="Web-{33DB9F50-2544-3621-50E4-59889045D8DE}" dt="2026-10-06T04:34:34.125" v="186"/>
-          <ac:graphicFrameMkLst>
-            <pc:docMk/>
-            <pc:sldMk cId="0" sldId="4727"/>
-            <ac:graphicFrameMk id="5" creationId="{00000000-0000-0000-0000-000000000000}"/>
-          </ac:graphicFrameMkLst>
-        </pc:graphicFrameChg>
-      </pc:sldChg>
-      <pc:sldChg chg="modSp modCm">
-        <pc:chgData name="Umesh Nikam" userId="S::umesh.nikam@softdel.com::5fee19d9-82ef-4b27-8766-eff6e0932e5e" providerId="AD" clId="Web-{33DB9F50-2544-3621-50E4-59889045D8DE}" dt="2026-10-06T04:49:47.536" v="223" actId="20577"/>
-        <pc:sldMkLst>
-          <pc:docMk/>
-          <pc:sldMk cId="0" sldId="4730"/>
-        </pc:sldMkLst>
-        <pc:spChg chg="mod">
-          <ac:chgData name="Umesh Nikam" userId="S::umesh.nikam@softdel.com::5fee19d9-82ef-4b27-8766-eff6e0932e5e" providerId="AD" clId="Web-{33DB9F50-2544-3621-50E4-59889045D8DE}" dt="2026-10-06T04:49:47.536" v="223" actId="20577"/>
-          <ac:spMkLst>
-            <pc:docMk/>
-            <pc:sldMk cId="0" sldId="4730"/>
-            <ac:spMk id="8" creationId="{00000000-0000-0000-0000-000000000000}"/>
-          </ac:spMkLst>
-        </pc:spChg>
-        <pc:spChg chg="mod">
-          <ac:chgData name="Umesh Nikam" userId="S::umesh.nikam@softdel.com::5fee19d9-82ef-4b27-8766-eff6e0932e5e" providerId="AD" clId="Web-{33DB9F50-2544-3621-50E4-59889045D8DE}" dt="2026-10-06T04:35:48.250" v="202" actId="20577"/>
-          <ac:spMkLst>
-            <pc:docMk/>
-            <pc:sldMk cId="0" sldId="4730"/>
-            <ac:spMk id="11" creationId="{00000000-0000-0000-0000-000000000000}"/>
-          </ac:spMkLst>
-        </pc:spChg>
-        <pc:spChg chg="mod">
-          <ac:chgData name="Umesh Nikam" userId="S::umesh.nikam@softdel.com::5fee19d9-82ef-4b27-8766-eff6e0932e5e" providerId="AD" clId="Web-{33DB9F50-2544-3621-50E4-59889045D8DE}" dt="2026-10-06T04:36:25.641" v="211" actId="20577"/>
-          <ac:spMkLst>
-            <pc:docMk/>
-            <pc:sldMk cId="0" sldId="4730"/>
-            <ac:spMk id="12" creationId="{00000000-0000-0000-0000-000000000000}"/>
-          </ac:spMkLst>
-        </pc:spChg>
-        <pc:spChg chg="mod">
-          <ac:chgData name="Umesh Nikam" userId="S::umesh.nikam@softdel.com::5fee19d9-82ef-4b27-8766-eff6e0932e5e" providerId="AD" clId="Web-{33DB9F50-2544-3621-50E4-59889045D8DE}" dt="2026-10-06T04:35:25.672" v="199" actId="20577"/>
-          <ac:spMkLst>
-            <pc:docMk/>
-            <pc:sldMk cId="0" sldId="4730"/>
-            <ac:spMk id="16" creationId="{00000000-0000-0000-0000-000000000000}"/>
-          </ac:spMkLst>
-        </pc:spChg>
-        <pc:extLst>
-          <p:ext xmlns:p="http://schemas.openxmlformats.org/presentationml/2006/main" uri="{D6D511B9-2390-475A-947B-AFAB55BFBCF1}">
-            <pc226:cmChg xmlns:pc226="http://schemas.microsoft.com/office/powerpoint/2022/06/main/command" chg="mod">
-              <pc226:chgData name="Umesh Nikam" userId="S::umesh.nikam@softdel.com::5fee19d9-82ef-4b27-8766-eff6e0932e5e" providerId="AD" clId="Web-{33DB9F50-2544-3621-50E4-59889045D8DE}" dt="2026-10-06T04:49:47.536" v="222" actId="20577"/>
-              <pc2:cmMkLst xmlns:pc2="http://schemas.microsoft.com/office/powerpoint/2019/9/main/command">
-                <pc:docMk/>
-                <pc:sldMk cId="0" sldId="4730"/>
-                <pc2:cmMk id="{D6E3EA0D-2902-44CF-9DB4-6051A781E56F}"/>
-              </pc2:cmMkLst>
-            </pc226:cmChg>
-          </p:ext>
-        </pc:extLst>
-      </pc:sldChg>
-    </pc:docChg>
-  </pc:docChgLst>
-  <pc:docChgLst>
-    <pc:chgData name="Umesh Nikam" userId="S::umesh.nikam@softdel.com::5fee19d9-82ef-4b27-8766-eff6e0932e5e" providerId="AD" clId="Web-{00000000-0000-0000-0000-000000000000}"/>
-    <pc:docChg chg="delSld modSld modSection">
-      <pc:chgData name="Umesh Nikam" userId="S::umesh.nikam@softdel.com::5fee19d9-82ef-4b27-8766-eff6e0932e5e" providerId="AD" clId="Web-{00000000-0000-0000-0000-000000000000}" dt="2026-10-05T14:12:01.540" v="433" actId="20577"/>
-      <pc:docMkLst>
-        <pc:docMk/>
-      </pc:docMkLst>
-      <pc:sldChg chg="modSp">
-        <pc:chgData name="Umesh Nikam" userId="S::umesh.nikam@softdel.com::5fee19d9-82ef-4b27-8766-eff6e0932e5e" providerId="AD" clId="Web-{00000000-0000-0000-0000-000000000000}" dt="2026-10-05T14:06:02.068" v="426" actId="20577"/>
-        <pc:sldMkLst>
-          <pc:docMk/>
-          <pc:sldMk cId="2279024266" sldId="4718"/>
-        </pc:sldMkLst>
-        <pc:spChg chg="mod">
-          <ac:chgData name="Umesh Nikam" userId="S::umesh.nikam@softdel.com::5fee19d9-82ef-4b27-8766-eff6e0932e5e" providerId="AD" clId="Web-{00000000-0000-0000-0000-000000000000}" dt="2026-10-05T14:06:02.068" v="426" actId="20577"/>
-          <ac:spMkLst>
-            <pc:docMk/>
-            <pc:sldMk cId="2279024266" sldId="4718"/>
-            <ac:spMk id="5" creationId="{4807E640-9E42-002F-79A9-301E6F8E1C45}"/>
-          </ac:spMkLst>
-        </pc:spChg>
-      </pc:sldChg>
-      <pc:sldChg chg="modSp">
-        <pc:chgData name="Umesh Nikam" userId="S::umesh.nikam@softdel.com::5fee19d9-82ef-4b27-8766-eff6e0932e5e" providerId="AD" clId="Web-{00000000-0000-0000-0000-000000000000}" dt="2026-10-05T14:04:37.020" v="412" actId="20577"/>
-        <pc:sldMkLst>
-          <pc:docMk/>
-          <pc:sldMk cId="0" sldId="4719"/>
-        </pc:sldMkLst>
-        <pc:spChg chg="mod">
-          <ac:chgData name="Umesh Nikam" userId="S::umesh.nikam@softdel.com::5fee19d9-82ef-4b27-8766-eff6e0932e5e" providerId="AD" clId="Web-{00000000-0000-0000-0000-000000000000}" dt="2026-10-05T14:02:09.034" v="383" actId="20577"/>
-          <ac:spMkLst>
-            <pc:docMk/>
-            <pc:sldMk cId="0" sldId="4719"/>
-            <ac:spMk id="6" creationId="{00000000-0000-0000-0000-000000000000}"/>
-          </ac:spMkLst>
-        </pc:spChg>
-        <pc:spChg chg="mod">
-          <ac:chgData name="Umesh Nikam" userId="S::umesh.nikam@softdel.com::5fee19d9-82ef-4b27-8766-eff6e0932e5e" providerId="AD" clId="Web-{00000000-0000-0000-0000-000000000000}" dt="2026-10-05T14:02:45.956" v="397"/>
-          <ac:spMkLst>
-            <pc:docMk/>
-            <pc:sldMk cId="0" sldId="4719"/>
-            <ac:spMk id="10" creationId="{00000000-0000-0000-0000-000000000000}"/>
-          </ac:spMkLst>
-        </pc:spChg>
-        <pc:spChg chg="mod">
-          <ac:chgData name="Umesh Nikam" userId="S::umesh.nikam@softdel.com::5fee19d9-82ef-4b27-8766-eff6e0932e5e" providerId="AD" clId="Web-{00000000-0000-0000-0000-000000000000}" dt="2026-10-05T14:04:20.020" v="408" actId="20577"/>
-          <ac:spMkLst>
-            <pc:docMk/>
-            <pc:sldMk cId="0" sldId="4719"/>
-            <ac:spMk id="14" creationId="{00000000-0000-0000-0000-000000000000}"/>
-          </ac:spMkLst>
-        </pc:spChg>
-        <pc:spChg chg="mod">
-          <ac:chgData name="Umesh Nikam" userId="S::umesh.nikam@softdel.com::5fee19d9-82ef-4b27-8766-eff6e0932e5e" providerId="AD" clId="Web-{00000000-0000-0000-0000-000000000000}" dt="2026-10-05T14:04:37.020" v="412" actId="20577"/>
-          <ac:spMkLst>
-            <pc:docMk/>
-            <pc:sldMk cId="0" sldId="4719"/>
-            <ac:spMk id="18" creationId="{00000000-0000-0000-0000-000000000000}"/>
-          </ac:spMkLst>
-        </pc:spChg>
-      </pc:sldChg>
-      <pc:sldChg chg="del">
-        <pc:chgData name="Umesh Nikam" userId="S::umesh.nikam@softdel.com::5fee19d9-82ef-4b27-8766-eff6e0932e5e" providerId="AD" clId="Web-{00000000-0000-0000-0000-000000000000}" dt="2026-10-05T13:46:50.460" v="150"/>
-        <pc:sldMkLst>
-          <pc:docMk/>
-          <pc:sldMk cId="0" sldId="4720"/>
-        </pc:sldMkLst>
-      </pc:sldChg>
-      <pc:sldChg chg="addSp delSp modSp">
-        <pc:chgData name="Umesh Nikam" userId="S::umesh.nikam@softdel.com::5fee19d9-82ef-4b27-8766-eff6e0932e5e" providerId="AD" clId="Web-{00000000-0000-0000-0000-000000000000}" dt="2026-10-05T14:02:23.097" v="387" actId="20577"/>
-        <pc:sldMkLst>
-          <pc:docMk/>
-          <pc:sldMk cId="0" sldId="4721"/>
-        </pc:sldMkLst>
-        <pc:spChg chg="mod">
-          <ac:chgData name="Umesh Nikam" userId="S::umesh.nikam@softdel.com::5fee19d9-82ef-4b27-8766-eff6e0932e5e" providerId="AD" clId="Web-{00000000-0000-0000-0000-000000000000}" dt="2026-10-05T14:02:23.097" v="387" actId="20577"/>
-          <ac:spMkLst>
-            <pc:docMk/>
-            <pc:sldMk cId="0" sldId="4721"/>
-            <ac:spMk id="2" creationId="{00000000-0000-0000-0000-000000000000}"/>
-          </ac:spMkLst>
-        </pc:spChg>
-        <pc:spChg chg="add del mod">
-          <ac:chgData name="Umesh Nikam" userId="S::umesh.nikam@softdel.com::5fee19d9-82ef-4b27-8766-eff6e0932e5e" providerId="AD" clId="Web-{00000000-0000-0000-0000-000000000000}" dt="2026-10-05T13:43:30.302" v="95" actId="20577"/>
-          <ac:spMkLst>
-            <pc:docMk/>
-            <pc:sldMk cId="0" sldId="4721"/>
-            <ac:spMk id="7" creationId="{00000000-0000-0000-0000-000000000000}"/>
-          </ac:spMkLst>
-        </pc:spChg>
-        <pc:spChg chg="mod">
-          <ac:chgData name="Umesh Nikam" userId="S::umesh.nikam@softdel.com::5fee19d9-82ef-4b27-8766-eff6e0932e5e" providerId="AD" clId="Web-{00000000-0000-0000-0000-000000000000}" dt="2026-10-05T13:44:19.177" v="108" actId="20577"/>
-          <ac:spMkLst>
-            <pc:docMk/>
-            <pc:sldMk cId="0" sldId="4721"/>
-            <ac:spMk id="11" creationId="{00000000-0000-0000-0000-000000000000}"/>
-          </ac:spMkLst>
-        </pc:spChg>
-        <pc:spChg chg="mod">
-          <ac:chgData name="Umesh Nikam" userId="S::umesh.nikam@softdel.com::5fee19d9-82ef-4b27-8766-eff6e0932e5e" providerId="AD" clId="Web-{00000000-0000-0000-0000-000000000000}" dt="2026-10-05T13:44:29.490" v="111" actId="20577"/>
-          <ac:spMkLst>
-            <pc:docMk/>
-            <pc:sldMk cId="0" sldId="4721"/>
-            <ac:spMk id="15" creationId="{00000000-0000-0000-0000-000000000000}"/>
-          </ac:spMkLst>
-        </pc:spChg>
-        <pc:spChg chg="mod">
-          <ac:chgData name="Umesh Nikam" userId="S::umesh.nikam@softdel.com::5fee19d9-82ef-4b27-8766-eff6e0932e5e" providerId="AD" clId="Web-{00000000-0000-0000-0000-000000000000}" dt="2026-10-05T13:44:40.834" v="114" actId="20577"/>
-          <ac:spMkLst>
-            <pc:docMk/>
-            <pc:sldMk cId="0" sldId="4721"/>
-            <ac:spMk id="19" creationId="{00000000-0000-0000-0000-000000000000}"/>
-          </ac:spMkLst>
-        </pc:spChg>
-        <pc:spChg chg="mod">
-          <ac:chgData name="Umesh Nikam" userId="S::umesh.nikam@softdel.com::5fee19d9-82ef-4b27-8766-eff6e0932e5e" providerId="AD" clId="Web-{00000000-0000-0000-0000-000000000000}" dt="2026-10-05T13:45:05.444" v="116" actId="20577"/>
-          <ac:spMkLst>
-            <pc:docMk/>
-            <pc:sldMk cId="0" sldId="4721"/>
-            <ac:spMk id="27" creationId="{00000000-0000-0000-0000-000000000000}"/>
-          </ac:spMkLst>
-        </pc:spChg>
-        <pc:spChg chg="mod">
-          <ac:chgData name="Umesh Nikam" userId="S::umesh.nikam@softdel.com::5fee19d9-82ef-4b27-8766-eff6e0932e5e" providerId="AD" clId="Web-{00000000-0000-0000-0000-000000000000}" dt="2026-10-05T13:45:53.335" v="135" actId="20577"/>
-          <ac:spMkLst>
-            <pc:docMk/>
-            <pc:sldMk cId="0" sldId="4721"/>
-            <ac:spMk id="31" creationId="{00000000-0000-0000-0000-000000000000}"/>
-          </ac:spMkLst>
-        </pc:spChg>
-        <pc:spChg chg="mod">
-          <ac:chgData name="Umesh Nikam" userId="S::umesh.nikam@softdel.com::5fee19d9-82ef-4b27-8766-eff6e0932e5e" providerId="AD" clId="Web-{00000000-0000-0000-0000-000000000000}" dt="2026-10-05T13:46:29.351" v="144" actId="20577"/>
-          <ac:spMkLst>
-            <pc:docMk/>
-            <pc:sldMk cId="0" sldId="4721"/>
-            <ac:spMk id="35" creationId="{00000000-0000-0000-0000-000000000000}"/>
-          </ac:spMkLst>
-        </pc:spChg>
-        <pc:spChg chg="mod">
-          <ac:chgData name="Umesh Nikam" userId="S::umesh.nikam@softdel.com::5fee19d9-82ef-4b27-8766-eff6e0932e5e" providerId="AD" clId="Web-{00000000-0000-0000-0000-000000000000}" dt="2026-10-05T13:46:40.538" v="149" actId="20577"/>
-          <ac:spMkLst>
-            <pc:docMk/>
-            <pc:sldMk cId="0" sldId="4721"/>
-            <ac:spMk id="39" creationId="{00000000-0000-0000-0000-000000000000}"/>
-          </ac:spMkLst>
-        </pc:spChg>
-        <pc:picChg chg="add del mod">
-          <ac:chgData name="Umesh Nikam" userId="S::umesh.nikam@softdel.com::5fee19d9-82ef-4b27-8766-eff6e0932e5e" providerId="AD" clId="Web-{00000000-0000-0000-0000-000000000000}" dt="2026-10-05T13:42:20.301" v="84"/>
-          <ac:picMkLst>
-            <pc:docMk/>
-            <pc:sldMk cId="0" sldId="4721"/>
-            <ac:picMk id="3" creationId="{433480D0-0B11-84AB-25A7-DFF9B18CEDA5}"/>
-          </ac:picMkLst>
-        </pc:picChg>
-      </pc:sldChg>
-      <pc:sldChg chg="del">
-        <pc:chgData name="Umesh Nikam" userId="S::umesh.nikam@softdel.com::5fee19d9-82ef-4b27-8766-eff6e0932e5e" providerId="AD" clId="Web-{00000000-0000-0000-0000-000000000000}" dt="2026-10-05T13:46:54.460" v="151"/>
-        <pc:sldMkLst>
-          <pc:docMk/>
-          <pc:sldMk cId="0" sldId="4722"/>
-        </pc:sldMkLst>
-      </pc:sldChg>
-      <pc:sldChg chg="del">
-        <pc:chgData name="Umesh Nikam" userId="S::umesh.nikam@softdel.com::5fee19d9-82ef-4b27-8766-eff6e0932e5e" providerId="AD" clId="Web-{00000000-0000-0000-0000-000000000000}" dt="2026-10-05T13:46:56.898" v="152"/>
-        <pc:sldMkLst>
-          <pc:docMk/>
-          <pc:sldMk cId="0" sldId="4723"/>
-        </pc:sldMkLst>
-      </pc:sldChg>
-      <pc:sldChg chg="del">
-        <pc:chgData name="Umesh Nikam" userId="S::umesh.nikam@softdel.com::5fee19d9-82ef-4b27-8766-eff6e0932e5e" providerId="AD" clId="Web-{00000000-0000-0000-0000-000000000000}" dt="2026-10-05T13:46:58.273" v="153"/>
-        <pc:sldMkLst>
-          <pc:docMk/>
-          <pc:sldMk cId="0" sldId="4724"/>
-        </pc:sldMkLst>
-      </pc:sldChg>
-      <pc:sldChg chg="del">
-        <pc:chgData name="Umesh Nikam" userId="S::umesh.nikam@softdel.com::5fee19d9-82ef-4b27-8766-eff6e0932e5e" providerId="AD" clId="Web-{00000000-0000-0000-0000-000000000000}" dt="2026-10-05T13:46:59.038" v="154"/>
-        <pc:sldMkLst>
-          <pc:docMk/>
-          <pc:sldMk cId="0" sldId="4725"/>
-        </pc:sldMkLst>
-      </pc:sldChg>
-      <pc:sldChg chg="delSp modSp">
-        <pc:chgData name="Umesh Nikam" userId="S::umesh.nikam@softdel.com::5fee19d9-82ef-4b27-8766-eff6e0932e5e" providerId="AD" clId="Web-{00000000-0000-0000-0000-000000000000}" dt="2026-10-05T14:02:29.784" v="391" actId="20577"/>
-        <pc:sldMkLst>
-          <pc:docMk/>
-          <pc:sldMk cId="0" sldId="4726"/>
-        </pc:sldMkLst>
-        <pc:spChg chg="mod">
-          <ac:chgData name="Umesh Nikam" userId="S::umesh.nikam@softdel.com::5fee19d9-82ef-4b27-8766-eff6e0932e5e" providerId="AD" clId="Web-{00000000-0000-0000-0000-000000000000}" dt="2026-10-05T14:02:29.784" v="391" actId="20577"/>
-          <ac:spMkLst>
-            <pc:docMk/>
-            <pc:sldMk cId="0" sldId="4726"/>
-            <ac:spMk id="2" creationId="{00000000-0000-0000-0000-000000000000}"/>
-          </ac:spMkLst>
-        </pc:spChg>
-        <pc:spChg chg="del">
-          <ac:chgData name="Umesh Nikam" userId="S::umesh.nikam@softdel.com::5fee19d9-82ef-4b27-8766-eff6e0932e5e" providerId="AD" clId="Web-{00000000-0000-0000-0000-000000000000}" dt="2026-10-05T13:47:53.477" v="171"/>
-          <ac:spMkLst>
-            <pc:docMk/>
-            <pc:sldMk cId="0" sldId="4726"/>
-            <ac:spMk id="3" creationId="{00000000-0000-0000-0000-000000000000}"/>
-          </ac:spMkLst>
-        </pc:spChg>
-        <pc:spChg chg="del">
-          <ac:chgData name="Umesh Nikam" userId="S::umesh.nikam@softdel.com::5fee19d9-82ef-4b27-8766-eff6e0932e5e" providerId="AD" clId="Web-{00000000-0000-0000-0000-000000000000}" dt="2026-10-05T13:47:57.914" v="172"/>
-          <ac:spMkLst>
-            <pc:docMk/>
-            <pc:sldMk cId="0" sldId="4726"/>
-            <ac:spMk id="4" creationId="{00000000-0000-0000-0000-000000000000}"/>
-          </ac:spMkLst>
-        </pc:spChg>
-        <pc:spChg chg="mod">
-          <ac:chgData name="Umesh Nikam" userId="S::umesh.nikam@softdel.com::5fee19d9-82ef-4b27-8766-eff6e0932e5e" providerId="AD" clId="Web-{00000000-0000-0000-0000-000000000000}" dt="2026-10-05T13:48:42.071" v="206" actId="1076"/>
-          <ac:spMkLst>
-            <pc:docMk/>
-            <pc:sldMk cId="0" sldId="4726"/>
-            <ac:spMk id="6" creationId="{00000000-0000-0000-0000-000000000000}"/>
-          </ac:spMkLst>
-        </pc:spChg>
-        <pc:graphicFrameChg chg="mod modGraphic">
-          <ac:chgData name="Umesh Nikam" userId="S::umesh.nikam@softdel.com::5fee19d9-82ef-4b27-8766-eff6e0932e5e" providerId="AD" clId="Web-{00000000-0000-0000-0000-000000000000}" dt="2026-10-05T13:48:42.040" v="205" actId="1076"/>
-          <ac:graphicFrameMkLst>
-            <pc:docMk/>
-            <pc:sldMk cId="0" sldId="4726"/>
-            <ac:graphicFrameMk id="5" creationId="{00000000-0000-0000-0000-000000000000}"/>
-          </ac:graphicFrameMkLst>
-        </pc:graphicFrameChg>
-      </pc:sldChg>
-      <pc:sldChg chg="delSp modSp">
-        <pc:chgData name="Umesh Nikam" userId="S::umesh.nikam@softdel.com::5fee19d9-82ef-4b27-8766-eff6e0932e5e" providerId="AD" clId="Web-{00000000-0000-0000-0000-000000000000}" dt="2026-10-05T14:02:56.300" v="398" actId="20577"/>
-        <pc:sldMkLst>
-          <pc:docMk/>
-          <pc:sldMk cId="0" sldId="4727"/>
-        </pc:sldMkLst>
-        <pc:spChg chg="mod">
-          <ac:chgData name="Umesh Nikam" userId="S::umesh.nikam@softdel.com::5fee19d9-82ef-4b27-8766-eff6e0932e5e" providerId="AD" clId="Web-{00000000-0000-0000-0000-000000000000}" dt="2026-10-05T14:02:56.300" v="398" actId="20577"/>
-          <ac:spMkLst>
-            <pc:docMk/>
-            <pc:sldMk cId="0" sldId="4727"/>
-            <ac:spMk id="2" creationId="{00000000-0000-0000-0000-000000000000}"/>
-          </ac:spMkLst>
-        </pc:spChg>
-        <pc:spChg chg="del mod">
-          <ac:chgData name="Umesh Nikam" userId="S::umesh.nikam@softdel.com::5fee19d9-82ef-4b27-8766-eff6e0932e5e" providerId="AD" clId="Web-{00000000-0000-0000-0000-000000000000}" dt="2026-10-05T13:49:35.696" v="214"/>
-          <ac:spMkLst>
-            <pc:docMk/>
-            <pc:sldMk cId="0" sldId="4727"/>
-            <ac:spMk id="3" creationId="{00000000-0000-0000-0000-000000000000}"/>
-          </ac:spMkLst>
-        </pc:spChg>
-        <pc:spChg chg="del">
-          <ac:chgData name="Umesh Nikam" userId="S::umesh.nikam@softdel.com::5fee19d9-82ef-4b27-8766-eff6e0932e5e" providerId="AD" clId="Web-{00000000-0000-0000-0000-000000000000}" dt="2026-10-05T13:49:35.696" v="213"/>
-          <ac:spMkLst>
-            <pc:docMk/>
-            <pc:sldMk cId="0" sldId="4727"/>
-            <ac:spMk id="4" creationId="{00000000-0000-0000-0000-000000000000}"/>
-          </ac:spMkLst>
-        </pc:spChg>
-        <pc:spChg chg="mod">
-          <ac:chgData name="Umesh Nikam" userId="S::umesh.nikam@softdel.com::5fee19d9-82ef-4b27-8766-eff6e0932e5e" providerId="AD" clId="Web-{00000000-0000-0000-0000-000000000000}" dt="2026-10-05T13:49:39.306" v="216" actId="1076"/>
-          <ac:spMkLst>
-            <pc:docMk/>
-            <pc:sldMk cId="0" sldId="4727"/>
-            <ac:spMk id="6" creationId="{00000000-0000-0000-0000-000000000000}"/>
-          </ac:spMkLst>
-        </pc:spChg>
-        <pc:graphicFrameChg chg="mod">
-          <ac:chgData name="Umesh Nikam" userId="S::umesh.nikam@softdel.com::5fee19d9-82ef-4b27-8766-eff6e0932e5e" providerId="AD" clId="Web-{00000000-0000-0000-0000-000000000000}" dt="2026-10-05T13:49:39.259" v="215" actId="1076"/>
-          <ac:graphicFrameMkLst>
-            <pc:docMk/>
-            <pc:sldMk cId="0" sldId="4727"/>
-            <ac:graphicFrameMk id="5" creationId="{00000000-0000-0000-0000-000000000000}"/>
-          </ac:graphicFrameMkLst>
-        </pc:graphicFrameChg>
-      </pc:sldChg>
-      <pc:sldChg chg="delSp modSp">
-        <pc:chgData name="Umesh Nikam" userId="S::umesh.nikam@softdel.com::5fee19d9-82ef-4b27-8766-eff6e0932e5e" providerId="AD" clId="Web-{00000000-0000-0000-0000-000000000000}" dt="2026-10-05T14:12:01.540" v="433" actId="20577"/>
-        <pc:sldMkLst>
-          <pc:docMk/>
-          <pc:sldMk cId="0" sldId="4728"/>
-        </pc:sldMkLst>
-        <pc:spChg chg="mod">
-          <ac:chgData name="Umesh Nikam" userId="S::umesh.nikam@softdel.com::5fee19d9-82ef-4b27-8766-eff6e0932e5e" providerId="AD" clId="Web-{00000000-0000-0000-0000-000000000000}" dt="2026-10-05T14:04:06.926" v="402" actId="20577"/>
-          <ac:spMkLst>
-            <pc:docMk/>
-            <pc:sldMk cId="0" sldId="4728"/>
-            <ac:spMk id="2" creationId="{00000000-0000-0000-0000-000000000000}"/>
-          </ac:spMkLst>
-        </pc:spChg>
-        <pc:spChg chg="del">
-          <ac:chgData name="Umesh Nikam" userId="S::umesh.nikam@softdel.com::5fee19d9-82ef-4b27-8766-eff6e0932e5e" providerId="AD" clId="Web-{00000000-0000-0000-0000-000000000000}" dt="2026-10-05T13:50:45.416" v="232"/>
-          <ac:spMkLst>
-            <pc:docMk/>
-            <pc:sldMk cId="0" sldId="4728"/>
-            <ac:spMk id="3" creationId="{00000000-0000-0000-0000-000000000000}"/>
-          </ac:spMkLst>
-        </pc:spChg>
-        <pc:spChg chg="del">
-          <ac:chgData name="Umesh Nikam" userId="S::umesh.nikam@softdel.com::5fee19d9-82ef-4b27-8766-eff6e0932e5e" providerId="AD" clId="Web-{00000000-0000-0000-0000-000000000000}" dt="2026-10-05T13:50:40.228" v="231"/>
-          <ac:spMkLst>
-            <pc:docMk/>
-            <pc:sldMk cId="0" sldId="4728"/>
-            <ac:spMk id="4" creationId="{00000000-0000-0000-0000-000000000000}"/>
-          </ac:spMkLst>
-        </pc:spChg>
-        <pc:spChg chg="mod">
-          <ac:chgData name="Umesh Nikam" userId="S::umesh.nikam@softdel.com::5fee19d9-82ef-4b27-8766-eff6e0932e5e" providerId="AD" clId="Web-{00000000-0000-0000-0000-000000000000}" dt="2026-10-05T13:50:52.822" v="233" actId="1076"/>
-          <ac:spMkLst>
-            <pc:docMk/>
-            <pc:sldMk cId="0" sldId="4728"/>
-            <ac:spMk id="5" creationId="{00000000-0000-0000-0000-000000000000}"/>
-          </ac:spMkLst>
-        </pc:spChg>
-        <pc:spChg chg="mod">
-          <ac:chgData name="Umesh Nikam" userId="S::umesh.nikam@softdel.com::5fee19d9-82ef-4b27-8766-eff6e0932e5e" providerId="AD" clId="Web-{00000000-0000-0000-0000-000000000000}" dt="2026-10-05T13:50:52.853" v="234" actId="1076"/>
-          <ac:spMkLst>
-            <pc:docMk/>
-            <pc:sldMk cId="0" sldId="4728"/>
-            <ac:spMk id="6" creationId="{00000000-0000-0000-0000-000000000000}"/>
-          </ac:spMkLst>
-        </pc:spChg>
-        <pc:spChg chg="del">
-          <ac:chgData name="Umesh Nikam" userId="S::umesh.nikam@softdel.com::5fee19d9-82ef-4b27-8766-eff6e0932e5e" providerId="AD" clId="Web-{00000000-0000-0000-0000-000000000000}" dt="2026-10-05T13:50:36.791" v="230"/>
-          <ac:spMkLst>
-            <pc:docMk/>
-            <pc:sldMk cId="0" sldId="4728"/>
-            <ac:spMk id="7" creationId="{00000000-0000-0000-0000-000000000000}"/>
-          </ac:spMkLst>
-        </pc:spChg>
-        <pc:spChg chg="mod">
-          <ac:chgData name="Umesh Nikam" userId="S::umesh.nikam@softdel.com::5fee19d9-82ef-4b27-8766-eff6e0932e5e" providerId="AD" clId="Web-{00000000-0000-0000-0000-000000000000}" dt="2026-10-05T13:50:52.869" v="235" actId="1076"/>
-          <ac:spMkLst>
-            <pc:docMk/>
-            <pc:sldMk cId="0" sldId="4728"/>
-            <ac:spMk id="8" creationId="{00000000-0000-0000-0000-000000000000}"/>
-          </ac:spMkLst>
-        </pc:spChg>
-        <pc:spChg chg="mod">
-          <ac:chgData name="Umesh Nikam" userId="S::umesh.nikam@softdel.com::5fee19d9-82ef-4b27-8766-eff6e0932e5e" providerId="AD" clId="Web-{00000000-0000-0000-0000-000000000000}" dt="2026-10-05T13:51:24.854" v="284" actId="20577"/>
-          <ac:spMkLst>
-            <pc:docMk/>
-            <pc:sldMk cId="0" sldId="4728"/>
-            <ac:spMk id="9" creationId="{00000000-0000-0000-0000-000000000000}"/>
-          </ac:spMkLst>
-        </pc:spChg>
-        <pc:spChg chg="del mod">
-          <ac:chgData name="Umesh Nikam" userId="S::umesh.nikam@softdel.com::5fee19d9-82ef-4b27-8766-eff6e0932e5e" providerId="AD" clId="Web-{00000000-0000-0000-0000-000000000000}" dt="2026-10-05T13:51:08.744" v="280"/>
-          <ac:spMkLst>
-            <pc:docMk/>
-            <pc:sldMk cId="0" sldId="4728"/>
-            <ac:spMk id="10" creationId="{00000000-0000-0000-0000-000000000000}"/>
-          </ac:spMkLst>
-        </pc:spChg>
-        <pc:spChg chg="mod">
-          <ac:chgData name="Umesh Nikam" userId="S::umesh.nikam@softdel.com::5fee19d9-82ef-4b27-8766-eff6e0932e5e" providerId="AD" clId="Web-{00000000-0000-0000-0000-000000000000}" dt="2026-10-05T13:50:52.947" v="238" actId="1076"/>
-          <ac:spMkLst>
-            <pc:docMk/>
-            <pc:sldMk cId="0" sldId="4728"/>
-            <ac:spMk id="11" creationId="{00000000-0000-0000-0000-000000000000}"/>
-          </ac:spMkLst>
-        </pc:spChg>
-        <pc:spChg chg="mod">
-          <ac:chgData name="Umesh Nikam" userId="S::umesh.nikam@softdel.com::5fee19d9-82ef-4b27-8766-eff6e0932e5e" providerId="AD" clId="Web-{00000000-0000-0000-0000-000000000000}" dt="2026-10-05T13:50:52.963" v="239" actId="1076"/>
-          <ac:spMkLst>
-            <pc:docMk/>
-            <pc:sldMk cId="0" sldId="4728"/>
-            <ac:spMk id="12" creationId="{00000000-0000-0000-0000-000000000000}"/>
-          </ac:spMkLst>
-        </pc:spChg>
-        <pc:spChg chg="del">
-          <ac:chgData name="Umesh Nikam" userId="S::umesh.nikam@softdel.com::5fee19d9-82ef-4b27-8766-eff6e0932e5e" providerId="AD" clId="Web-{00000000-0000-0000-0000-000000000000}" dt="2026-10-05T13:50:36.791" v="229"/>
-          <ac:spMkLst>
-            <pc:docMk/>
-            <pc:sldMk cId="0" sldId="4728"/>
-            <ac:spMk id="13" creationId="{00000000-0000-0000-0000-000000000000}"/>
-          </ac:spMkLst>
-        </pc:spChg>
-        <pc:spChg chg="mod">
-          <ac:chgData name="Umesh Nikam" userId="S::umesh.nikam@softdel.com::5fee19d9-82ef-4b27-8766-eff6e0932e5e" providerId="AD" clId="Web-{00000000-0000-0000-0000-000000000000}" dt="2026-10-05T13:50:52.994" v="240" actId="1076"/>
-          <ac:spMkLst>
-            <pc:docMk/>
-            <pc:sldMk cId="0" sldId="4728"/>
-            <ac:spMk id="14" creationId="{00000000-0000-0000-0000-000000000000}"/>
-          </ac:spMkLst>
-        </pc:spChg>
-        <pc:spChg chg="mod">
-          <ac:chgData name="Umesh Nikam" userId="S::umesh.nikam@softdel.com::5fee19d9-82ef-4b27-8766-eff6e0932e5e" providerId="AD" clId="Web-{00000000-0000-0000-0000-000000000000}" dt="2026-10-05T13:51:40.370" v="288" actId="20577"/>
-          <ac:spMkLst>
-            <pc:docMk/>
-            <pc:sldMk cId="0" sldId="4728"/>
-            <ac:spMk id="15" creationId="{00000000-0000-0000-0000-000000000000}"/>
-          </ac:spMkLst>
-        </pc:spChg>
-        <pc:spChg chg="del mod">
-          <ac:chgData name="Umesh Nikam" userId="S::umesh.nikam@softdel.com::5fee19d9-82ef-4b27-8766-eff6e0932e5e" providerId="AD" clId="Web-{00000000-0000-0000-0000-000000000000}" dt="2026-10-05T13:51:08.744" v="279"/>
-          <ac:spMkLst>
-            <pc:docMk/>
-            <pc:sldMk cId="0" sldId="4728"/>
-            <ac:spMk id="16" creationId="{00000000-0000-0000-0000-000000000000}"/>
-          </ac:spMkLst>
-        </pc:spChg>
-        <pc:spChg chg="mod">
-          <ac:chgData name="Umesh Nikam" userId="S::umesh.nikam@softdel.com::5fee19d9-82ef-4b27-8766-eff6e0932e5e" providerId="AD" clId="Web-{00000000-0000-0000-0000-000000000000}" dt="2026-10-05T13:50:53.057" v="243" actId="1076"/>
-          <ac:spMkLst>
-            <pc:docMk/>
-            <pc:sldMk cId="0" sldId="4728"/>
-            <ac:spMk id="17" creationId="{00000000-0000-0000-0000-000000000000}"/>
-          </ac:spMkLst>
-        </pc:spChg>
-        <pc:spChg chg="mod">
-          <ac:chgData name="Umesh Nikam" userId="S::umesh.nikam@softdel.com::5fee19d9-82ef-4b27-8766-eff6e0932e5e" providerId="AD" clId="Web-{00000000-0000-0000-0000-000000000000}" dt="2026-10-05T13:50:53.088" v="244" actId="1076"/>
-          <ac:spMkLst>
-            <pc:docMk/>
-            <pc:sldMk cId="0" sldId="4728"/>
-            <ac:spMk id="18" creationId="{00000000-0000-0000-0000-000000000000}"/>
-          </ac:spMkLst>
-        </pc:spChg>
-        <pc:spChg chg="del">
-          <ac:chgData name="Umesh Nikam" userId="S::umesh.nikam@softdel.com::5fee19d9-82ef-4b27-8766-eff6e0932e5e" providerId="AD" clId="Web-{00000000-0000-0000-0000-000000000000}" dt="2026-10-05T13:50:36.791" v="228"/>
-          <ac:spMkLst>
-            <pc:docMk/>
-            <pc:sldMk cId="0" sldId="4728"/>
-            <ac:spMk id="19" creationId="{00000000-0000-0000-0000-000000000000}"/>
-          </ac:spMkLst>
-        </pc:spChg>
-        <pc:spChg chg="mod">
-          <ac:chgData name="Umesh Nikam" userId="S::umesh.nikam@softdel.com::5fee19d9-82ef-4b27-8766-eff6e0932e5e" providerId="AD" clId="Web-{00000000-0000-0000-0000-000000000000}" dt="2026-10-05T13:50:53.103" v="245" actId="1076"/>
-          <ac:spMkLst>
-            <pc:docMk/>
-            <pc:sldMk cId="0" sldId="4728"/>
-            <ac:spMk id="20" creationId="{00000000-0000-0000-0000-000000000000}"/>
-          </ac:spMkLst>
-        </pc:spChg>
-        <pc:spChg chg="mod">
-          <ac:chgData name="Umesh Nikam" userId="S::umesh.nikam@softdel.com::5fee19d9-82ef-4b27-8766-eff6e0932e5e" providerId="AD" clId="Web-{00000000-0000-0000-0000-000000000000}" dt="2026-10-05T13:51:49.026" v="291" actId="20577"/>
-          <ac:spMkLst>
-            <pc:docMk/>
-            <pc:sldMk cId="0" sldId="4728"/>
-            <ac:spMk id="21" creationId="{00000000-0000-0000-0000-000000000000}"/>
-          </ac:spMkLst>
-        </pc:spChg>
-        <pc:spChg chg="del mod">
-          <ac:chgData name="Umesh Nikam" userId="S::umesh.nikam@softdel.com::5fee19d9-82ef-4b27-8766-eff6e0932e5e" providerId="AD" clId="Web-{00000000-0000-0000-0000-000000000000}" dt="2026-10-05T13:51:08.744" v="278"/>
-          <ac:spMkLst>
-            <pc:docMk/>
-            <pc:sldMk cId="0" sldId="4728"/>
-            <ac:spMk id="22" creationId="{00000000-0000-0000-0000-000000000000}"/>
-          </ac:spMkLst>
-        </pc:spChg>
-        <pc:spChg chg="mod">
-          <ac:chgData name="Umesh Nikam" userId="S::umesh.nikam@softdel.com::5fee19d9-82ef-4b27-8766-eff6e0932e5e" providerId="AD" clId="Web-{00000000-0000-0000-0000-000000000000}" dt="2026-10-05T13:50:53.182" v="248" actId="1076"/>
-          <ac:spMkLst>
-            <pc:docMk/>
-            <pc:sldMk cId="0" sldId="4728"/>
-            <ac:spMk id="23" creationId="{00000000-0000-0000-0000-000000000000}"/>
-          </ac:spMkLst>
-        </pc:spChg>
-        <pc:spChg chg="mod">
-          <ac:chgData name="Umesh Nikam" userId="S::umesh.nikam@softdel.com::5fee19d9-82ef-4b27-8766-eff6e0932e5e" providerId="AD" clId="Web-{00000000-0000-0000-0000-000000000000}" dt="2026-10-05T13:50:53.197" v="249" actId="1076"/>
-          <ac:spMkLst>
-            <pc:docMk/>
-            <pc:sldMk cId="0" sldId="4728"/>
-            <ac:spMk id="24" creationId="{00000000-0000-0000-0000-000000000000}"/>
-          </ac:spMkLst>
-        </pc:spChg>
-        <pc:spChg chg="del">
-          <ac:chgData name="Umesh Nikam" userId="S::umesh.nikam@softdel.com::5fee19d9-82ef-4b27-8766-eff6e0932e5e" providerId="AD" clId="Web-{00000000-0000-0000-0000-000000000000}" dt="2026-10-05T13:50:36.791" v="227"/>
-          <ac:spMkLst>
-            <pc:docMk/>
-            <pc:sldMk cId="0" sldId="4728"/>
-            <ac:spMk id="25" creationId="{00000000-0000-0000-0000-000000000000}"/>
-          </ac:spMkLst>
-        </pc:spChg>
-        <pc:spChg chg="mod">
-          <ac:chgData name="Umesh Nikam" userId="S::umesh.nikam@softdel.com::5fee19d9-82ef-4b27-8766-eff6e0932e5e" providerId="AD" clId="Web-{00000000-0000-0000-0000-000000000000}" dt="2026-10-05T13:50:53.228" v="250" actId="1076"/>
-          <ac:spMkLst>
-            <pc:docMk/>
-            <pc:sldMk cId="0" sldId="4728"/>
-            <ac:spMk id="26" creationId="{00000000-0000-0000-0000-000000000000}"/>
-          </ac:spMkLst>
-        </pc:spChg>
-        <pc:spChg chg="mod">
-          <ac:chgData name="Umesh Nikam" userId="S::umesh.nikam@softdel.com::5fee19d9-82ef-4b27-8766-eff6e0932e5e" providerId="AD" clId="Web-{00000000-0000-0000-0000-000000000000}" dt="2026-10-05T13:52:03.198" v="294" actId="20577"/>
-          <ac:spMkLst>
-            <pc:docMk/>
-            <pc:sldMk cId="0" sldId="4728"/>
-            <ac:spMk id="27" creationId="{00000000-0000-0000-0000-000000000000}"/>
-          </ac:spMkLst>
-        </pc:spChg>
-        <pc:spChg chg="del mod">
-          <ac:chgData name="Umesh Nikam" userId="S::umesh.nikam@softdel.com::5fee19d9-82ef-4b27-8766-eff6e0932e5e" providerId="AD" clId="Web-{00000000-0000-0000-0000-000000000000}" dt="2026-10-05T13:51:08.744" v="277"/>
-          <ac:spMkLst>
-            <pc:docMk/>
-            <pc:sldMk cId="0" sldId="4728"/>
-            <ac:spMk id="28" creationId="{00000000-0000-0000-0000-000000000000}"/>
-          </ac:spMkLst>
-        </pc:spChg>
-        <pc:spChg chg="mod">
-          <ac:chgData name="Umesh Nikam" userId="S::umesh.nikam@softdel.com::5fee19d9-82ef-4b27-8766-eff6e0932e5e" providerId="AD" clId="Web-{00000000-0000-0000-0000-000000000000}" dt="2026-10-05T13:50:53.291" v="253" actId="1076"/>
-          <ac:spMkLst>
-            <pc:docMk/>
-            <pc:sldMk cId="0" sldId="4728"/>
-            <ac:spMk id="29" creationId="{00000000-0000-0000-0000-000000000000}"/>
-          </ac:spMkLst>
-        </pc:spChg>
-        <pc:spChg chg="mod">
-          <ac:chgData name="Umesh Nikam" userId="S::umesh.nikam@softdel.com::5fee19d9-82ef-4b27-8766-eff6e0932e5e" providerId="AD" clId="Web-{00000000-0000-0000-0000-000000000000}" dt="2026-10-05T13:50:53.322" v="254" actId="1076"/>
-          <ac:spMkLst>
-            <pc:docMk/>
-            <pc:sldMk cId="0" sldId="4728"/>
-            <ac:spMk id="30" creationId="{00000000-0000-0000-0000-000000000000}"/>
-          </ac:spMkLst>
-        </pc:spChg>
-        <pc:spChg chg="del">
-          <ac:chgData name="Umesh Nikam" userId="S::umesh.nikam@softdel.com::5fee19d9-82ef-4b27-8766-eff6e0932e5e" providerId="AD" clId="Web-{00000000-0000-0000-0000-000000000000}" dt="2026-10-05T13:50:36.791" v="226"/>
-          <ac:spMkLst>
-            <pc:docMk/>
-            <pc:sldMk cId="0" sldId="4728"/>
-            <ac:spMk id="31" creationId="{00000000-0000-0000-0000-000000000000}"/>
-          </ac:spMkLst>
-        </pc:spChg>
-        <pc:spChg chg="mod">
-          <ac:chgData name="Umesh Nikam" userId="S::umesh.nikam@softdel.com::5fee19d9-82ef-4b27-8766-eff6e0932e5e" providerId="AD" clId="Web-{00000000-0000-0000-0000-000000000000}" dt="2026-10-05T13:50:53.338" v="255" actId="1076"/>
-          <ac:spMkLst>
-            <pc:docMk/>
-            <pc:sldMk cId="0" sldId="4728"/>
-            <ac:spMk id="32" creationId="{00000000-0000-0000-0000-000000000000}"/>
-          </ac:spMkLst>
-        </pc:spChg>
-        <pc:spChg chg="mod">
-          <ac:chgData name="Umesh Nikam" userId="S::umesh.nikam@softdel.com::5fee19d9-82ef-4b27-8766-eff6e0932e5e" providerId="AD" clId="Web-{00000000-0000-0000-0000-000000000000}" dt="2026-10-05T13:55:25.856" v="314" actId="20577"/>
-          <ac:spMkLst>
-            <pc:docMk/>
-            <pc:sldMk cId="0" sldId="4728"/>
-            <ac:spMk id="33" creationId="{00000000-0000-0000-0000-000000000000}"/>
-          </ac:spMkLst>
-        </pc:spChg>
-        <pc:spChg chg="del mod">
-          <ac:chgData name="Umesh Nikam" userId="S::umesh.nikam@softdel.com::5fee19d9-82ef-4b27-8766-eff6e0932e5e" providerId="AD" clId="Web-{00000000-0000-0000-0000-000000000000}" dt="2026-10-05T13:51:08.744" v="276"/>
-          <ac:spMkLst>
-            <pc:docMk/>
-            <pc:sldMk cId="0" sldId="4728"/>
-            <ac:spMk id="34" creationId="{00000000-0000-0000-0000-000000000000}"/>
-          </ac:spMkLst>
-        </pc:spChg>
-        <pc:spChg chg="mod">
-          <ac:chgData name="Umesh Nikam" userId="S::umesh.nikam@softdel.com::5fee19d9-82ef-4b27-8766-eff6e0932e5e" providerId="AD" clId="Web-{00000000-0000-0000-0000-000000000000}" dt="2026-10-05T13:50:53.416" v="258" actId="1076"/>
-          <ac:spMkLst>
-            <pc:docMk/>
-            <pc:sldMk cId="0" sldId="4728"/>
-            <ac:spMk id="35" creationId="{00000000-0000-0000-0000-000000000000}"/>
-          </ac:spMkLst>
-        </pc:spChg>
-        <pc:spChg chg="mod">
-          <ac:chgData name="Umesh Nikam" userId="S::umesh.nikam@softdel.com::5fee19d9-82ef-4b27-8766-eff6e0932e5e" providerId="AD" clId="Web-{00000000-0000-0000-0000-000000000000}" dt="2026-10-05T13:50:53.432" v="259" actId="1076"/>
-          <ac:spMkLst>
-            <pc:docMk/>
-            <pc:sldMk cId="0" sldId="4728"/>
-            <ac:spMk id="36" creationId="{00000000-0000-0000-0000-000000000000}"/>
-          </ac:spMkLst>
-        </pc:spChg>
-        <pc:spChg chg="del">
-          <ac:chgData name="Umesh Nikam" userId="S::umesh.nikam@softdel.com::5fee19d9-82ef-4b27-8766-eff6e0932e5e" providerId="AD" clId="Web-{00000000-0000-0000-0000-000000000000}" dt="2026-10-05T13:50:36.791" v="225"/>
-          <ac:spMkLst>
-            <pc:docMk/>
-            <pc:sldMk cId="0" sldId="4728"/>
-            <ac:spMk id="37" creationId="{00000000-0000-0000-0000-000000000000}"/>
-          </ac:spMkLst>
-        </pc:spChg>
-        <pc:spChg chg="mod">
-          <ac:chgData name="Umesh Nikam" userId="S::umesh.nikam@softdel.com::5fee19d9-82ef-4b27-8766-eff6e0932e5e" providerId="AD" clId="Web-{00000000-0000-0000-0000-000000000000}" dt="2026-10-05T13:55:45.106" v="320" actId="20577"/>
-          <ac:spMkLst>
-            <pc:docMk/>
-            <pc:sldMk cId="0" sldId="4728"/>
-            <ac:spMk id="38" creationId="{00000000-0000-0000-0000-000000000000}"/>
-          </ac:spMkLst>
-        </pc:spChg>
-        <pc:spChg chg="mod">
-          <ac:chgData name="Umesh Nikam" userId="S::umesh.nikam@softdel.com::5fee19d9-82ef-4b27-8766-eff6e0932e5e" providerId="AD" clId="Web-{00000000-0000-0000-0000-000000000000}" dt="2026-10-05T13:50:53.478" v="261" actId="1076"/>
-          <ac:spMkLst>
-            <pc:docMk/>
-            <pc:sldMk cId="0" sldId="4728"/>
-            <ac:spMk id="39" creationId="{00000000-0000-0000-0000-000000000000}"/>
-          </ac:spMkLst>
-        </pc:spChg>
-        <pc:spChg chg="del mod">
-          <ac:chgData name="Umesh Nikam" userId="S::umesh.nikam@softdel.com::5fee19d9-82ef-4b27-8766-eff6e0932e5e" providerId="AD" clId="Web-{00000000-0000-0000-0000-000000000000}" dt="2026-10-05T13:51:08.744" v="275"/>
-          <ac:spMkLst>
-            <pc:docMk/>
-            <pc:sldMk cId="0" sldId="4728"/>
-            <ac:spMk id="40" creationId="{00000000-0000-0000-0000-000000000000}"/>
-          </ac:spMkLst>
-        </pc:spChg>
-        <pc:spChg chg="mod">
-          <ac:chgData name="Umesh Nikam" userId="S::umesh.nikam@softdel.com::5fee19d9-82ef-4b27-8766-eff6e0932e5e" providerId="AD" clId="Web-{00000000-0000-0000-0000-000000000000}" dt="2026-10-05T13:50:53.525" v="263" actId="1076"/>
-          <ac:spMkLst>
-            <pc:docMk/>
-            <pc:sldMk cId="0" sldId="4728"/>
-            <ac:spMk id="41" creationId="{00000000-0000-0000-0000-000000000000}"/>
-          </ac:spMkLst>
-        </pc:spChg>
-        <pc:spChg chg="mod">
-          <ac:chgData name="Umesh Nikam" userId="S::umesh.nikam@softdel.com::5fee19d9-82ef-4b27-8766-eff6e0932e5e" providerId="AD" clId="Web-{00000000-0000-0000-0000-000000000000}" dt="2026-10-05T13:50:53.557" v="264" actId="1076"/>
-          <ac:spMkLst>
-            <pc:docMk/>
-            <pc:sldMk cId="0" sldId="4728"/>
-            <ac:spMk id="42" creationId="{00000000-0000-0000-0000-000000000000}"/>
-          </ac:spMkLst>
-        </pc:spChg>
-        <pc:spChg chg="del">
-          <ac:chgData name="Umesh Nikam" userId="S::umesh.nikam@softdel.com::5fee19d9-82ef-4b27-8766-eff6e0932e5e" providerId="AD" clId="Web-{00000000-0000-0000-0000-000000000000}" dt="2026-10-05T13:50:36.791" v="224"/>
-          <ac:spMkLst>
-            <pc:docMk/>
-            <pc:sldMk cId="0" sldId="4728"/>
-            <ac:spMk id="43" creationId="{00000000-0000-0000-0000-000000000000}"/>
-          </ac:spMkLst>
-        </pc:spChg>
-        <pc:spChg chg="mod">
-          <ac:chgData name="Umesh Nikam" userId="S::umesh.nikam@softdel.com::5fee19d9-82ef-4b27-8766-eff6e0932e5e" providerId="AD" clId="Web-{00000000-0000-0000-0000-000000000000}" dt="2026-10-05T13:50:53.572" v="265" actId="1076"/>
-          <ac:spMkLst>
-            <pc:docMk/>
-            <pc:sldMk cId="0" sldId="4728"/>
-            <ac:spMk id="44" creationId="{00000000-0000-0000-0000-000000000000}"/>
-          </ac:spMkLst>
-        </pc:spChg>
-        <pc:spChg chg="mod">
-          <ac:chgData name="Umesh Nikam" userId="S::umesh.nikam@softdel.com::5fee19d9-82ef-4b27-8766-eff6e0932e5e" providerId="AD" clId="Web-{00000000-0000-0000-0000-000000000000}" dt="2026-10-05T13:50:53.603" v="266" actId="1076"/>
-          <ac:spMkLst>
-            <pc:docMk/>
-            <pc:sldMk cId="0" sldId="4728"/>
-            <ac:spMk id="45" creationId="{00000000-0000-0000-0000-000000000000}"/>
-          </ac:spMkLst>
-        </pc:spChg>
-        <pc:spChg chg="del mod">
-          <ac:chgData name="Umesh Nikam" userId="S::umesh.nikam@softdel.com::5fee19d9-82ef-4b27-8766-eff6e0932e5e" providerId="AD" clId="Web-{00000000-0000-0000-0000-000000000000}" dt="2026-10-05T13:51:08.744" v="274"/>
-          <ac:spMkLst>
-            <pc:docMk/>
-            <pc:sldMk cId="0" sldId="4728"/>
-            <ac:spMk id="46" creationId="{00000000-0000-0000-0000-000000000000}"/>
-          </ac:spMkLst>
-        </pc:spChg>
-        <pc:spChg chg="mod">
-          <ac:chgData name="Umesh Nikam" userId="S::umesh.nikam@softdel.com::5fee19d9-82ef-4b27-8766-eff6e0932e5e" providerId="AD" clId="Web-{00000000-0000-0000-0000-000000000000}" dt="2026-10-05T13:50:53.650" v="268" actId="1076"/>
-          <ac:spMkLst>
-            <pc:docMk/>
-            <pc:sldMk cId="0" sldId="4728"/>
-            <ac:spMk id="47" creationId="{00000000-0000-0000-0000-000000000000}"/>
-          </ac:spMkLst>
-        </pc:spChg>
-        <pc:spChg chg="mod">
-          <ac:chgData name="Umesh Nikam" userId="S::umesh.nikam@softdel.com::5fee19d9-82ef-4b27-8766-eff6e0932e5e" providerId="AD" clId="Web-{00000000-0000-0000-0000-000000000000}" dt="2026-10-05T13:50:53.666" v="269" actId="1076"/>
-          <ac:spMkLst>
-            <pc:docMk/>
-            <pc:sldMk cId="0" sldId="4728"/>
-            <ac:spMk id="48" creationId="{00000000-0000-0000-0000-000000000000}"/>
-          </ac:spMkLst>
-        </pc:spChg>
-        <pc:spChg chg="del">
-          <ac:chgData name="Umesh Nikam" userId="S::umesh.nikam@softdel.com::5fee19d9-82ef-4b27-8766-eff6e0932e5e" providerId="AD" clId="Web-{00000000-0000-0000-0000-000000000000}" dt="2026-10-05T13:50:36.791" v="223"/>
-          <ac:spMkLst>
-            <pc:docMk/>
-            <pc:sldMk cId="0" sldId="4728"/>
-            <ac:spMk id="49" creationId="{00000000-0000-0000-0000-000000000000}"/>
-          </ac:spMkLst>
-        </pc:spChg>
-        <pc:spChg chg="mod">
-          <ac:chgData name="Umesh Nikam" userId="S::umesh.nikam@softdel.com::5fee19d9-82ef-4b27-8766-eff6e0932e5e" providerId="AD" clId="Web-{00000000-0000-0000-0000-000000000000}" dt="2026-10-05T13:50:53.697" v="270" actId="1076"/>
-          <ac:spMkLst>
-            <pc:docMk/>
-            <pc:sldMk cId="0" sldId="4728"/>
-            <ac:spMk id="50" creationId="{00000000-0000-0000-0000-000000000000}"/>
-          </ac:spMkLst>
-        </pc:spChg>
-        <pc:spChg chg="mod">
-          <ac:chgData name="Umesh Nikam" userId="S::umesh.nikam@softdel.com::5fee19d9-82ef-4b27-8766-eff6e0932e5e" providerId="AD" clId="Web-{00000000-0000-0000-0000-000000000000}" dt="2026-10-05T14:12:01.540" v="433" actId="20577"/>
-          <ac:spMkLst>
-            <pc:docMk/>
-            <pc:sldMk cId="0" sldId="4728"/>
-            <ac:spMk id="51" creationId="{00000000-0000-0000-0000-000000000000}"/>
-          </ac:spMkLst>
-        </pc:spChg>
-        <pc:spChg chg="del mod">
-          <ac:chgData name="Umesh Nikam" userId="S::umesh.nikam@softdel.com::5fee19d9-82ef-4b27-8766-eff6e0932e5e" providerId="AD" clId="Web-{00000000-0000-0000-0000-000000000000}" dt="2026-10-05T13:51:08.729" v="273"/>
-          <ac:spMkLst>
-            <pc:docMk/>
-            <pc:sldMk cId="0" sldId="4728"/>
-            <ac:spMk id="52" creationId="{00000000-0000-0000-0000-000000000000}"/>
-          </ac:spMkLst>
-        </pc:spChg>
-      </pc:sldChg>
-      <pc:sldChg chg="delSp modSp">
-        <pc:chgData name="Umesh Nikam" userId="S::umesh.nikam@softdel.com::5fee19d9-82ef-4b27-8766-eff6e0932e5e" providerId="AD" clId="Web-{00000000-0000-0000-0000-000000000000}" dt="2026-10-05T14:05:12.099" v="424" actId="20577"/>
-        <pc:sldMkLst>
-          <pc:docMk/>
-          <pc:sldMk cId="0" sldId="4730"/>
-        </pc:sldMkLst>
-        <pc:spChg chg="mod">
-          <ac:chgData name="Umesh Nikam" userId="S::umesh.nikam@softdel.com::5fee19d9-82ef-4b27-8766-eff6e0932e5e" providerId="AD" clId="Web-{00000000-0000-0000-0000-000000000000}" dt="2026-10-05T14:04:51.739" v="415" actId="20577"/>
-          <ac:spMkLst>
-            <pc:docMk/>
-            <pc:sldMk cId="0" sldId="4730"/>
-            <ac:spMk id="2" creationId="{00000000-0000-0000-0000-000000000000}"/>
-          </ac:spMkLst>
-        </pc:spChg>
-        <pc:spChg chg="del">
-          <ac:chgData name="Umesh Nikam" userId="S::umesh.nikam@softdel.com::5fee19d9-82ef-4b27-8766-eff6e0932e5e" providerId="AD" clId="Web-{00000000-0000-0000-0000-000000000000}" dt="2026-10-05T13:57:23.484" v="347"/>
-          <ac:spMkLst>
-            <pc:docMk/>
-            <pc:sldMk cId="0" sldId="4730"/>
-            <ac:spMk id="3" creationId="{00000000-0000-0000-0000-000000000000}"/>
-          </ac:spMkLst>
-        </pc:spChg>
-        <pc:spChg chg="del">
-          <ac:chgData name="Umesh Nikam" userId="S::umesh.nikam@softdel.com::5fee19d9-82ef-4b27-8766-eff6e0932e5e" providerId="AD" clId="Web-{00000000-0000-0000-0000-000000000000}" dt="2026-10-05T13:57:26.328" v="348"/>
-          <ac:spMkLst>
-            <pc:docMk/>
-            <pc:sldMk cId="0" sldId="4730"/>
-            <ac:spMk id="4" creationId="{00000000-0000-0000-0000-000000000000}"/>
-          </ac:spMkLst>
-        </pc:spChg>
-        <pc:spChg chg="mod">
-          <ac:chgData name="Umesh Nikam" userId="S::umesh.nikam@softdel.com::5fee19d9-82ef-4b27-8766-eff6e0932e5e" providerId="AD" clId="Web-{00000000-0000-0000-0000-000000000000}" dt="2026-10-05T13:57:31.469" v="349" actId="1076"/>
-          <ac:spMkLst>
-            <pc:docMk/>
-            <pc:sldMk cId="0" sldId="4730"/>
-            <ac:spMk id="5" creationId="{00000000-0000-0000-0000-000000000000}"/>
-          </ac:spMkLst>
-        </pc:spChg>
-        <pc:spChg chg="mod">
-          <ac:chgData name="Umesh Nikam" userId="S::umesh.nikam@softdel.com::5fee19d9-82ef-4b27-8766-eff6e0932e5e" providerId="AD" clId="Web-{00000000-0000-0000-0000-000000000000}" dt="2026-10-05T13:57:31.500" v="350" actId="1076"/>
-          <ac:spMkLst>
-            <pc:docMk/>
-            <pc:sldMk cId="0" sldId="4730"/>
-            <ac:spMk id="6" creationId="{00000000-0000-0000-0000-000000000000}"/>
-          </ac:spMkLst>
-        </pc:spChg>
-        <pc:spChg chg="mod">
-          <ac:chgData name="Umesh Nikam" userId="S::umesh.nikam@softdel.com::5fee19d9-82ef-4b27-8766-eff6e0932e5e" providerId="AD" clId="Web-{00000000-0000-0000-0000-000000000000}" dt="2026-10-05T14:05:05.833" v="418" actId="20577"/>
-          <ac:spMkLst>
-            <pc:docMk/>
-            <pc:sldMk cId="0" sldId="4730"/>
-            <ac:spMk id="7" creationId="{00000000-0000-0000-0000-000000000000}"/>
-          </ac:spMkLst>
-        </pc:spChg>
-        <pc:spChg chg="mod">
-          <ac:chgData name="Umesh Nikam" userId="S::umesh.nikam@softdel.com::5fee19d9-82ef-4b27-8766-eff6e0932e5e" providerId="AD" clId="Web-{00000000-0000-0000-0000-000000000000}" dt="2026-10-05T13:57:31.547" v="352" actId="1076"/>
-          <ac:spMkLst>
-            <pc:docMk/>
-            <pc:sldMk cId="0" sldId="4730"/>
-            <ac:spMk id="8" creationId="{00000000-0000-0000-0000-000000000000}"/>
-          </ac:spMkLst>
-        </pc:spChg>
-        <pc:spChg chg="mod">
-          <ac:chgData name="Umesh Nikam" userId="S::umesh.nikam@softdel.com::5fee19d9-82ef-4b27-8766-eff6e0932e5e" providerId="AD" clId="Web-{00000000-0000-0000-0000-000000000000}" dt="2026-10-05T13:57:31.562" v="353" actId="1076"/>
-          <ac:spMkLst>
-            <pc:docMk/>
-            <pc:sldMk cId="0" sldId="4730"/>
-            <ac:spMk id="9" creationId="{00000000-0000-0000-0000-000000000000}"/>
-          </ac:spMkLst>
-        </pc:spChg>
-        <pc:spChg chg="mod">
-          <ac:chgData name="Umesh Nikam" userId="S::umesh.nikam@softdel.com::5fee19d9-82ef-4b27-8766-eff6e0932e5e" providerId="AD" clId="Web-{00000000-0000-0000-0000-000000000000}" dt="2026-10-05T13:57:31.578" v="354" actId="1076"/>
-          <ac:spMkLst>
-            <pc:docMk/>
-            <pc:sldMk cId="0" sldId="4730"/>
-            <ac:spMk id="10" creationId="{00000000-0000-0000-0000-000000000000}"/>
-          </ac:spMkLst>
-        </pc:spChg>
-        <pc:spChg chg="mod">
-          <ac:chgData name="Umesh Nikam" userId="S::umesh.nikam@softdel.com::5fee19d9-82ef-4b27-8766-eff6e0932e5e" providerId="AD" clId="Web-{00000000-0000-0000-0000-000000000000}" dt="2026-10-05T14:05:07.692" v="421" actId="20577"/>
-          <ac:spMkLst>
-            <pc:docMk/>
-            <pc:sldMk cId="0" sldId="4730"/>
-            <ac:spMk id="11" creationId="{00000000-0000-0000-0000-000000000000}"/>
-          </ac:spMkLst>
-        </pc:spChg>
-        <pc:spChg chg="mod">
-          <ac:chgData name="Umesh Nikam" userId="S::umesh.nikam@softdel.com::5fee19d9-82ef-4b27-8766-eff6e0932e5e" providerId="AD" clId="Web-{00000000-0000-0000-0000-000000000000}" dt="2026-10-05T13:58:58.032" v="373" actId="20577"/>
-          <ac:spMkLst>
-            <pc:docMk/>
-            <pc:sldMk cId="0" sldId="4730"/>
-            <ac:spMk id="12" creationId="{00000000-0000-0000-0000-000000000000}"/>
-          </ac:spMkLst>
-        </pc:spChg>
-        <pc:spChg chg="mod">
-          <ac:chgData name="Umesh Nikam" userId="S::umesh.nikam@softdel.com::5fee19d9-82ef-4b27-8766-eff6e0932e5e" providerId="AD" clId="Web-{00000000-0000-0000-0000-000000000000}" dt="2026-10-05T13:57:31.641" v="357" actId="1076"/>
-          <ac:spMkLst>
-            <pc:docMk/>
-            <pc:sldMk cId="0" sldId="4730"/>
-            <ac:spMk id="13" creationId="{00000000-0000-0000-0000-000000000000}"/>
-          </ac:spMkLst>
-        </pc:spChg>
-        <pc:spChg chg="mod">
-          <ac:chgData name="Umesh Nikam" userId="S::umesh.nikam@softdel.com::5fee19d9-82ef-4b27-8766-eff6e0932e5e" providerId="AD" clId="Web-{00000000-0000-0000-0000-000000000000}" dt="2026-10-05T13:57:31.656" v="358" actId="1076"/>
-          <ac:spMkLst>
-            <pc:docMk/>
-            <pc:sldMk cId="0" sldId="4730"/>
-            <ac:spMk id="14" creationId="{00000000-0000-0000-0000-000000000000}"/>
-          </ac:spMkLst>
-        </pc:spChg>
-        <pc:spChg chg="mod">
-          <ac:chgData name="Umesh Nikam" userId="S::umesh.nikam@softdel.com::5fee19d9-82ef-4b27-8766-eff6e0932e5e" providerId="AD" clId="Web-{00000000-0000-0000-0000-000000000000}" dt="2026-10-05T14:05:12.099" v="424" actId="20577"/>
-          <ac:spMkLst>
-            <pc:docMk/>
-            <pc:sldMk cId="0" sldId="4730"/>
-            <ac:spMk id="15" creationId="{00000000-0000-0000-0000-000000000000}"/>
-          </ac:spMkLst>
-        </pc:spChg>
-        <pc:spChg chg="mod">
-          <ac:chgData name="Umesh Nikam" userId="S::umesh.nikam@softdel.com::5fee19d9-82ef-4b27-8766-eff6e0932e5e" providerId="AD" clId="Web-{00000000-0000-0000-0000-000000000000}" dt="2026-10-05T13:59:51.158" v="380" actId="20577"/>
-          <ac:spMkLst>
-            <pc:docMk/>
-            <pc:sldMk cId="0" sldId="4730"/>
-            <ac:spMk id="16" creationId="{00000000-0000-0000-0000-000000000000}"/>
-          </ac:spMkLst>
-        </pc:spChg>
-      </pc:sldChg>
-    </pc:docChg>
-  </pc:docChgLst>
-  <pc:docChgLst>
-    <pc:chgData name="Umesh Nikam" userId="S::umesh.nikam@softdel.com::5fee19d9-82ef-4b27-8766-eff6e0932e5e" providerId="AD" clId="Web-{30E625D5-8A9F-DC8D-211C-5C93C51AE2FF}"/>
-    <pc:docChg chg="modSld">
-      <pc:chgData name="Umesh Nikam" userId="S::umesh.nikam@softdel.com::5fee19d9-82ef-4b27-8766-eff6e0932e5e" providerId="AD" clId="Web-{30E625D5-8A9F-DC8D-211C-5C93C51AE2FF}" dt="2026-10-05T12:03:48.914" v="81" actId="20577"/>
-      <pc:docMkLst>
-        <pc:docMk/>
-      </pc:docMkLst>
-      <pc:sldChg chg="modSp">
-        <pc:chgData name="Umesh Nikam" userId="S::umesh.nikam@softdel.com::5fee19d9-82ef-4b27-8766-eff6e0932e5e" providerId="AD" clId="Web-{30E625D5-8A9F-DC8D-211C-5C93C51AE2FF}" dt="2026-10-05T12:02:26.976" v="65" actId="20577"/>
-        <pc:sldMkLst>
-          <pc:docMk/>
-          <pc:sldMk cId="0" sldId="4722"/>
-        </pc:sldMkLst>
-        <pc:spChg chg="mod">
-          <ac:chgData name="Umesh Nikam" userId="S::umesh.nikam@softdel.com::5fee19d9-82ef-4b27-8766-eff6e0932e5e" providerId="AD" clId="Web-{30E625D5-8A9F-DC8D-211C-5C93C51AE2FF}" dt="2026-10-05T12:02:26.976" v="65" actId="20577"/>
-          <ac:spMkLst>
-            <pc:docMk/>
-            <pc:sldMk cId="0" sldId="4722"/>
-            <ac:spMk id="3" creationId="{00000000-0000-0000-0000-000000000000}"/>
-          </ac:spMkLst>
-        </pc:spChg>
-      </pc:sldChg>
-      <pc:sldChg chg="modSp">
-        <pc:chgData name="Umesh Nikam" userId="S::umesh.nikam@softdel.com::5fee19d9-82ef-4b27-8766-eff6e0932e5e" providerId="AD" clId="Web-{30E625D5-8A9F-DC8D-211C-5C93C51AE2FF}" dt="2026-10-05T12:03:27.179" v="78" actId="20577"/>
-        <pc:sldMkLst>
-          <pc:docMk/>
-          <pc:sldMk cId="0" sldId="4724"/>
-        </pc:sldMkLst>
-        <pc:spChg chg="mod">
-          <ac:chgData name="Umesh Nikam" userId="S::umesh.nikam@softdel.com::5fee19d9-82ef-4b27-8766-eff6e0932e5e" providerId="AD" clId="Web-{30E625D5-8A9F-DC8D-211C-5C93C51AE2FF}" dt="2026-10-05T12:03:27.179" v="78" actId="20577"/>
-          <ac:spMkLst>
-            <pc:docMk/>
-            <pc:sldMk cId="0" sldId="4724"/>
-            <ac:spMk id="2" creationId="{00000000-0000-0000-0000-000000000000}"/>
-          </ac:spMkLst>
-        </pc:spChg>
-      </pc:sldChg>
-      <pc:sldChg chg="modSp">
-        <pc:chgData name="Umesh Nikam" userId="S::umesh.nikam@softdel.com::5fee19d9-82ef-4b27-8766-eff6e0932e5e" providerId="AD" clId="Web-{30E625D5-8A9F-DC8D-211C-5C93C51AE2FF}" dt="2026-10-05T12:03:48.914" v="81" actId="20577"/>
-        <pc:sldMkLst>
-          <pc:docMk/>
-          <pc:sldMk cId="0" sldId="4725"/>
-        </pc:sldMkLst>
-        <pc:spChg chg="mod">
-          <ac:chgData name="Umesh Nikam" userId="S::umesh.nikam@softdel.com::5fee19d9-82ef-4b27-8766-eff6e0932e5e" providerId="AD" clId="Web-{30E625D5-8A9F-DC8D-211C-5C93C51AE2FF}" dt="2026-10-05T12:03:48.914" v="81" actId="20577"/>
-          <ac:spMkLst>
-            <pc:docMk/>
-            <pc:sldMk cId="0" sldId="4725"/>
-            <ac:spMk id="3" creationId="{00000000-0000-0000-0000-000000000000}"/>
-          </ac:spMkLst>
-        </pc:spChg>
-      </pc:sldChg>
-      <pc:sldChg chg="mod modShow">
-        <pc:chgData name="Umesh Nikam" userId="S::umesh.nikam@softdel.com::5fee19d9-82ef-4b27-8766-eff6e0932e5e" providerId="AD" clId="Web-{30E625D5-8A9F-DC8D-211C-5C93C51AE2FF}" dt="2026-10-05T11:48:59.582" v="16"/>
-        <pc:sldMkLst>
-          <pc:docMk/>
-          <pc:sldMk cId="0" sldId="4729"/>
-        </pc:sldMkLst>
-      </pc:sldChg>
-      <pc:sldChg chg="modSp">
-        <pc:chgData name="Umesh Nikam" userId="S::umesh.nikam@softdel.com::5fee19d9-82ef-4b27-8766-eff6e0932e5e" providerId="AD" clId="Web-{30E625D5-8A9F-DC8D-211C-5C93C51AE2FF}" dt="2026-10-05T11:58:36.413" v="58" actId="20577"/>
-        <pc:sldMkLst>
-          <pc:docMk/>
-          <pc:sldMk cId="0" sldId="4730"/>
-        </pc:sldMkLst>
-        <pc:spChg chg="mod">
-          <ac:chgData name="Umesh Nikam" userId="S::umesh.nikam@softdel.com::5fee19d9-82ef-4b27-8766-eff6e0932e5e" providerId="AD" clId="Web-{30E625D5-8A9F-DC8D-211C-5C93C51AE2FF}" dt="2026-10-05T11:58:36.413" v="58" actId="20577"/>
-          <ac:spMkLst>
-            <pc:docMk/>
-            <pc:sldMk cId="0" sldId="4730"/>
-            <ac:spMk id="8" creationId="{00000000-0000-0000-0000-000000000000}"/>
-          </ac:spMkLst>
-        </pc:spChg>
-        <pc:spChg chg="mod">
-          <ac:chgData name="Umesh Nikam" userId="S::umesh.nikam@softdel.com::5fee19d9-82ef-4b27-8766-eff6e0932e5e" providerId="AD" clId="Web-{30E625D5-8A9F-DC8D-211C-5C93C51AE2FF}" dt="2026-10-05T11:56:51.069" v="49" actId="20577"/>
-          <ac:spMkLst>
-            <pc:docMk/>
-            <pc:sldMk cId="0" sldId="4730"/>
-            <ac:spMk id="12" creationId="{00000000-0000-0000-0000-000000000000}"/>
-          </ac:spMkLst>
-        </pc:spChg>
-        <pc:spChg chg="mod">
-          <ac:chgData name="Umesh Nikam" userId="S::umesh.nikam@softdel.com::5fee19d9-82ef-4b27-8766-eff6e0932e5e" providerId="AD" clId="Web-{30E625D5-8A9F-DC8D-211C-5C93C51AE2FF}" dt="2026-10-05T11:56:37.616" v="36" actId="20577"/>
-          <ac:spMkLst>
-            <pc:docMk/>
-            <pc:sldMk cId="0" sldId="4730"/>
-            <ac:spMk id="16" creationId="{00000000-0000-0000-0000-000000000000}"/>
-          </ac:spMkLst>
-        </pc:spChg>
-      </pc:sldChg>
-      <pc:sldChg chg="mod modShow">
-        <pc:chgData name="Umesh Nikam" userId="S::umesh.nikam@softdel.com::5fee19d9-82ef-4b27-8766-eff6e0932e5e" providerId="AD" clId="Web-{30E625D5-8A9F-DC8D-211C-5C93C51AE2FF}" dt="2026-10-05T11:48:41.660" v="15"/>
-        <pc:sldMkLst>
-          <pc:docMk/>
-          <pc:sldMk cId="0" sldId="4731"/>
-        </pc:sldMkLst>
-      </pc:sldChg>
-    </pc:docChg>
-  </pc:docChgLst>
-  <pc:docChgLst>
-    <pc:chgData name="Umesh Nikam" userId="S::umesh.nikam@softdel.com::5fee19d9-82ef-4b27-8766-eff6e0932e5e" providerId="AD" clId="Web-{4F0559CF-19F3-D96B-912A-BAF7A4FE31F1}"/>
-    <pc:docChg chg="modSld">
-      <pc:chgData name="Umesh Nikam" userId="S::umesh.nikam@softdel.com::5fee19d9-82ef-4b27-8766-eff6e0932e5e" providerId="AD" clId="Web-{4F0559CF-19F3-D96B-912A-BAF7A4FE31F1}" dt="2026-10-06T06:19:19.203" v="29"/>
-      <pc:docMkLst>
-        <pc:docMk/>
-      </pc:docMkLst>
-      <pc:sldChg chg="modSp">
-        <pc:chgData name="Umesh Nikam" userId="S::umesh.nikam@softdel.com::5fee19d9-82ef-4b27-8766-eff6e0932e5e" providerId="AD" clId="Web-{4F0559CF-19F3-D96B-912A-BAF7A4FE31F1}" dt="2026-10-06T06:19:08.547" v="13"/>
-        <pc:sldMkLst>
-          <pc:docMk/>
-          <pc:sldMk cId="0" sldId="4726"/>
-        </pc:sldMkLst>
-        <pc:graphicFrameChg chg="mod modGraphic">
-          <ac:chgData name="Umesh Nikam" userId="S::umesh.nikam@softdel.com::5fee19d9-82ef-4b27-8766-eff6e0932e5e" providerId="AD" clId="Web-{4F0559CF-19F3-D96B-912A-BAF7A4FE31F1}" dt="2026-10-06T06:19:08.547" v="13"/>
-          <ac:graphicFrameMkLst>
-            <pc:docMk/>
-            <pc:sldMk cId="0" sldId="4726"/>
-            <ac:graphicFrameMk id="5" creationId="{00000000-0000-0000-0000-000000000000}"/>
-          </ac:graphicFrameMkLst>
-        </pc:graphicFrameChg>
-      </pc:sldChg>
-      <pc:sldChg chg="modSp">
-        <pc:chgData name="Umesh Nikam" userId="S::umesh.nikam@softdel.com::5fee19d9-82ef-4b27-8766-eff6e0932e5e" providerId="AD" clId="Web-{4F0559CF-19F3-D96B-912A-BAF7A4FE31F1}" dt="2026-10-06T06:19:19.203" v="29"/>
-        <pc:sldMkLst>
-          <pc:docMk/>
-          <pc:sldMk cId="0" sldId="4727"/>
-        </pc:sldMkLst>
-        <pc:graphicFrameChg chg="mod modGraphic">
-          <ac:chgData name="Umesh Nikam" userId="S::umesh.nikam@softdel.com::5fee19d9-82ef-4b27-8766-eff6e0932e5e" providerId="AD" clId="Web-{4F0559CF-19F3-D96B-912A-BAF7A4FE31F1}" dt="2026-10-06T06:19:19.203" v="29"/>
-          <ac:graphicFrameMkLst>
-            <pc:docMk/>
-            <pc:sldMk cId="0" sldId="4727"/>
-            <ac:graphicFrameMk id="5" creationId="{00000000-0000-0000-0000-000000000000}"/>
-          </ac:graphicFrameMkLst>
-        </pc:graphicFrameChg>
-      </pc:sldChg>
-    </pc:docChg>
-  </pc:docChgLst>
-</pc:chgInfo>
 </file>
 
 <file path=ppt/notesMasters/notesMaster1.xml><?xml version="1.0" encoding="utf-8"?>
@@ -8015,7 +6656,7 @@
 </file>
 
 <file path=ppt/slides/slide1.xml><?xml version="1.0" encoding="utf-8"?>
-<p:sld xmlns:a="http://schemas.openxmlformats.org/drawingml/2006/main" xmlns:p="http://schemas.openxmlformats.org/presentationml/2006/main" xmlns:r="http://schemas.openxmlformats.org/officeDocument/2006/relationships">
+<p:sld xmlns:a="http://schemas.openxmlformats.org/drawingml/2006/main" xmlns:r="http://schemas.openxmlformats.org/officeDocument/2006/relationships" xmlns:p="http://schemas.openxmlformats.org/presentationml/2006/main">
   <p:cSld>
     <p:spTree>
       <p:nvGrpSpPr>
@@ -8023,7 +6664,14 @@
         <p:cNvGrpSpPr/>
         <p:nvPr/>
       </p:nvGrpSpPr>
-      <p:grpSpPr/>
+      <p:grpSpPr>
+        <a:xfrm>
+          <a:off x="0" y="0"/>
+          <a:ext cx="0" cy="0"/>
+          <a:chOff x="0" y="0"/>
+          <a:chExt cx="0" cy="0"/>
+        </a:xfrm>
+      </p:grpSpPr>
       <p:sp>
         <p:nvSpPr>
           <p:cNvPr id="2" name="Title 1"/>
@@ -8054,7 +6702,7 @@
         <p:spPr>
           <a:xfrm>
             <a:off x="612648" y="5312664"/>
-            <a:ext cx="8229600" cy="411480"/>
+            <a:ext cx="8229600" cy="307777"/>
           </a:xfrm>
           <a:prstGeom prst="rect">
             <a:avLst/>
@@ -8062,20 +6710,20 @@
           <a:noFill/>
         </p:spPr>
         <p:txBody>
-          <a:bodyPr wrap="square" lIns="0" rIns="0" tIns="0" bIns="0" anchor="t">
+          <a:bodyPr wrap="square" lIns="0" tIns="0" rIns="0" bIns="0" anchor="t">
             <a:spAutoFit/>
           </a:bodyPr>
           <a:lstStyle/>
           <a:p>
             <a:pPr algn="l"/>
             <a:r>
-              <a:rPr sz="2000" b="1" i="1">
+              <a:rPr sz="2000" b="1" i="1" dirty="0">
                 <a:solidFill>
                   <a:srgbClr val="FFFFFF"/>
                 </a:solidFill>
                 <a:latin typeface="Calibri"/>
               </a:rPr>
-              <a:t>Demo by Umesh Nikam, AI/ML Engineer</a:t>
+              <a:t>by Umesh Nikam</a:t>
             </a:r>
           </a:p>
         </p:txBody>
@@ -8097,7 +6745,7 @@
           <a:noFill/>
         </p:spPr>
         <p:txBody>
-          <a:bodyPr wrap="square" lIns="0" rIns="0" tIns="0" bIns="0" anchor="t">
+          <a:bodyPr wrap="square" lIns="0" tIns="0" rIns="0" bIns="0" anchor="t">
             <a:spAutoFit/>
           </a:bodyPr>
           <a:lstStyle/>
@@ -8124,7 +6772,7 @@
 </file>
 
 <file path=ppt/slides/slide10.xml><?xml version="1.0" encoding="utf-8"?>
-<p:sld xmlns:a="http://schemas.openxmlformats.org/drawingml/2006/main" xmlns:p="http://schemas.openxmlformats.org/presentationml/2006/main" xmlns:r="http://schemas.openxmlformats.org/officeDocument/2006/relationships">
+<p:sld xmlns:a="http://schemas.openxmlformats.org/drawingml/2006/main" xmlns:r="http://schemas.openxmlformats.org/officeDocument/2006/relationships" xmlns:p="http://schemas.openxmlformats.org/presentationml/2006/main">
   <p:cSld>
     <p:spTree>
       <p:nvGrpSpPr>
@@ -8132,7 +6780,14 @@
         <p:cNvGrpSpPr/>
         <p:nvPr/>
       </p:nvGrpSpPr>
-      <p:grpSpPr/>
+      <p:grpSpPr>
+        <a:xfrm>
+          <a:off x="0" y="0"/>
+          <a:ext cx="0" cy="0"/>
+          <a:chOff x="0" y="0"/>
+          <a:chExt cx="0" cy="0"/>
+        </a:xfrm>
+      </p:grpSpPr>
       <p:sp>
         <p:nvSpPr>
           <p:cNvPr id="2" name="Title 1"/>
@@ -8163,7 +6818,7 @@
         <p:spPr>
           <a:xfrm>
             <a:off x="612648" y="5312664"/>
-            <a:ext cx="8229600" cy="411480"/>
+            <a:ext cx="8229600" cy="307777"/>
           </a:xfrm>
           <a:prstGeom prst="rect">
             <a:avLst/>
@@ -8171,21 +6826,36 @@
           <a:noFill/>
         </p:spPr>
         <p:txBody>
-          <a:bodyPr wrap="square" lIns="0" rIns="0" tIns="0" bIns="0" anchor="t">
+          <a:bodyPr wrap="square" lIns="0" tIns="0" rIns="0" bIns="0" anchor="t">
             <a:spAutoFit/>
           </a:bodyPr>
           <a:lstStyle/>
           <a:p>
             <a:pPr algn="l"/>
             <a:r>
-              <a:rPr sz="2000" b="1" i="1">
+              <a:rPr sz="2000" b="1" i="1" dirty="0">
                 <a:solidFill>
                   <a:srgbClr val="FFFFFF"/>
                 </a:solidFill>
                 <a:latin typeface="Calibri"/>
               </a:rPr>
-              <a:t>Questions and next steps</a:t>
+              <a:t>Question</a:t>
             </a:r>
+            <a:r>
+              <a:rPr lang="en-US" sz="2000" b="1" i="1" dirty="0">
+                <a:solidFill>
+                  <a:srgbClr val="FFFFFF"/>
+                </a:solidFill>
+                <a:latin typeface="Calibri"/>
+              </a:rPr>
+              <a:t>s</a:t>
+            </a:r>
+            <a:endParaRPr sz="2000" b="1" i="1" dirty="0">
+              <a:solidFill>
+                <a:srgbClr val="FFFFFF"/>
+              </a:solidFill>
+              <a:latin typeface="Calibri"/>
+            </a:endParaRPr>
           </a:p>
         </p:txBody>
       </p:sp>
@@ -8206,7 +6876,7 @@
           <a:noFill/>
         </p:spPr>
         <p:txBody>
-          <a:bodyPr wrap="square" lIns="0" rIns="0" tIns="0" bIns="0" anchor="t">
+          <a:bodyPr wrap="square" lIns="0" tIns="0" rIns="0" bIns="0" anchor="t">
             <a:spAutoFit/>
           </a:bodyPr>
           <a:lstStyle/>
@@ -8220,6 +6890,684 @@
                 <a:latin typeface="Calibri"/>
               </a:rPr>
               <a:t>8 October 2026</a:t>
+            </a:r>
+          </a:p>
+        </p:txBody>
+      </p:sp>
+    </p:spTree>
+  </p:cSld>
+  <p:clrMapOvr>
+    <a:masterClrMapping/>
+  </p:clrMapOvr>
+</p:sld>
+</file>
+
+<file path=ppt/slides/slide11.xml><?xml version="1.0" encoding="utf-8"?>
+<p:sld xmlns:a="http://schemas.openxmlformats.org/drawingml/2006/main" xmlns:r="http://schemas.openxmlformats.org/officeDocument/2006/relationships" xmlns:p="http://schemas.openxmlformats.org/presentationml/2006/main" show="0">
+  <p:cSld>
+    <p:spTree>
+      <p:nvGrpSpPr>
+        <p:cNvPr id="1" name=""/>
+        <p:cNvGrpSpPr/>
+        <p:nvPr/>
+      </p:nvGrpSpPr>
+      <p:grpSpPr>
+        <a:xfrm>
+          <a:off x="0" y="0"/>
+          <a:ext cx="0" cy="0"/>
+          <a:chOff x="0" y="0"/>
+          <a:chExt cx="0" cy="0"/>
+        </a:xfrm>
+      </p:grpSpPr>
+      <p:sp>
+        <p:nvSpPr>
+          <p:cNvPr id="2" name="Title 1"/>
+          <p:cNvSpPr>
+            <a:spLocks noGrp="1"/>
+          </p:cNvSpPr>
+          <p:nvPr>
+            <p:ph type="ctrTitle"/>
+          </p:nvPr>
+        </p:nvSpPr>
+        <p:spPr/>
+        <p:txBody>
+          <a:bodyPr/>
+          <a:lstStyle/>
+          <a:p>
+            <a:r>
+              <a:t>Status and Roadmap</a:t>
+            </a:r>
+          </a:p>
+        </p:txBody>
+      </p:sp>
+      <p:sp>
+        <p:nvSpPr>
+          <p:cNvPr id="3" name="Rounded Rectangle 2"/>
+          <p:cNvSpPr/>
+          <p:nvPr/>
+        </p:nvSpPr>
+        <p:spPr>
+          <a:xfrm>
+            <a:off x="548640" y="1892807"/>
+            <a:ext cx="4267200" cy="3931920"/>
+          </a:xfrm>
+          <a:prstGeom prst="roundRect">
+            <a:avLst>
+              <a:gd name="adj" fmla="val 6976"/>
+            </a:avLst>
+          </a:prstGeom>
+          <a:solidFill>
+            <a:srgbClr val="EAF4FC"/>
+          </a:solidFill>
+          <a:ln w="12700">
+            <a:solidFill>
+              <a:srgbClr val="0089CF"/>
+            </a:solidFill>
+          </a:ln>
+          <a:effectLst/>
+        </p:spPr>
+        <p:style>
+          <a:lnRef idx="1">
+            <a:schemeClr val="accent1"/>
+          </a:lnRef>
+          <a:fillRef idx="3">
+            <a:schemeClr val="accent1"/>
+          </a:fillRef>
+          <a:effectRef idx="2">
+            <a:schemeClr val="accent1"/>
+          </a:effectRef>
+          <a:fontRef idx="minor">
+            <a:schemeClr val="lt1"/>
+          </a:fontRef>
+        </p:style>
+        <p:txBody>
+          <a:bodyPr rtlCol="0" anchor="ctr"/>
+          <a:lstStyle/>
+          <a:p>
+            <a:pPr algn="ctr"/>
+            <a:endParaRPr/>
+          </a:p>
+        </p:txBody>
+      </p:sp>
+      <p:sp>
+        <p:nvSpPr>
+          <p:cNvPr id="4" name="Rounded Rectangle 3"/>
+          <p:cNvSpPr/>
+          <p:nvPr/>
+        </p:nvSpPr>
+        <p:spPr>
+          <a:xfrm>
+            <a:off x="731520" y="2075688"/>
+            <a:ext cx="3901440" cy="457200"/>
+          </a:xfrm>
+          <a:prstGeom prst="roundRect">
+            <a:avLst>
+              <a:gd name="adj" fmla="val 10000"/>
+            </a:avLst>
+          </a:prstGeom>
+          <a:solidFill>
+            <a:srgbClr val="00679B"/>
+          </a:solidFill>
+          <a:ln>
+            <a:noFill/>
+          </a:ln>
+          <a:effectLst/>
+        </p:spPr>
+        <p:style>
+          <a:lnRef idx="1">
+            <a:schemeClr val="accent1"/>
+          </a:lnRef>
+          <a:fillRef idx="3">
+            <a:schemeClr val="accent1"/>
+          </a:fillRef>
+          <a:effectRef idx="2">
+            <a:schemeClr val="accent1"/>
+          </a:effectRef>
+          <a:fontRef idx="minor">
+            <a:schemeClr val="lt1"/>
+          </a:fontRef>
+        </p:style>
+        <p:txBody>
+          <a:bodyPr rtlCol="0" anchor="ctr"/>
+          <a:lstStyle/>
+          <a:p>
+            <a:pPr algn="ctr"/>
+            <a:endParaRPr/>
+          </a:p>
+        </p:txBody>
+      </p:sp>
+      <p:sp>
+        <p:nvSpPr>
+          <p:cNvPr id="5" name="TextBox 4"/>
+          <p:cNvSpPr txBox="1"/>
+          <p:nvPr/>
+        </p:nvSpPr>
+        <p:spPr>
+          <a:xfrm>
+            <a:off x="731520" y="2075688"/>
+            <a:ext cx="3901440" cy="457200"/>
+          </a:xfrm>
+          <a:prstGeom prst="rect">
+            <a:avLst/>
+          </a:prstGeom>
+          <a:noFill/>
+        </p:spPr>
+        <p:txBody>
+          <a:bodyPr wrap="square" lIns="0" tIns="0" rIns="0" bIns="0" anchor="ctr">
+            <a:spAutoFit/>
+          </a:bodyPr>
+          <a:lstStyle/>
+          <a:p>
+            <a:pPr algn="ctr"/>
+            <a:r>
+              <a:rPr sz="1600" b="1" i="0">
+                <a:solidFill>
+                  <a:srgbClr val="FFFFFF"/>
+                </a:solidFill>
+                <a:latin typeface="Calibri"/>
+              </a:rPr>
+              <a:t>Today</a:t>
+            </a:r>
+          </a:p>
+        </p:txBody>
+      </p:sp>
+      <p:sp>
+        <p:nvSpPr>
+          <p:cNvPr id="6" name="TextBox 5"/>
+          <p:cNvSpPr txBox="1"/>
+          <p:nvPr/>
+        </p:nvSpPr>
+        <p:spPr>
+          <a:xfrm>
+            <a:off x="868680" y="2807208"/>
+            <a:ext cx="3627120" cy="2743200"/>
+          </a:xfrm>
+          <a:prstGeom prst="rect">
+            <a:avLst/>
+          </a:prstGeom>
+          <a:noFill/>
+        </p:spPr>
+        <p:txBody>
+          <a:bodyPr wrap="square" lIns="0" tIns="0" rIns="0" bIns="0" anchor="t">
+            <a:spAutoFit/>
+          </a:bodyPr>
+          <a:lstStyle/>
+          <a:p>
+            <a:pPr marL="274320" indent="-274320" algn="l">
+              <a:spcAft>
+                <a:spcPts val="800"/>
+              </a:spcAft>
+              <a:buChar char="•"/>
+            </a:pPr>
+            <a:r>
+              <a:rPr sz="1500" b="0" i="0">
+                <a:solidFill>
+                  <a:srgbClr val="595959"/>
+                </a:solidFill>
+                <a:latin typeface="Calibri"/>
+              </a:rPr>
+              <a:t>Full stack running locally on Docker</a:t>
+            </a:r>
+          </a:p>
+          <a:p>
+            <a:pPr marL="274320" indent="-274320" algn="l">
+              <a:spcAft>
+                <a:spcPts val="800"/>
+              </a:spcAft>
+              <a:buChar char="•"/>
+            </a:pPr>
+            <a:r>
+              <a:rPr sz="1500" b="0" i="0">
+                <a:solidFill>
+                  <a:srgbClr val="595959"/>
+                </a:solidFill>
+                <a:latin typeface="Calibri"/>
+              </a:rPr>
+              <a:t>Real pipeline and model training on all 3 farms</a:t>
+            </a:r>
+          </a:p>
+          <a:p>
+            <a:pPr marL="274320" indent="-274320" algn="l">
+              <a:spcAft>
+                <a:spcPts val="800"/>
+              </a:spcAft>
+              <a:buChar char="•"/>
+            </a:pPr>
+            <a:r>
+              <a:rPr sz="1500" b="0" i="0">
+                <a:solidFill>
+                  <a:srgbClr val="595959"/>
+                </a:solidFill>
+                <a:latin typeface="Calibri"/>
+              </a:rPr>
+              <a:t>Dashboard with RUL, forecasts and alerts</a:t>
+            </a:r>
+          </a:p>
+          <a:p>
+            <a:pPr marL="274320" indent="-274320" algn="l">
+              <a:spcAft>
+                <a:spcPts val="800"/>
+              </a:spcAft>
+              <a:buChar char="•"/>
+            </a:pPr>
+            <a:r>
+              <a:rPr sz="1500" b="0" i="0">
+                <a:solidFill>
+                  <a:srgbClr val="595959"/>
+                </a:solidFill>
+                <a:latin typeface="Calibri"/>
+              </a:rPr>
+              <a:t>Digital twin shows live data (not a physics model)</a:t>
+            </a:r>
+          </a:p>
+        </p:txBody>
+      </p:sp>
+      <p:sp>
+        <p:nvSpPr>
+          <p:cNvPr id="7" name="Rounded Rectangle 6"/>
+          <p:cNvSpPr/>
+          <p:nvPr/>
+        </p:nvSpPr>
+        <p:spPr>
+          <a:xfrm>
+            <a:off x="5181600" y="1892807"/>
+            <a:ext cx="4267200" cy="3931920"/>
+          </a:xfrm>
+          <a:prstGeom prst="roundRect">
+            <a:avLst>
+              <a:gd name="adj" fmla="val 6976"/>
+            </a:avLst>
+          </a:prstGeom>
+          <a:solidFill>
+            <a:srgbClr val="EAF4FC"/>
+          </a:solidFill>
+          <a:ln w="12700">
+            <a:solidFill>
+              <a:srgbClr val="0089CF"/>
+            </a:solidFill>
+          </a:ln>
+          <a:effectLst/>
+        </p:spPr>
+        <p:style>
+          <a:lnRef idx="1">
+            <a:schemeClr val="accent1"/>
+          </a:lnRef>
+          <a:fillRef idx="3">
+            <a:schemeClr val="accent1"/>
+          </a:fillRef>
+          <a:effectRef idx="2">
+            <a:schemeClr val="accent1"/>
+          </a:effectRef>
+          <a:fontRef idx="minor">
+            <a:schemeClr val="lt1"/>
+          </a:fontRef>
+        </p:style>
+        <p:txBody>
+          <a:bodyPr rtlCol="0" anchor="ctr"/>
+          <a:lstStyle/>
+          <a:p>
+            <a:pPr algn="ctr"/>
+            <a:endParaRPr/>
+          </a:p>
+        </p:txBody>
+      </p:sp>
+      <p:sp>
+        <p:nvSpPr>
+          <p:cNvPr id="8" name="Rounded Rectangle 7"/>
+          <p:cNvSpPr/>
+          <p:nvPr/>
+        </p:nvSpPr>
+        <p:spPr>
+          <a:xfrm>
+            <a:off x="5364480" y="2075688"/>
+            <a:ext cx="3901440" cy="457200"/>
+          </a:xfrm>
+          <a:prstGeom prst="roundRect">
+            <a:avLst>
+              <a:gd name="adj" fmla="val 10000"/>
+            </a:avLst>
+          </a:prstGeom>
+          <a:solidFill>
+            <a:srgbClr val="00679B"/>
+          </a:solidFill>
+          <a:ln>
+            <a:noFill/>
+          </a:ln>
+          <a:effectLst/>
+        </p:spPr>
+        <p:style>
+          <a:lnRef idx="1">
+            <a:schemeClr val="accent1"/>
+          </a:lnRef>
+          <a:fillRef idx="3">
+            <a:schemeClr val="accent1"/>
+          </a:fillRef>
+          <a:effectRef idx="2">
+            <a:schemeClr val="accent1"/>
+          </a:effectRef>
+          <a:fontRef idx="minor">
+            <a:schemeClr val="lt1"/>
+          </a:fontRef>
+        </p:style>
+        <p:txBody>
+          <a:bodyPr rtlCol="0" anchor="ctr"/>
+          <a:lstStyle/>
+          <a:p>
+            <a:pPr algn="ctr"/>
+            <a:endParaRPr/>
+          </a:p>
+        </p:txBody>
+      </p:sp>
+      <p:sp>
+        <p:nvSpPr>
+          <p:cNvPr id="9" name="TextBox 8"/>
+          <p:cNvSpPr txBox="1"/>
+          <p:nvPr/>
+        </p:nvSpPr>
+        <p:spPr>
+          <a:xfrm>
+            <a:off x="5364480" y="2075688"/>
+            <a:ext cx="3901440" cy="457200"/>
+          </a:xfrm>
+          <a:prstGeom prst="rect">
+            <a:avLst/>
+          </a:prstGeom>
+          <a:noFill/>
+        </p:spPr>
+        <p:txBody>
+          <a:bodyPr wrap="square" lIns="0" tIns="0" rIns="0" bIns="0" anchor="ctr">
+            <a:spAutoFit/>
+          </a:bodyPr>
+          <a:lstStyle/>
+          <a:p>
+            <a:pPr algn="ctr"/>
+            <a:r>
+              <a:rPr sz="1600" b="1" i="0">
+                <a:solidFill>
+                  <a:srgbClr val="FFFFFF"/>
+                </a:solidFill>
+                <a:latin typeface="Calibri"/>
+              </a:rPr>
+              <a:t>Next</a:t>
+            </a:r>
+          </a:p>
+        </p:txBody>
+      </p:sp>
+      <p:sp>
+        <p:nvSpPr>
+          <p:cNvPr id="10" name="TextBox 9"/>
+          <p:cNvSpPr txBox="1"/>
+          <p:nvPr/>
+        </p:nvSpPr>
+        <p:spPr>
+          <a:xfrm>
+            <a:off x="5501640" y="2807208"/>
+            <a:ext cx="3627120" cy="2743200"/>
+          </a:xfrm>
+          <a:prstGeom prst="rect">
+            <a:avLst/>
+          </a:prstGeom>
+          <a:noFill/>
+        </p:spPr>
+        <p:txBody>
+          <a:bodyPr wrap="square" lIns="0" tIns="0" rIns="0" bIns="0" anchor="t">
+            <a:spAutoFit/>
+          </a:bodyPr>
+          <a:lstStyle/>
+          <a:p>
+            <a:pPr marL="274320" indent="-274320" algn="l">
+              <a:spcAft>
+                <a:spcPts val="800"/>
+              </a:spcAft>
+              <a:buChar char="•"/>
+            </a:pPr>
+            <a:r>
+              <a:rPr sz="1500" b="0" i="0">
+                <a:solidFill>
+                  <a:srgbClr val="595959"/>
+                </a:solidFill>
+                <a:latin typeface="Calibri"/>
+              </a:rPr>
+              <a:t>Deploy the pipeline to AWS</a:t>
+            </a:r>
+          </a:p>
+          <a:p>
+            <a:pPr marL="274320" indent="-274320" algn="l">
+              <a:spcAft>
+                <a:spcPts val="800"/>
+              </a:spcAft>
+              <a:buChar char="•"/>
+            </a:pPr>
+            <a:r>
+              <a:rPr sz="1500" b="0" i="0">
+                <a:solidFill>
+                  <a:srgbClr val="595959"/>
+                </a:solidFill>
+                <a:latin typeface="Calibri"/>
+              </a:rPr>
+              <a:t>Retrain as new fault events come in</a:t>
+            </a:r>
+          </a:p>
+          <a:p>
+            <a:pPr marL="274320" indent="-274320" algn="l">
+              <a:spcAft>
+                <a:spcPts val="800"/>
+              </a:spcAft>
+              <a:buChar char="•"/>
+            </a:pPr>
+            <a:r>
+              <a:rPr sz="1500" b="0" i="0">
+                <a:solidFill>
+                  <a:srgbClr val="595959"/>
+                </a:solidFill>
+                <a:latin typeface="Calibri"/>
+              </a:rPr>
+              <a:t>Better vibration features for Farm B bearings</a:t>
+            </a:r>
+          </a:p>
+        </p:txBody>
+      </p:sp>
+      <p:sp>
+        <p:nvSpPr>
+          <p:cNvPr id="11" name="Rounded Rectangle 10"/>
+          <p:cNvSpPr/>
+          <p:nvPr/>
+        </p:nvSpPr>
+        <p:spPr>
+          <a:xfrm>
+            <a:off x="9814560" y="1892807"/>
+            <a:ext cx="4267200" cy="3931920"/>
+          </a:xfrm>
+          <a:prstGeom prst="roundRect">
+            <a:avLst>
+              <a:gd name="adj" fmla="val 6976"/>
+            </a:avLst>
+          </a:prstGeom>
+          <a:solidFill>
+            <a:srgbClr val="EAF4FC"/>
+          </a:solidFill>
+          <a:ln w="12700">
+            <a:solidFill>
+              <a:srgbClr val="0089CF"/>
+            </a:solidFill>
+          </a:ln>
+          <a:effectLst/>
+        </p:spPr>
+        <p:style>
+          <a:lnRef idx="1">
+            <a:schemeClr val="accent1"/>
+          </a:lnRef>
+          <a:fillRef idx="3">
+            <a:schemeClr val="accent1"/>
+          </a:fillRef>
+          <a:effectRef idx="2">
+            <a:schemeClr val="accent1"/>
+          </a:effectRef>
+          <a:fontRef idx="minor">
+            <a:schemeClr val="lt1"/>
+          </a:fontRef>
+        </p:style>
+        <p:txBody>
+          <a:bodyPr rtlCol="0" anchor="ctr"/>
+          <a:lstStyle/>
+          <a:p>
+            <a:pPr algn="ctr"/>
+            <a:endParaRPr/>
+          </a:p>
+        </p:txBody>
+      </p:sp>
+      <p:sp>
+        <p:nvSpPr>
+          <p:cNvPr id="12" name="Rounded Rectangle 11"/>
+          <p:cNvSpPr/>
+          <p:nvPr/>
+        </p:nvSpPr>
+        <p:spPr>
+          <a:xfrm>
+            <a:off x="9997440" y="2075688"/>
+            <a:ext cx="3901440" cy="457200"/>
+          </a:xfrm>
+          <a:prstGeom prst="roundRect">
+            <a:avLst>
+              <a:gd name="adj" fmla="val 10000"/>
+            </a:avLst>
+          </a:prstGeom>
+          <a:solidFill>
+            <a:srgbClr val="002060"/>
+          </a:solidFill>
+          <a:ln>
+            <a:noFill/>
+          </a:ln>
+          <a:effectLst/>
+        </p:spPr>
+        <p:style>
+          <a:lnRef idx="1">
+            <a:schemeClr val="accent1"/>
+          </a:lnRef>
+          <a:fillRef idx="3">
+            <a:schemeClr val="accent1"/>
+          </a:fillRef>
+          <a:effectRef idx="2">
+            <a:schemeClr val="accent1"/>
+          </a:effectRef>
+          <a:fontRef idx="minor">
+            <a:schemeClr val="lt1"/>
+          </a:fontRef>
+        </p:style>
+        <p:txBody>
+          <a:bodyPr rtlCol="0" anchor="ctr"/>
+          <a:lstStyle/>
+          <a:p>
+            <a:pPr algn="ctr"/>
+            <a:endParaRPr/>
+          </a:p>
+        </p:txBody>
+      </p:sp>
+      <p:sp>
+        <p:nvSpPr>
+          <p:cNvPr id="13" name="TextBox 12"/>
+          <p:cNvSpPr txBox="1"/>
+          <p:nvPr/>
+        </p:nvSpPr>
+        <p:spPr>
+          <a:xfrm>
+            <a:off x="9997440" y="2075688"/>
+            <a:ext cx="3901440" cy="457200"/>
+          </a:xfrm>
+          <a:prstGeom prst="rect">
+            <a:avLst/>
+          </a:prstGeom>
+          <a:noFill/>
+        </p:spPr>
+        <p:txBody>
+          <a:bodyPr wrap="square" lIns="0" tIns="0" rIns="0" bIns="0" anchor="ctr">
+            <a:spAutoFit/>
+          </a:bodyPr>
+          <a:lstStyle/>
+          <a:p>
+            <a:pPr algn="ctr"/>
+            <a:r>
+              <a:rPr sz="1600" b="1" i="0">
+                <a:solidFill>
+                  <a:srgbClr val="FFFFFF"/>
+                </a:solidFill>
+                <a:latin typeface="Calibri"/>
+              </a:rPr>
+              <a:t>Future Phase</a:t>
+            </a:r>
+          </a:p>
+        </p:txBody>
+      </p:sp>
+      <p:sp>
+        <p:nvSpPr>
+          <p:cNvPr id="14" name="TextBox 13"/>
+          <p:cNvSpPr txBox="1"/>
+          <p:nvPr/>
+        </p:nvSpPr>
+        <p:spPr>
+          <a:xfrm>
+            <a:off x="10134600" y="2807208"/>
+            <a:ext cx="3627120" cy="2743200"/>
+          </a:xfrm>
+          <a:prstGeom prst="rect">
+            <a:avLst/>
+          </a:prstGeom>
+          <a:noFill/>
+        </p:spPr>
+        <p:txBody>
+          <a:bodyPr wrap="square" lIns="0" tIns="0" rIns="0" bIns="0" anchor="t">
+            <a:spAutoFit/>
+          </a:bodyPr>
+          <a:lstStyle/>
+          <a:p>
+            <a:pPr marL="274320" indent="-274320" algn="l">
+              <a:spcAft>
+                <a:spcPts val="800"/>
+              </a:spcAft>
+              <a:buChar char="•"/>
+            </a:pPr>
+            <a:r>
+              <a:rPr sz="1500" b="0" i="0">
+                <a:solidFill>
+                  <a:srgbClr val="595959"/>
+                </a:solidFill>
+                <a:latin typeface="Calibri"/>
+              </a:rPr>
+              <a:t>Work orders linked to alerts</a:t>
+            </a:r>
+          </a:p>
+          <a:p>
+            <a:pPr marL="274320" indent="-274320" algn="l">
+              <a:spcAft>
+                <a:spcPts val="800"/>
+              </a:spcAft>
+              <a:buChar char="•"/>
+            </a:pPr>
+            <a:r>
+              <a:rPr sz="1500" b="0" i="0">
+                <a:solidFill>
+                  <a:srgbClr val="595959"/>
+                </a:solidFill>
+                <a:latin typeface="Calibri"/>
+              </a:rPr>
+              <a:t>Maintenance scheduling from RUL</a:t>
+            </a:r>
+          </a:p>
+          <a:p>
+            <a:pPr marL="274320" indent="-274320" algn="l">
+              <a:spcAft>
+                <a:spcPts val="800"/>
+              </a:spcAft>
+              <a:buChar char="•"/>
+            </a:pPr>
+            <a:r>
+              <a:rPr sz="1500" b="0" i="0">
+                <a:solidFill>
+                  <a:srgbClr val="595959"/>
+                </a:solidFill>
+                <a:latin typeface="Calibri"/>
+              </a:rPr>
+              <a:t>More sensor types and farms</a:t>
             </a:r>
           </a:p>
         </p:txBody>
@@ -8233,7 +7581,7 @@
 </file>
 
 <file path=ppt/slides/slide2.xml><?xml version="1.0" encoding="utf-8"?>
-<p:sld xmlns:a="http://schemas.openxmlformats.org/drawingml/2006/main" xmlns:p="http://schemas.openxmlformats.org/presentationml/2006/main" xmlns:r="http://schemas.openxmlformats.org/officeDocument/2006/relationships">
+<p:sld xmlns:a="http://schemas.openxmlformats.org/drawingml/2006/main" xmlns:r="http://schemas.openxmlformats.org/officeDocument/2006/relationships" xmlns:p="http://schemas.openxmlformats.org/presentationml/2006/main">
   <p:cSld>
     <p:spTree>
       <p:nvGrpSpPr>
@@ -8241,7 +7589,14 @@
         <p:cNvGrpSpPr/>
         <p:nvPr/>
       </p:nvGrpSpPr>
-      <p:grpSpPr/>
+      <p:grpSpPr>
+        <a:xfrm>
+          <a:off x="0" y="0"/>
+          <a:ext cx="0" cy="0"/>
+          <a:chOff x="0" y="0"/>
+          <a:chExt cx="0" cy="0"/>
+        </a:xfrm>
+      </p:grpSpPr>
       <p:sp>
         <p:nvSpPr>
           <p:cNvPr id="2" name="Title 1"/>
@@ -8308,19 +7663,20 @@
           <a:lstStyle/>
           <a:p>
             <a:pPr algn="ctr"/>
-          </a:p>
-        </p:txBody>
-      </p:sp>
-      <p:sp>
-        <p:nvSpPr>
-          <p:cNvPr id="4" name="TextBox 3"/>
+            <a:endParaRPr/>
+          </a:p>
+        </p:txBody>
+      </p:sp>
+      <p:sp>
+        <p:nvSpPr>
+          <p:cNvPr id="5" name="TextBox 4"/>
           <p:cNvSpPr txBox="1"/>
           <p:nvPr/>
         </p:nvSpPr>
         <p:spPr>
           <a:xfrm>
-            <a:off x="868680" y="2103120"/>
-            <a:ext cx="2468880" cy="731520"/>
+            <a:off x="708660" y="3486984"/>
+            <a:ext cx="2788920" cy="615553"/>
           </a:xfrm>
           <a:prstGeom prst="rect">
             <a:avLst/>
@@ -8328,49 +7684,14 @@
           <a:noFill/>
         </p:spPr>
         <p:txBody>
-          <a:bodyPr wrap="square" lIns="0" rIns="0" tIns="0" bIns="0" anchor="t">
+          <a:bodyPr wrap="square" lIns="0" tIns="0" rIns="0" bIns="0" anchor="t">
             <a:spAutoFit/>
           </a:bodyPr>
           <a:lstStyle/>
           <a:p>
             <a:pPr algn="l"/>
             <a:r>
-              <a:rPr sz="4400" b="1" i="0">
-                <a:solidFill>
-                  <a:srgbClr val="0089CF"/>
-                </a:solidFill>
-                <a:latin typeface="Calibri"/>
-              </a:rPr>
-              <a:t>01</a:t>
-            </a:r>
-          </a:p>
-        </p:txBody>
-      </p:sp>
-      <p:sp>
-        <p:nvSpPr>
-          <p:cNvPr id="5" name="TextBox 4"/>
-          <p:cNvSpPr txBox="1"/>
-          <p:nvPr/>
-        </p:nvSpPr>
-        <p:spPr>
-          <a:xfrm>
-            <a:off x="868680" y="3108960"/>
-            <a:ext cx="2468880" cy="822960"/>
-          </a:xfrm>
-          <a:prstGeom prst="rect">
-            <a:avLst/>
-          </a:prstGeom>
-          <a:noFill/>
-        </p:spPr>
-        <p:txBody>
-          <a:bodyPr wrap="square" lIns="0" rIns="0" tIns="0" bIns="0" anchor="t">
-            <a:spAutoFit/>
-          </a:bodyPr>
-          <a:lstStyle/>
-          <a:p>
-            <a:pPr algn="l"/>
-            <a:r>
-              <a:rPr sz="2000" b="1" i="0">
+              <a:rPr sz="4000" b="1" i="0" dirty="0">
                 <a:solidFill>
                   <a:srgbClr val="002060"/>
                 </a:solidFill>
@@ -8426,19 +7747,20 @@
           <a:lstStyle/>
           <a:p>
             <a:pPr algn="ctr"/>
-          </a:p>
-        </p:txBody>
-      </p:sp>
-      <p:sp>
-        <p:nvSpPr>
-          <p:cNvPr id="7" name="TextBox 6"/>
+            <a:endParaRPr/>
+          </a:p>
+        </p:txBody>
+      </p:sp>
+      <p:sp>
+        <p:nvSpPr>
+          <p:cNvPr id="8" name="TextBox 7"/>
           <p:cNvSpPr txBox="1"/>
           <p:nvPr/>
         </p:nvSpPr>
         <p:spPr>
           <a:xfrm>
-            <a:off x="4343400" y="2103120"/>
-            <a:ext cx="2468880" cy="731520"/>
+            <a:off x="4160520" y="3209985"/>
+            <a:ext cx="2971800" cy="1169551"/>
           </a:xfrm>
           <a:prstGeom prst="rect">
             <a:avLst/>
@@ -8446,56 +7768,27 @@
           <a:noFill/>
         </p:spPr>
         <p:txBody>
-          <a:bodyPr wrap="square" lIns="0" rIns="0" tIns="0" bIns="0" anchor="t">
+          <a:bodyPr wrap="square" lIns="0" tIns="0" rIns="0" bIns="0" anchor="t">
             <a:spAutoFit/>
           </a:bodyPr>
           <a:lstStyle/>
           <a:p>
-            <a:pPr algn="l"/>
+            <a:pPr algn="ctr"/>
             <a:r>
-              <a:rPr sz="4400" b="1" i="0">
-                <a:solidFill>
-                  <a:srgbClr val="0089CF"/>
+              <a:rPr lang="en-IN" sz="3800" b="1" i="0" dirty="0">
+                <a:solidFill>
+                  <a:srgbClr val="002060"/>
                 </a:solidFill>
                 <a:latin typeface="Calibri"/>
               </a:rPr>
-              <a:t>02</a:t>
+              <a:t>Supported Features</a:t>
             </a:r>
-          </a:p>
-        </p:txBody>
-      </p:sp>
-      <p:sp>
-        <p:nvSpPr>
-          <p:cNvPr id="8" name="TextBox 7"/>
-          <p:cNvSpPr txBox="1"/>
-          <p:nvPr/>
-        </p:nvSpPr>
-        <p:spPr>
-          <a:xfrm>
-            <a:off x="4343400" y="3108960"/>
-            <a:ext cx="2468880" cy="822960"/>
-          </a:xfrm>
-          <a:prstGeom prst="rect">
-            <a:avLst/>
-          </a:prstGeom>
-          <a:noFill/>
-        </p:spPr>
-        <p:txBody>
-          <a:bodyPr wrap="square" lIns="0" rIns="0" tIns="0" bIns="0" anchor="t">
-            <a:spAutoFit/>
-          </a:bodyPr>
-          <a:lstStyle/>
-          <a:p>
-            <a:pPr algn="l"/>
-            <a:r>
-              <a:rPr sz="2000" b="1" i="0">
-                <a:solidFill>
-                  <a:srgbClr val="002060"/>
-                </a:solidFill>
-                <a:latin typeface="Calibri"/>
-              </a:rPr>
-              <a:t>What the Platform Does</a:t>
-            </a:r>
+            <a:endParaRPr sz="3800" b="1" i="0" dirty="0">
+              <a:solidFill>
+                <a:srgbClr val="002060"/>
+              </a:solidFill>
+              <a:latin typeface="Calibri"/>
+            </a:endParaRPr>
           </a:p>
         </p:txBody>
       </p:sp>
@@ -8544,19 +7837,20 @@
           <a:lstStyle/>
           <a:p>
             <a:pPr algn="ctr"/>
-          </a:p>
-        </p:txBody>
-      </p:sp>
-      <p:sp>
-        <p:nvSpPr>
-          <p:cNvPr id="10" name="TextBox 9"/>
+            <a:endParaRPr/>
+          </a:p>
+        </p:txBody>
+      </p:sp>
+      <p:sp>
+        <p:nvSpPr>
+          <p:cNvPr id="11" name="TextBox 10"/>
           <p:cNvSpPr txBox="1"/>
           <p:nvPr/>
         </p:nvSpPr>
         <p:spPr>
           <a:xfrm>
-            <a:off x="7818120" y="2103120"/>
-            <a:ext cx="2468880" cy="731520"/>
+            <a:off x="7639929" y="3209985"/>
+            <a:ext cx="2825262" cy="584775"/>
           </a:xfrm>
           <a:prstGeom prst="rect">
             <a:avLst/>
@@ -8564,56 +7858,36 @@
           <a:noFill/>
         </p:spPr>
         <p:txBody>
-          <a:bodyPr wrap="square" lIns="0" rIns="0" tIns="0" bIns="0" anchor="t">
+          <a:bodyPr wrap="square" lIns="0" tIns="0" rIns="0" bIns="0" anchor="t">
             <a:spAutoFit/>
           </a:bodyPr>
           <a:lstStyle/>
           <a:p>
-            <a:pPr algn="l"/>
+            <a:pPr algn="ctr"/>
             <a:r>
-              <a:rPr sz="4400" b="1" i="0">
-                <a:solidFill>
-                  <a:srgbClr val="0089CF"/>
+              <a:rPr sz="3800" b="1" i="0" dirty="0">
+                <a:solidFill>
+                  <a:srgbClr val="002060"/>
                 </a:solidFill>
                 <a:latin typeface="Calibri"/>
               </a:rPr>
-              <a:t>03</a:t>
+              <a:t>Data </a:t>
             </a:r>
-          </a:p>
-        </p:txBody>
-      </p:sp>
-      <p:sp>
-        <p:nvSpPr>
-          <p:cNvPr id="11" name="TextBox 10"/>
-          <p:cNvSpPr txBox="1"/>
-          <p:nvPr/>
-        </p:nvSpPr>
-        <p:spPr>
-          <a:xfrm>
-            <a:off x="7818120" y="3108960"/>
-            <a:ext cx="2468880" cy="822960"/>
-          </a:xfrm>
-          <a:prstGeom prst="rect">
-            <a:avLst/>
-          </a:prstGeom>
-          <a:noFill/>
-        </p:spPr>
-        <p:txBody>
-          <a:bodyPr wrap="square" lIns="0" rIns="0" tIns="0" bIns="0" anchor="t">
-            <a:spAutoFit/>
-          </a:bodyPr>
-          <a:lstStyle/>
-          <a:p>
-            <a:pPr algn="l"/>
             <a:r>
-              <a:rPr sz="2000" b="1" i="0">
+              <a:rPr lang="en-US" sz="3800" b="1" i="0" dirty="0">
                 <a:solidFill>
                   <a:srgbClr val="002060"/>
                 </a:solidFill>
                 <a:latin typeface="Calibri"/>
               </a:rPr>
-              <a:t>What the Data Shows</a:t>
+              <a:t>Insights</a:t>
             </a:r>
+            <a:endParaRPr sz="3800" b="1" i="0" dirty="0">
+              <a:solidFill>
+                <a:srgbClr val="002060"/>
+              </a:solidFill>
+              <a:latin typeface="Calibri"/>
+            </a:endParaRPr>
           </a:p>
         </p:txBody>
       </p:sp>
@@ -8662,19 +7936,20 @@
           <a:lstStyle/>
           <a:p>
             <a:pPr algn="ctr"/>
-          </a:p>
-        </p:txBody>
-      </p:sp>
-      <p:sp>
-        <p:nvSpPr>
-          <p:cNvPr id="13" name="TextBox 12"/>
+            <a:endParaRPr/>
+          </a:p>
+        </p:txBody>
+      </p:sp>
+      <p:sp>
+        <p:nvSpPr>
+          <p:cNvPr id="14" name="TextBox 13"/>
           <p:cNvSpPr txBox="1"/>
           <p:nvPr/>
         </p:nvSpPr>
         <p:spPr>
           <a:xfrm>
-            <a:off x="11292840" y="2103120"/>
-            <a:ext cx="2468880" cy="731520"/>
+            <a:off x="11292840" y="3486984"/>
+            <a:ext cx="2468880" cy="615553"/>
           </a:xfrm>
           <a:prstGeom prst="rect">
             <a:avLst/>
@@ -8682,49 +7957,14 @@
           <a:noFill/>
         </p:spPr>
         <p:txBody>
-          <a:bodyPr wrap="square" lIns="0" rIns="0" tIns="0" bIns="0" anchor="t">
+          <a:bodyPr wrap="square" lIns="0" tIns="0" rIns="0" bIns="0" anchor="t">
             <a:spAutoFit/>
           </a:bodyPr>
           <a:lstStyle/>
           <a:p>
             <a:pPr algn="l"/>
             <a:r>
-              <a:rPr sz="4400" b="1" i="0">
-                <a:solidFill>
-                  <a:srgbClr val="0089CF"/>
-                </a:solidFill>
-                <a:latin typeface="Calibri"/>
-              </a:rPr>
-              <a:t>04</a:t>
-            </a:r>
-          </a:p>
-        </p:txBody>
-      </p:sp>
-      <p:sp>
-        <p:nvSpPr>
-          <p:cNvPr id="14" name="TextBox 13"/>
-          <p:cNvSpPr txBox="1"/>
-          <p:nvPr/>
-        </p:nvSpPr>
-        <p:spPr>
-          <a:xfrm>
-            <a:off x="11292840" y="3108960"/>
-            <a:ext cx="2468880" cy="822960"/>
-          </a:xfrm>
-          <a:prstGeom prst="rect">
-            <a:avLst/>
-          </a:prstGeom>
-          <a:noFill/>
-        </p:spPr>
-        <p:txBody>
-          <a:bodyPr wrap="square" lIns="0" rIns="0" tIns="0" bIns="0" anchor="t">
-            <a:spAutoFit/>
-          </a:bodyPr>
-          <a:lstStyle/>
-          <a:p>
-            <a:pPr algn="l"/>
-            <a:r>
-              <a:rPr sz="2000" b="1" i="0">
+              <a:rPr sz="4000" b="1" i="0" dirty="0">
                 <a:solidFill>
                   <a:srgbClr val="002060"/>
                 </a:solidFill>
@@ -8744,7 +7984,7 @@
 </file>
 
 <file path=ppt/slides/slide3.xml><?xml version="1.0" encoding="utf-8"?>
-<p:sld xmlns:a="http://schemas.openxmlformats.org/drawingml/2006/main" xmlns:p="http://schemas.openxmlformats.org/presentationml/2006/main" xmlns:r="http://schemas.openxmlformats.org/officeDocument/2006/relationships">
+<p:sld xmlns:a="http://schemas.openxmlformats.org/drawingml/2006/main" xmlns:r="http://schemas.openxmlformats.org/officeDocument/2006/relationships" xmlns:p="http://schemas.openxmlformats.org/presentationml/2006/main">
   <p:cSld>
     <p:spTree>
       <p:nvGrpSpPr>
@@ -8752,7 +7992,14 @@
         <p:cNvGrpSpPr/>
         <p:nvPr/>
       </p:nvGrpSpPr>
-      <p:grpSpPr/>
+      <p:grpSpPr>
+        <a:xfrm>
+          <a:off x="0" y="0"/>
+          <a:ext cx="0" cy="0"/>
+          <a:chOff x="0" y="0"/>
+          <a:chExt cx="0" cy="0"/>
+        </a:xfrm>
+      </p:grpSpPr>
       <p:sp>
         <p:nvSpPr>
           <p:cNvPr id="2" name="Title 1"/>
@@ -8783,7 +8030,7 @@
         <p:spPr>
           <a:xfrm>
             <a:off x="548640" y="1463040"/>
-            <a:ext cx="13533120" cy="822960"/>
+            <a:ext cx="13533120" cy="246221"/>
           </a:xfrm>
           <a:prstGeom prst="rect">
             <a:avLst/>
@@ -8791,20 +8038,56 @@
           <a:noFill/>
         </p:spPr>
         <p:txBody>
-          <a:bodyPr wrap="square" lIns="0" rIns="0" tIns="0" bIns="0" anchor="t">
+          <a:bodyPr wrap="square" lIns="0" tIns="0" rIns="0" bIns="0" anchor="t">
             <a:spAutoFit/>
           </a:bodyPr>
           <a:lstStyle/>
           <a:p>
             <a:pPr algn="l"/>
             <a:r>
-              <a:rPr sz="1600" b="0" i="0">
+              <a:rPr sz="1600" b="0" i="0" dirty="0">
                 <a:solidFill>
                   <a:srgbClr val="595959"/>
                 </a:solidFill>
                 <a:latin typeface="Calibri"/>
               </a:rPr>
-              <a:t>A gearbox, hydraulic system or pitch motor usually gives a signal before it breaks: a slow temperature rise, a pressure drop, a change in vibration. Today nobody watches those signals closely enough to catch the problem early.</a:t>
+              <a:t>A gearbox, hydraulic system or pitch motor usually gives a signal before it breaks</a:t>
+            </a:r>
+            <a:r>
+              <a:rPr lang="en-US" sz="1600" b="0" i="0" dirty="0">
+                <a:solidFill>
+                  <a:srgbClr val="595959"/>
+                </a:solidFill>
+                <a:latin typeface="Calibri"/>
+              </a:rPr>
+              <a:t>,</a:t>
+            </a:r>
+            <a:r>
+              <a:rPr sz="1600" b="0" i="0" dirty="0">
+                <a:solidFill>
+                  <a:srgbClr val="595959"/>
+                </a:solidFill>
+                <a:latin typeface="Calibri"/>
+              </a:rPr>
+              <a:t> </a:t>
+            </a:r>
+            <a:r>
+              <a:rPr lang="en-US" sz="1600" b="0" i="0" dirty="0">
+                <a:solidFill>
+                  <a:srgbClr val="595959"/>
+                </a:solidFill>
+                <a:latin typeface="Calibri"/>
+              </a:rPr>
+              <a:t>like </a:t>
+            </a:r>
+            <a:r>
+              <a:rPr sz="1600" b="0" i="0" dirty="0">
+                <a:solidFill>
+                  <a:srgbClr val="595959"/>
+                </a:solidFill>
+                <a:latin typeface="Calibri"/>
+              </a:rPr>
+              <a:t>a slow temperature rise, a pressure drop, a change in vibration.</a:t>
             </a:r>
           </a:p>
         </p:txBody>
@@ -8854,6 +8137,7 @@
           <a:lstStyle/>
           <a:p>
             <a:pPr algn="ctr"/>
+            <a:endParaRPr/>
           </a:p>
         </p:txBody>
       </p:sp>
@@ -8896,7 +8180,7 @@
           </a:fontRef>
         </p:style>
         <p:txBody>
-          <a:bodyPr rtlCol="0" anchor="ctr" lIns="0" rIns="0" tIns="0" bIns="0"/>
+          <a:bodyPr lIns="0" tIns="0" rIns="0" bIns="0" rtlCol="0" anchor="ctr"/>
           <a:lstStyle/>
           <a:p>
             <a:pPr algn="ctr"/>
@@ -8929,7 +8213,7 @@
           <a:noFill/>
         </p:spPr>
         <p:txBody>
-          <a:bodyPr wrap="square" lIns="0" rIns="0" tIns="0" bIns="0" anchor="t">
+          <a:bodyPr wrap="square" lIns="0" tIns="0" rIns="0" bIns="0" anchor="t">
             <a:spAutoFit/>
           </a:bodyPr>
           <a:lstStyle/>
@@ -8964,7 +8248,7 @@
           <a:noFill/>
         </p:spPr>
         <p:txBody>
-          <a:bodyPr wrap="square" lIns="0" rIns="0" tIns="0" bIns="0" anchor="t">
+          <a:bodyPr wrap="square" lIns="0" tIns="0" rIns="0" bIns="0" anchor="t">
             <a:spAutoFit/>
           </a:bodyPr>
           <a:lstStyle/>
@@ -9027,6 +8311,7 @@
           <a:lstStyle/>
           <a:p>
             <a:pPr algn="ctr"/>
+            <a:endParaRPr/>
           </a:p>
         </p:txBody>
       </p:sp>
@@ -9069,7 +8354,7 @@
           </a:fontRef>
         </p:style>
         <p:txBody>
-          <a:bodyPr rtlCol="0" anchor="ctr" lIns="0" rIns="0" tIns="0" bIns="0"/>
+          <a:bodyPr lIns="0" tIns="0" rIns="0" bIns="0" rtlCol="0" anchor="ctr"/>
           <a:lstStyle/>
           <a:p>
             <a:pPr algn="ctr"/>
@@ -9102,7 +8387,7 @@
           <a:noFill/>
         </p:spPr>
         <p:txBody>
-          <a:bodyPr wrap="square" lIns="0" rIns="0" tIns="0" bIns="0" anchor="t">
+          <a:bodyPr wrap="square" lIns="0" tIns="0" rIns="0" bIns="0" anchor="t">
             <a:spAutoFit/>
           </a:bodyPr>
           <a:lstStyle/>
@@ -9137,7 +8422,7 @@
           <a:noFill/>
         </p:spPr>
         <p:txBody>
-          <a:bodyPr wrap="square" lIns="0" rIns="0" tIns="0" bIns="0" anchor="t">
+          <a:bodyPr wrap="square" lIns="0" tIns="0" rIns="0" bIns="0" anchor="t">
             <a:spAutoFit/>
           </a:bodyPr>
           <a:lstStyle/>
@@ -9200,6 +8485,7 @@
           <a:lstStyle/>
           <a:p>
             <a:pPr algn="ctr"/>
+            <a:endParaRPr/>
           </a:p>
         </p:txBody>
       </p:sp>
@@ -9242,7 +8528,7 @@
           </a:fontRef>
         </p:style>
         <p:txBody>
-          <a:bodyPr rtlCol="0" anchor="ctr" lIns="0" rIns="0" tIns="0" bIns="0"/>
+          <a:bodyPr lIns="0" tIns="0" rIns="0" bIns="0" rtlCol="0" anchor="ctr"/>
           <a:lstStyle/>
           <a:p>
             <a:pPr algn="ctr"/>
@@ -9275,7 +8561,7 @@
           <a:noFill/>
         </p:spPr>
         <p:txBody>
-          <a:bodyPr wrap="square" lIns="0" rIns="0" tIns="0" bIns="0" anchor="t">
+          <a:bodyPr wrap="square" lIns="0" tIns="0" rIns="0" bIns="0" anchor="t">
             <a:spAutoFit/>
           </a:bodyPr>
           <a:lstStyle/>
@@ -9310,7 +8596,7 @@
           <a:noFill/>
         </p:spPr>
         <p:txBody>
-          <a:bodyPr wrap="square" lIns="0" rIns="0" tIns="0" bIns="0" anchor="t">
+          <a:bodyPr wrap="square" lIns="0" tIns="0" rIns="0" bIns="0" anchor="t">
             <a:spAutoFit/>
           </a:bodyPr>
           <a:lstStyle/>
@@ -9337,7 +8623,7 @@
 </file>
 
 <file path=ppt/slides/slide4.xml><?xml version="1.0" encoding="utf-8"?>
-<p:sld xmlns:a="http://schemas.openxmlformats.org/drawingml/2006/main" xmlns:p="http://schemas.openxmlformats.org/presentationml/2006/main" xmlns:r="http://schemas.openxmlformats.org/officeDocument/2006/relationships">
+<p:sld xmlns:a="http://schemas.openxmlformats.org/drawingml/2006/main" xmlns:r="http://schemas.openxmlformats.org/officeDocument/2006/relationships" xmlns:p="http://schemas.openxmlformats.org/presentationml/2006/main">
   <p:cSld>
     <p:spTree>
       <p:nvGrpSpPr>
@@ -9345,7 +8631,103 @@
         <p:cNvGrpSpPr/>
         <p:nvPr/>
       </p:nvGrpSpPr>
-      <p:grpSpPr/>
+      <p:grpSpPr>
+        <a:xfrm>
+          <a:off x="0" y="0"/>
+          <a:ext cx="0" cy="0"/>
+          <a:chOff x="0" y="0"/>
+          <a:chExt cx="0" cy="0"/>
+        </a:xfrm>
+      </p:grpSpPr>
+      <p:sp>
+        <p:nvSpPr>
+          <p:cNvPr id="2" name="Title 1">
+            <a:extLst>
+              <a:ext uri="{FF2B5EF4-FFF2-40B4-BE49-F238E27FC236}">
+                <a16:creationId xmlns:a16="http://schemas.microsoft.com/office/drawing/2014/main" id="{13E648B7-EA14-5F71-A3B1-A3D8F3041E65}"/>
+              </a:ext>
+            </a:extLst>
+          </p:cNvPr>
+          <p:cNvSpPr>
+            <a:spLocks noGrp="1"/>
+          </p:cNvSpPr>
+          <p:nvPr>
+            <p:ph type="ctrTitle"/>
+          </p:nvPr>
+        </p:nvSpPr>
+        <p:spPr/>
+        <p:txBody>
+          <a:bodyPr/>
+          <a:lstStyle/>
+          <a:p>
+            <a:r>
+              <a:rPr lang="en-US" dirty="0"/>
+              <a:t>Wind Turbine Architecture</a:t>
+            </a:r>
+            <a:endParaRPr lang="en-IN" dirty="0"/>
+          </a:p>
+        </p:txBody>
+      </p:sp>
+      <p:pic>
+        <p:nvPicPr>
+          <p:cNvPr id="6" name="Picture 5">
+            <a:extLst>
+              <a:ext uri="{FF2B5EF4-FFF2-40B4-BE49-F238E27FC236}">
+                <a16:creationId xmlns:a16="http://schemas.microsoft.com/office/drawing/2014/main" id="{C4149C48-3225-E2D7-F27C-F54E58636EA9}"/>
+              </a:ext>
+            </a:extLst>
+          </p:cNvPr>
+          <p:cNvPicPr>
+            <a:picLocks noChangeAspect="1"/>
+          </p:cNvPicPr>
+          <p:nvPr/>
+        </p:nvPicPr>
+        <p:blipFill>
+          <a:blip r:embed="rId2"/>
+          <a:stretch>
+            <a:fillRect/>
+          </a:stretch>
+        </p:blipFill>
+        <p:spPr>
+          <a:xfrm>
+            <a:off x="990600" y="1185561"/>
+            <a:ext cx="12650788" cy="6424228"/>
+          </a:xfrm>
+          <a:prstGeom prst="rect">
+            <a:avLst/>
+          </a:prstGeom>
+        </p:spPr>
+      </p:pic>
+    </p:spTree>
+    <p:extLst>
+      <p:ext uri="{BB962C8B-B14F-4D97-AF65-F5344CB8AC3E}">
+        <p14:creationId xmlns:p14="http://schemas.microsoft.com/office/powerpoint/2010/main" val="1453542068"/>
+      </p:ext>
+    </p:extLst>
+  </p:cSld>
+  <p:clrMapOvr>
+    <a:masterClrMapping/>
+  </p:clrMapOvr>
+</p:sld>
+</file>
+
+<file path=ppt/slides/slide5.xml><?xml version="1.0" encoding="utf-8"?>
+<p:sld xmlns:a="http://schemas.openxmlformats.org/drawingml/2006/main" xmlns:r="http://schemas.openxmlformats.org/officeDocument/2006/relationships" xmlns:p="http://schemas.openxmlformats.org/presentationml/2006/main">
+  <p:cSld>
+    <p:spTree>
+      <p:nvGrpSpPr>
+        <p:cNvPr id="1" name=""/>
+        <p:cNvGrpSpPr/>
+        <p:nvPr/>
+      </p:nvGrpSpPr>
+      <p:grpSpPr>
+        <a:xfrm>
+          <a:off x="0" y="0"/>
+          <a:ext cx="0" cy="0"/>
+          <a:chOff x="0" y="0"/>
+          <a:chExt cx="0" cy="0"/>
+        </a:xfrm>
+      </p:grpSpPr>
       <p:sp>
         <p:nvSpPr>
           <p:cNvPr id="2" name="Title 1"/>
@@ -9362,8 +8744,10 @@
           <a:lstStyle/>
           <a:p>
             <a:r>
-              <a:t>What the Platform Does</a:t>
+              <a:rPr lang="en-US" dirty="0"/>
+              <a:t>Supported Features</a:t>
             </a:r>
+            <a:endParaRPr dirty="0"/>
           </a:p>
         </p:txBody>
       </p:sp>
@@ -9412,6 +8796,7 @@
           <a:lstStyle/>
           <a:p>
             <a:pPr algn="ctr"/>
+            <a:endParaRPr/>
           </a:p>
         </p:txBody>
       </p:sp>
@@ -9454,7 +8839,7 @@
           </a:fontRef>
         </p:style>
         <p:txBody>
-          <a:bodyPr rtlCol="0" anchor="ctr" lIns="0" rIns="0" tIns="0" bIns="0"/>
+          <a:bodyPr lIns="0" tIns="0" rIns="0" bIns="0" rtlCol="0" anchor="ctr"/>
           <a:lstStyle/>
           <a:p>
             <a:pPr algn="ctr"/>
@@ -9487,7 +8872,7 @@
           <a:noFill/>
         </p:spPr>
         <p:txBody>
-          <a:bodyPr wrap="square" lIns="0" rIns="0" tIns="0" bIns="0" anchor="t">
+          <a:bodyPr wrap="square" lIns="0" tIns="0" rIns="0" bIns="0" anchor="t">
             <a:spAutoFit/>
           </a:bodyPr>
           <a:lstStyle/>
@@ -9522,7 +8907,7 @@
           <a:noFill/>
         </p:spPr>
         <p:txBody>
-          <a:bodyPr wrap="square" lIns="0" rIns="0" tIns="0" bIns="0" anchor="t">
+          <a:bodyPr wrap="square" lIns="0" tIns="0" rIns="0" bIns="0" anchor="t">
             <a:spAutoFit/>
           </a:bodyPr>
           <a:lstStyle/>
@@ -9585,6 +8970,7 @@
           <a:lstStyle/>
           <a:p>
             <a:pPr algn="ctr"/>
+            <a:endParaRPr/>
           </a:p>
         </p:txBody>
       </p:sp>
@@ -9627,7 +9013,7 @@
           </a:fontRef>
         </p:style>
         <p:txBody>
-          <a:bodyPr rtlCol="0" anchor="ctr" lIns="0" rIns="0" tIns="0" bIns="0"/>
+          <a:bodyPr lIns="0" tIns="0" rIns="0" bIns="0" rtlCol="0" anchor="ctr"/>
           <a:lstStyle/>
           <a:p>
             <a:pPr algn="ctr"/>
@@ -9660,7 +9046,7 @@
           <a:noFill/>
         </p:spPr>
         <p:txBody>
-          <a:bodyPr wrap="square" lIns="0" rIns="0" tIns="0" bIns="0" anchor="t">
+          <a:bodyPr wrap="square" lIns="0" tIns="0" rIns="0" bIns="0" anchor="t">
             <a:spAutoFit/>
           </a:bodyPr>
           <a:lstStyle/>
@@ -9695,7 +9081,7 @@
           <a:noFill/>
         </p:spPr>
         <p:txBody>
-          <a:bodyPr wrap="square" lIns="0" rIns="0" tIns="0" bIns="0" anchor="t">
+          <a:bodyPr wrap="square" lIns="0" tIns="0" rIns="0" bIns="0" anchor="t">
             <a:spAutoFit/>
           </a:bodyPr>
           <a:lstStyle/>
@@ -9758,6 +9144,7 @@
           <a:lstStyle/>
           <a:p>
             <a:pPr algn="ctr"/>
+            <a:endParaRPr/>
           </a:p>
         </p:txBody>
       </p:sp>
@@ -9800,7 +9187,7 @@
           </a:fontRef>
         </p:style>
         <p:txBody>
-          <a:bodyPr rtlCol="0" anchor="ctr" lIns="0" rIns="0" tIns="0" bIns="0"/>
+          <a:bodyPr lIns="0" tIns="0" rIns="0" bIns="0" rtlCol="0" anchor="ctr"/>
           <a:lstStyle/>
           <a:p>
             <a:pPr algn="ctr"/>
@@ -9833,7 +9220,7 @@
           <a:noFill/>
         </p:spPr>
         <p:txBody>
-          <a:bodyPr wrap="square" lIns="0" rIns="0" tIns="0" bIns="0" anchor="t">
+          <a:bodyPr wrap="square" lIns="0" tIns="0" rIns="0" bIns="0" anchor="t">
             <a:spAutoFit/>
           </a:bodyPr>
           <a:lstStyle/>
@@ -9868,7 +9255,7 @@
           <a:noFill/>
         </p:spPr>
         <p:txBody>
-          <a:bodyPr wrap="square" lIns="0" rIns="0" tIns="0" bIns="0" anchor="t">
+          <a:bodyPr wrap="square" lIns="0" tIns="0" rIns="0" bIns="0" anchor="t">
             <a:spAutoFit/>
           </a:bodyPr>
           <a:lstStyle/>
@@ -9931,6 +9318,7 @@
           <a:lstStyle/>
           <a:p>
             <a:pPr algn="ctr"/>
+            <a:endParaRPr/>
           </a:p>
         </p:txBody>
       </p:sp>
@@ -9973,7 +9361,7 @@
           </a:fontRef>
         </p:style>
         <p:txBody>
-          <a:bodyPr rtlCol="0" anchor="ctr" lIns="0" rIns="0" tIns="0" bIns="0"/>
+          <a:bodyPr lIns="0" tIns="0" rIns="0" bIns="0" rtlCol="0" anchor="ctr"/>
           <a:lstStyle/>
           <a:p>
             <a:pPr algn="ctr"/>
@@ -10006,7 +9394,7 @@
           <a:noFill/>
         </p:spPr>
         <p:txBody>
-          <a:bodyPr wrap="square" lIns="0" rIns="0" tIns="0" bIns="0" anchor="t">
+          <a:bodyPr wrap="square" lIns="0" tIns="0" rIns="0" bIns="0" anchor="t">
             <a:spAutoFit/>
           </a:bodyPr>
           <a:lstStyle/>
@@ -10041,7 +9429,7 @@
           <a:noFill/>
         </p:spPr>
         <p:txBody>
-          <a:bodyPr wrap="square" lIns="0" rIns="0" tIns="0" bIns="0" anchor="t">
+          <a:bodyPr wrap="square" lIns="0" tIns="0" rIns="0" bIns="0" anchor="t">
             <a:spAutoFit/>
           </a:bodyPr>
           <a:lstStyle/>
@@ -10104,6 +9492,7 @@
           <a:lstStyle/>
           <a:p>
             <a:pPr algn="ctr"/>
+            <a:endParaRPr/>
           </a:p>
         </p:txBody>
       </p:sp>
@@ -10146,7 +9535,7 @@
           </a:fontRef>
         </p:style>
         <p:txBody>
-          <a:bodyPr rtlCol="0" anchor="ctr" lIns="0" rIns="0" tIns="0" bIns="0"/>
+          <a:bodyPr lIns="0" tIns="0" rIns="0" bIns="0" rtlCol="0" anchor="ctr"/>
           <a:lstStyle/>
           <a:p>
             <a:pPr algn="ctr"/>
@@ -10179,7 +9568,7 @@
           <a:noFill/>
         </p:spPr>
         <p:txBody>
-          <a:bodyPr wrap="square" lIns="0" rIns="0" tIns="0" bIns="0" anchor="t">
+          <a:bodyPr wrap="square" lIns="0" tIns="0" rIns="0" bIns="0" anchor="t">
             <a:spAutoFit/>
           </a:bodyPr>
           <a:lstStyle/>
@@ -10214,7 +9603,7 @@
           <a:noFill/>
         </p:spPr>
         <p:txBody>
-          <a:bodyPr wrap="square" lIns="0" rIns="0" tIns="0" bIns="0" anchor="t">
+          <a:bodyPr wrap="square" lIns="0" tIns="0" rIns="0" bIns="0" anchor="t">
             <a:spAutoFit/>
           </a:bodyPr>
           <a:lstStyle/>
@@ -10277,6 +9666,7 @@
           <a:lstStyle/>
           <a:p>
             <a:pPr algn="ctr"/>
+            <a:endParaRPr/>
           </a:p>
         </p:txBody>
       </p:sp>
@@ -10319,7 +9709,7 @@
           </a:fontRef>
         </p:style>
         <p:txBody>
-          <a:bodyPr rtlCol="0" anchor="ctr" lIns="0" rIns="0" tIns="0" bIns="0"/>
+          <a:bodyPr lIns="0" tIns="0" rIns="0" bIns="0" rtlCol="0" anchor="ctr"/>
           <a:lstStyle/>
           <a:p>
             <a:pPr algn="ctr"/>
@@ -10352,7 +9742,7 @@
           <a:noFill/>
         </p:spPr>
         <p:txBody>
-          <a:bodyPr wrap="square" lIns="0" rIns="0" tIns="0" bIns="0" anchor="t">
+          <a:bodyPr wrap="square" lIns="0" tIns="0" rIns="0" bIns="0" anchor="t">
             <a:spAutoFit/>
           </a:bodyPr>
           <a:lstStyle/>
@@ -10387,7 +9777,7 @@
           <a:noFill/>
         </p:spPr>
         <p:txBody>
-          <a:bodyPr wrap="square" lIns="0" rIns="0" tIns="0" bIns="0" anchor="t">
+          <a:bodyPr wrap="square" lIns="0" tIns="0" rIns="0" bIns="0" anchor="t">
             <a:spAutoFit/>
           </a:bodyPr>
           <a:lstStyle/>
@@ -10413,8 +9803,8 @@
 </p:sld>
 </file>
 
-<file path=ppt/slides/slide5.xml><?xml version="1.0" encoding="utf-8"?>
-<p:sld xmlns:a="http://schemas.openxmlformats.org/drawingml/2006/main" xmlns:p="http://schemas.openxmlformats.org/presentationml/2006/main" xmlns:r="http://schemas.openxmlformats.org/officeDocument/2006/relationships">
+<file path=ppt/slides/slide6.xml><?xml version="1.0" encoding="utf-8"?>
+<p:sld xmlns:a="http://schemas.openxmlformats.org/drawingml/2006/main" xmlns:r="http://schemas.openxmlformats.org/officeDocument/2006/relationships" xmlns:p="http://schemas.openxmlformats.org/presentationml/2006/main">
   <p:cSld>
     <p:spTree>
       <p:nvGrpSpPr>
@@ -10422,7 +9812,14 @@
         <p:cNvGrpSpPr/>
         <p:nvPr/>
       </p:nvGrpSpPr>
-      <p:grpSpPr/>
+      <p:grpSpPr>
+        <a:xfrm>
+          <a:off x="0" y="0"/>
+          <a:ext cx="0" cy="0"/>
+          <a:chOff x="0" y="0"/>
+          <a:chExt cx="0" cy="0"/>
+        </a:xfrm>
+      </p:grpSpPr>
       <p:sp>
         <p:nvSpPr>
           <p:cNvPr id="2" name="Title 1"/>
@@ -10439,8 +9836,10 @@
           <a:lstStyle/>
           <a:p>
             <a:r>
-              <a:t>Built on Real Turbine Data</a:t>
+              <a:rPr lang="en-US" dirty="0"/>
+              <a:t>Data Insights</a:t>
             </a:r>
+            <a:endParaRPr dirty="0"/>
           </a:p>
         </p:txBody>
       </p:sp>
@@ -10453,7 +9852,7 @@
         <p:spPr>
           <a:xfrm>
             <a:off x="548640" y="1463040"/>
-            <a:ext cx="13533120" cy="548640"/>
+            <a:ext cx="13533120" cy="246221"/>
           </a:xfrm>
           <a:prstGeom prst="rect">
             <a:avLst/>
@@ -10461,20 +9860,20 @@
           <a:noFill/>
         </p:spPr>
         <p:txBody>
-          <a:bodyPr wrap="square" lIns="0" rIns="0" tIns="0" bIns="0" anchor="t">
+          <a:bodyPr wrap="square" lIns="0" tIns="0" rIns="0" bIns="0" anchor="t">
             <a:spAutoFit/>
           </a:bodyPr>
           <a:lstStyle/>
           <a:p>
             <a:pPr algn="l"/>
             <a:r>
-              <a:rPr sz="1600" b="0" i="0">
+              <a:rPr sz="1600" b="0" i="0" dirty="0">
                 <a:solidFill>
                   <a:srgbClr val="595959"/>
                 </a:solidFill>
                 <a:latin typeface="Calibri"/>
               </a:rPr>
-              <a:t>Everything is based on a public SCADA dataset from three real wind farms, including the maintenance notes written when something broke.</a:t>
+              <a:t>Everything is based on a SCADA dataset from three wind farms</a:t>
             </a:r>
           </a:p>
         </p:txBody>
@@ -10524,6 +9923,7 @@
           <a:lstStyle/>
           <a:p>
             <a:pPr algn="ctr"/>
+            <a:endParaRPr/>
           </a:p>
         </p:txBody>
       </p:sp>
@@ -10544,7 +9944,7 @@
           <a:noFill/>
         </p:spPr>
         <p:txBody>
-          <a:bodyPr wrap="square" lIns="0" rIns="0" tIns="0" bIns="0" anchor="t">
+          <a:bodyPr wrap="square" lIns="0" tIns="0" rIns="0" bIns="0" anchor="t">
             <a:spAutoFit/>
           </a:bodyPr>
           <a:lstStyle/>
@@ -10579,7 +9979,7 @@
           <a:noFill/>
         </p:spPr>
         <p:txBody>
-          <a:bodyPr wrap="square" lIns="0" rIns="0" tIns="0" bIns="0" anchor="t">
+          <a:bodyPr wrap="square" lIns="0" tIns="0" rIns="0" bIns="0" anchor="t">
             <a:spAutoFit/>
           </a:bodyPr>
           <a:lstStyle/>
@@ -10642,6 +10042,7 @@
           <a:lstStyle/>
           <a:p>
             <a:pPr algn="ctr"/>
+            <a:endParaRPr/>
           </a:p>
         </p:txBody>
       </p:sp>
@@ -10662,7 +10063,7 @@
           <a:noFill/>
         </p:spPr>
         <p:txBody>
-          <a:bodyPr wrap="square" lIns="0" rIns="0" tIns="0" bIns="0" anchor="t">
+          <a:bodyPr wrap="square" lIns="0" tIns="0" rIns="0" bIns="0" anchor="t">
             <a:spAutoFit/>
           </a:bodyPr>
           <a:lstStyle/>
@@ -10697,7 +10098,7 @@
           <a:noFill/>
         </p:spPr>
         <p:txBody>
-          <a:bodyPr wrap="square" lIns="0" rIns="0" tIns="0" bIns="0" anchor="t">
+          <a:bodyPr wrap="square" lIns="0" tIns="0" rIns="0" bIns="0" anchor="t">
             <a:spAutoFit/>
           </a:bodyPr>
           <a:lstStyle/>
@@ -10760,6 +10161,7 @@
           <a:lstStyle/>
           <a:p>
             <a:pPr algn="ctr"/>
+            <a:endParaRPr/>
           </a:p>
         </p:txBody>
       </p:sp>
@@ -10780,7 +10182,7 @@
           <a:noFill/>
         </p:spPr>
         <p:txBody>
-          <a:bodyPr wrap="square" lIns="0" rIns="0" tIns="0" bIns="0" anchor="t">
+          <a:bodyPr wrap="square" lIns="0" tIns="0" rIns="0" bIns="0" anchor="t">
             <a:spAutoFit/>
           </a:bodyPr>
           <a:lstStyle/>
@@ -10807,7 +10209,7 @@
         <p:spPr>
           <a:xfrm>
             <a:off x="7818120" y="4160520"/>
-            <a:ext cx="2468880" cy="548640"/>
+            <a:ext cx="2468880" cy="307777"/>
           </a:xfrm>
           <a:prstGeom prst="rect">
             <a:avLst/>
@@ -10815,20 +10217,29 @@
           <a:noFill/>
         </p:spPr>
         <p:txBody>
-          <a:bodyPr wrap="square" lIns="0" rIns="0" tIns="0" bIns="0" anchor="t">
+          <a:bodyPr wrap="square" lIns="0" tIns="0" rIns="0" bIns="0" anchor="t">
             <a:spAutoFit/>
           </a:bodyPr>
           <a:lstStyle/>
           <a:p>
             <a:pPr algn="l"/>
             <a:r>
-              <a:rPr sz="2000" b="1" i="0">
+              <a:rPr lang="en-US" sz="2000" b="1" i="0" dirty="0">
                 <a:solidFill>
                   <a:srgbClr val="002060"/>
                 </a:solidFill>
                 <a:latin typeface="Calibri"/>
               </a:rPr>
-              <a:t>Real failure events</a:t>
+              <a:t>F</a:t>
+            </a:r>
+            <a:r>
+              <a:rPr sz="2000" b="1" i="0" dirty="0">
+                <a:solidFill>
+                  <a:srgbClr val="002060"/>
+                </a:solidFill>
+                <a:latin typeface="Calibri"/>
+              </a:rPr>
+              <a:t>ailure events</a:t>
             </a:r>
           </a:p>
         </p:txBody>
@@ -10878,6 +10289,7 @@
           <a:lstStyle/>
           <a:p>
             <a:pPr algn="ctr"/>
+            <a:endParaRPr/>
           </a:p>
         </p:txBody>
       </p:sp>
@@ -10898,7 +10310,7 @@
           <a:noFill/>
         </p:spPr>
         <p:txBody>
-          <a:bodyPr wrap="square" lIns="0" rIns="0" tIns="0" bIns="0" anchor="t">
+          <a:bodyPr wrap="square" lIns="0" tIns="0" rIns="0" bIns="0" anchor="t">
             <a:spAutoFit/>
           </a:bodyPr>
           <a:lstStyle/>
@@ -10933,7 +10345,7 @@
           <a:noFill/>
         </p:spPr>
         <p:txBody>
-          <a:bodyPr wrap="square" lIns="0" rIns="0" tIns="0" bIns="0" anchor="t">
+          <a:bodyPr wrap="square" lIns="0" tIns="0" rIns="0" bIns="0" anchor="t">
             <a:spAutoFit/>
           </a:bodyPr>
           <a:lstStyle/>
@@ -10959,8 +10371,8 @@
 </p:sld>
 </file>
 
-<file path=ppt/slides/slide6.xml><?xml version="1.0" encoding="utf-8"?>
-<p:sld xmlns:a="http://schemas.openxmlformats.org/drawingml/2006/main" xmlns:p="http://schemas.openxmlformats.org/presentationml/2006/main" xmlns:r="http://schemas.openxmlformats.org/officeDocument/2006/relationships">
+<file path=ppt/slides/slide7.xml><?xml version="1.0" encoding="utf-8"?>
+<p:sld xmlns:a="http://schemas.openxmlformats.org/drawingml/2006/main" xmlns:r="http://schemas.openxmlformats.org/officeDocument/2006/relationships" xmlns:p="http://schemas.openxmlformats.org/presentationml/2006/main">
   <p:cSld>
     <p:spTree>
       <p:nvGrpSpPr>
@@ -10968,7 +10380,14 @@
         <p:cNvGrpSpPr/>
         <p:nvPr/>
       </p:nvGrpSpPr>
-      <p:grpSpPr/>
+      <p:grpSpPr>
+        <a:xfrm>
+          <a:off x="0" y="0"/>
+          <a:ext cx="0" cy="0"/>
+          <a:chOff x="0" y="0"/>
+          <a:chExt cx="0" cy="0"/>
+        </a:xfrm>
+      </p:grpSpPr>
       <p:sp>
         <p:nvSpPr>
           <p:cNvPr id="2" name="Title 1"/>
@@ -10985,8 +10404,10 @@
           <a:lstStyle/>
           <a:p>
             <a:r>
-              <a:t>How Each Component Fails</a:t>
+              <a:rPr lang="en-US" dirty="0"/>
+              <a:t>Failure Modes &amp; Effects</a:t>
             </a:r>
+            <a:endParaRPr dirty="0"/>
           </a:p>
         </p:txBody>
       </p:sp>
@@ -11035,6 +10456,7 @@
           <a:lstStyle/>
           <a:p>
             <a:pPr algn="ctr"/>
+            <a:endParaRPr/>
           </a:p>
         </p:txBody>
       </p:sp>
@@ -11077,7 +10499,7 @@
           </a:fontRef>
         </p:style>
         <p:txBody>
-          <a:bodyPr rtlCol="0" anchor="ctr" lIns="0" rIns="0" tIns="0" bIns="0"/>
+          <a:bodyPr lIns="0" tIns="0" rIns="0" bIns="0" rtlCol="0" anchor="ctr"/>
           <a:lstStyle/>
           <a:p>
             <a:pPr algn="ctr"/>
@@ -11110,7 +10532,7 @@
           <a:noFill/>
         </p:spPr>
         <p:txBody>
-          <a:bodyPr wrap="square" lIns="0" rIns="0" tIns="0" bIns="0" anchor="t">
+          <a:bodyPr wrap="square" lIns="0" tIns="0" rIns="0" bIns="0" anchor="t">
             <a:spAutoFit/>
           </a:bodyPr>
           <a:lstStyle/>
@@ -11145,7 +10567,7 @@
           <a:noFill/>
         </p:spPr>
         <p:txBody>
-          <a:bodyPr wrap="square" lIns="0" rIns="0" tIns="0" bIns="0" anchor="t">
+          <a:bodyPr wrap="square" lIns="0" tIns="0" rIns="0" bIns="0" anchor="t">
             <a:spAutoFit/>
           </a:bodyPr>
           <a:lstStyle/>
@@ -11208,6 +10630,7 @@
           <a:lstStyle/>
           <a:p>
             <a:pPr algn="ctr"/>
+            <a:endParaRPr/>
           </a:p>
         </p:txBody>
       </p:sp>
@@ -11250,7 +10673,7 @@
           </a:fontRef>
         </p:style>
         <p:txBody>
-          <a:bodyPr rtlCol="0" anchor="ctr" lIns="0" rIns="0" tIns="0" bIns="0"/>
+          <a:bodyPr lIns="0" tIns="0" rIns="0" bIns="0" rtlCol="0" anchor="ctr"/>
           <a:lstStyle/>
           <a:p>
             <a:pPr algn="ctr"/>
@@ -11283,7 +10706,7 @@
           <a:noFill/>
         </p:spPr>
         <p:txBody>
-          <a:bodyPr wrap="square" lIns="0" rIns="0" tIns="0" bIns="0" anchor="t">
+          <a:bodyPr wrap="square" lIns="0" tIns="0" rIns="0" bIns="0" anchor="t">
             <a:spAutoFit/>
           </a:bodyPr>
           <a:lstStyle/>
@@ -11318,7 +10741,7 @@
           <a:noFill/>
         </p:spPr>
         <p:txBody>
-          <a:bodyPr wrap="square" lIns="0" rIns="0" tIns="0" bIns="0" anchor="t">
+          <a:bodyPr wrap="square" lIns="0" tIns="0" rIns="0" bIns="0" anchor="t">
             <a:spAutoFit/>
           </a:bodyPr>
           <a:lstStyle/>
@@ -11381,6 +10804,7 @@
           <a:lstStyle/>
           <a:p>
             <a:pPr algn="ctr"/>
+            <a:endParaRPr/>
           </a:p>
         </p:txBody>
       </p:sp>
@@ -11423,7 +10847,7 @@
           </a:fontRef>
         </p:style>
         <p:txBody>
-          <a:bodyPr rtlCol="0" anchor="ctr" lIns="0" rIns="0" tIns="0" bIns="0"/>
+          <a:bodyPr lIns="0" tIns="0" rIns="0" bIns="0" rtlCol="0" anchor="ctr"/>
           <a:lstStyle/>
           <a:p>
             <a:pPr algn="ctr"/>
@@ -11456,7 +10880,7 @@
           <a:noFill/>
         </p:spPr>
         <p:txBody>
-          <a:bodyPr wrap="square" lIns="0" rIns="0" tIns="0" bIns="0" anchor="t">
+          <a:bodyPr wrap="square" lIns="0" tIns="0" rIns="0" bIns="0" anchor="t">
             <a:spAutoFit/>
           </a:bodyPr>
           <a:lstStyle/>
@@ -11491,7 +10915,7 @@
           <a:noFill/>
         </p:spPr>
         <p:txBody>
-          <a:bodyPr wrap="square" lIns="0" rIns="0" tIns="0" bIns="0" anchor="t">
+          <a:bodyPr wrap="square" lIns="0" tIns="0" rIns="0" bIns="0" anchor="t">
             <a:spAutoFit/>
           </a:bodyPr>
           <a:lstStyle/>
@@ -11554,6 +10978,7 @@
           <a:lstStyle/>
           <a:p>
             <a:pPr algn="ctr"/>
+            <a:endParaRPr/>
           </a:p>
         </p:txBody>
       </p:sp>
@@ -11596,7 +11021,7 @@
           </a:fontRef>
         </p:style>
         <p:txBody>
-          <a:bodyPr rtlCol="0" anchor="ctr" lIns="0" rIns="0" tIns="0" bIns="0"/>
+          <a:bodyPr lIns="0" tIns="0" rIns="0" bIns="0" rtlCol="0" anchor="ctr"/>
           <a:lstStyle/>
           <a:p>
             <a:pPr algn="ctr"/>
@@ -11629,7 +11054,7 @@
           <a:noFill/>
         </p:spPr>
         <p:txBody>
-          <a:bodyPr wrap="square" lIns="0" rIns="0" tIns="0" bIns="0" anchor="t">
+          <a:bodyPr wrap="square" lIns="0" tIns="0" rIns="0" bIns="0" anchor="t">
             <a:spAutoFit/>
           </a:bodyPr>
           <a:lstStyle/>
@@ -11664,7 +11089,7 @@
           <a:noFill/>
         </p:spPr>
         <p:txBody>
-          <a:bodyPr wrap="square" lIns="0" rIns="0" tIns="0" bIns="0" anchor="t">
+          <a:bodyPr wrap="square" lIns="0" tIns="0" rIns="0" bIns="0" anchor="t">
             <a:spAutoFit/>
           </a:bodyPr>
           <a:lstStyle/>
@@ -11727,6 +11152,7 @@
           <a:lstStyle/>
           <a:p>
             <a:pPr algn="ctr"/>
+            <a:endParaRPr/>
           </a:p>
         </p:txBody>
       </p:sp>
@@ -11769,7 +11195,7 @@
           </a:fontRef>
         </p:style>
         <p:txBody>
-          <a:bodyPr rtlCol="0" anchor="ctr" lIns="0" rIns="0" tIns="0" bIns="0"/>
+          <a:bodyPr lIns="0" tIns="0" rIns="0" bIns="0" rtlCol="0" anchor="ctr"/>
           <a:lstStyle/>
           <a:p>
             <a:pPr algn="ctr"/>
@@ -11802,7 +11228,7 @@
           <a:noFill/>
         </p:spPr>
         <p:txBody>
-          <a:bodyPr wrap="square" lIns="0" rIns="0" tIns="0" bIns="0" anchor="t">
+          <a:bodyPr wrap="square" lIns="0" tIns="0" rIns="0" bIns="0" anchor="t">
             <a:spAutoFit/>
           </a:bodyPr>
           <a:lstStyle/>
@@ -11837,7 +11263,7 @@
           <a:noFill/>
         </p:spPr>
         <p:txBody>
-          <a:bodyPr wrap="square" lIns="0" rIns="0" tIns="0" bIns="0" anchor="t">
+          <a:bodyPr wrap="square" lIns="0" tIns="0" rIns="0" bIns="0" anchor="t">
             <a:spAutoFit/>
           </a:bodyPr>
           <a:lstStyle/>
@@ -11900,6 +11326,7 @@
           <a:lstStyle/>
           <a:p>
             <a:pPr algn="ctr"/>
+            <a:endParaRPr/>
           </a:p>
         </p:txBody>
       </p:sp>
@@ -11942,7 +11369,7 @@
           </a:fontRef>
         </p:style>
         <p:txBody>
-          <a:bodyPr rtlCol="0" anchor="ctr" lIns="0" rIns="0" tIns="0" bIns="0"/>
+          <a:bodyPr lIns="0" tIns="0" rIns="0" bIns="0" rtlCol="0" anchor="ctr"/>
           <a:lstStyle/>
           <a:p>
             <a:pPr algn="ctr"/>
@@ -11975,7 +11402,7 @@
           <a:noFill/>
         </p:spPr>
         <p:txBody>
-          <a:bodyPr wrap="square" lIns="0" rIns="0" tIns="0" bIns="0" anchor="t">
+          <a:bodyPr wrap="square" lIns="0" tIns="0" rIns="0" bIns="0" anchor="t">
             <a:spAutoFit/>
           </a:bodyPr>
           <a:lstStyle/>
@@ -12010,7 +11437,7 @@
           <a:noFill/>
         </p:spPr>
         <p:txBody>
-          <a:bodyPr wrap="square" lIns="0" rIns="0" tIns="0" bIns="0" anchor="t">
+          <a:bodyPr wrap="square" lIns="0" tIns="0" rIns="0" bIns="0" anchor="t">
             <a:spAutoFit/>
           </a:bodyPr>
           <a:lstStyle/>
@@ -12073,6 +11500,7 @@
           <a:lstStyle/>
           <a:p>
             <a:pPr algn="ctr"/>
+            <a:endParaRPr/>
           </a:p>
         </p:txBody>
       </p:sp>
@@ -12115,7 +11543,7 @@
           </a:fontRef>
         </p:style>
         <p:txBody>
-          <a:bodyPr rtlCol="0" anchor="ctr" lIns="0" rIns="0" tIns="0" bIns="0"/>
+          <a:bodyPr lIns="0" tIns="0" rIns="0" bIns="0" rtlCol="0" anchor="ctr"/>
           <a:lstStyle/>
           <a:p>
             <a:pPr algn="ctr"/>
@@ -12148,7 +11576,7 @@
           <a:noFill/>
         </p:spPr>
         <p:txBody>
-          <a:bodyPr wrap="square" lIns="0" rIns="0" tIns="0" bIns="0" anchor="t">
+          <a:bodyPr wrap="square" lIns="0" tIns="0" rIns="0" bIns="0" anchor="t">
             <a:spAutoFit/>
           </a:bodyPr>
           <a:lstStyle/>
@@ -12183,7 +11611,7 @@
           <a:noFill/>
         </p:spPr>
         <p:txBody>
-          <a:bodyPr wrap="square" lIns="0" rIns="0" tIns="0" bIns="0" anchor="t">
+          <a:bodyPr wrap="square" lIns="0" tIns="0" rIns="0" bIns="0" anchor="t">
             <a:spAutoFit/>
           </a:bodyPr>
           <a:lstStyle/>
@@ -12201,20 +11629,68 @@
           </a:p>
         </p:txBody>
       </p:sp>
-      <p:sp>
-        <p:nvSpPr>
-          <p:cNvPr id="31" name="Rounded Rectangle 30"/>
+    </p:spTree>
+  </p:cSld>
+  <p:clrMapOvr>
+    <a:masterClrMapping/>
+  </p:clrMapOvr>
+</p:sld>
+</file>
+
+<file path=ppt/slides/slide8.xml><?xml version="1.0" encoding="utf-8"?>
+<p:sld xmlns:a="http://schemas.openxmlformats.org/drawingml/2006/main" xmlns:r="http://schemas.openxmlformats.org/officeDocument/2006/relationships" xmlns:p="http://schemas.openxmlformats.org/presentationml/2006/main">
+  <p:cSld>
+    <p:spTree>
+      <p:nvGrpSpPr>
+        <p:cNvPr id="1" name=""/>
+        <p:cNvGrpSpPr/>
+        <p:nvPr/>
+      </p:nvGrpSpPr>
+      <p:grpSpPr>
+        <a:xfrm>
+          <a:off x="0" y="0"/>
+          <a:ext cx="0" cy="0"/>
+          <a:chOff x="0" y="0"/>
+          <a:chExt cx="0" cy="0"/>
+        </a:xfrm>
+      </p:grpSpPr>
+      <p:sp>
+        <p:nvSpPr>
+          <p:cNvPr id="2" name="Title 1"/>
+          <p:cNvSpPr>
+            <a:spLocks noGrp="1"/>
+          </p:cNvSpPr>
+          <p:nvPr>
+            <p:ph type="ctrTitle"/>
+          </p:nvPr>
+        </p:nvSpPr>
+        <p:spPr/>
+        <p:txBody>
+          <a:bodyPr/>
+          <a:lstStyle/>
+          <a:p>
+            <a:r>
+              <a:rPr lang="en-IN" dirty="0"/>
+              <a:t>Farm Overview</a:t>
+            </a:r>
+            <a:endParaRPr dirty="0"/>
+          </a:p>
+        </p:txBody>
+      </p:sp>
+      <p:sp>
+        <p:nvSpPr>
+          <p:cNvPr id="3" name="Rounded Rectangle 2"/>
           <p:cNvSpPr/>
           <p:nvPr/>
         </p:nvSpPr>
         <p:spPr>
           <a:xfrm>
-            <a:off x="10972800" y="4334256"/>
-            <a:ext cx="3108960" cy="2560320"/>
+            <a:off x="548640" y="1691640"/>
+            <a:ext cx="4267200" cy="4206240"/>
           </a:xfrm>
           <a:prstGeom prst="roundRect">
             <a:avLst>
-              <a:gd name="adj" fmla="val 5357"/>
+              <a:gd name="adj" fmla="val 3260"/>
             </a:avLst>
           </a:prstGeom>
           <a:solidFill>
@@ -12246,19 +11722,20 @@
           <a:lstStyle/>
           <a:p>
             <a:pPr algn="ctr"/>
-          </a:p>
-        </p:txBody>
-      </p:sp>
-      <p:sp>
-        <p:nvSpPr>
-          <p:cNvPr id="32" name="Rounded Rectangle 31"/>
+            <a:endParaRPr/>
+          </a:p>
+        </p:txBody>
+      </p:sp>
+      <p:sp>
+        <p:nvSpPr>
+          <p:cNvPr id="4" name="Rounded Rectangle 3"/>
           <p:cNvSpPr/>
           <p:nvPr/>
         </p:nvSpPr>
         <p:spPr>
           <a:xfrm>
-            <a:off x="11201400" y="4562856"/>
-            <a:ext cx="457200" cy="274320"/>
+            <a:off x="777240" y="1920240"/>
+            <a:ext cx="365760" cy="274320"/>
           </a:xfrm>
           <a:prstGeom prst="roundRect">
             <a:avLst>
@@ -12288,7 +11765,7 @@
           </a:fontRef>
         </p:style>
         <p:txBody>
-          <a:bodyPr rtlCol="0" anchor="ctr" lIns="0" rIns="0" tIns="0" bIns="0"/>
+          <a:bodyPr lIns="0" tIns="0" rIns="0" bIns="0" rtlCol="0" anchor="ctr"/>
           <a:lstStyle/>
           <a:p>
             <a:pPr algn="ctr"/>
@@ -12299,21 +11776,21 @@
                 </a:solidFill>
                 <a:latin typeface="Calibri"/>
               </a:rPr>
-              <a:t>All</a:t>
+              <a:t>A</a:t>
             </a:r>
           </a:p>
         </p:txBody>
       </p:sp>
       <p:sp>
         <p:nvSpPr>
-          <p:cNvPr id="33" name="TextBox 32"/>
+          <p:cNvPr id="5" name="TextBox 4"/>
           <p:cNvSpPr txBox="1"/>
           <p:nvPr/>
         </p:nvSpPr>
         <p:spPr>
           <a:xfrm>
-            <a:off x="11201400" y="5020056"/>
-            <a:ext cx="2651760" cy="594360"/>
+            <a:off x="1271016" y="1938528"/>
+            <a:ext cx="3307080" cy="274320"/>
           </a:xfrm>
           <a:prstGeom prst="rect">
             <a:avLst/>
@@ -12321,7 +11798,7 @@
           <a:noFill/>
         </p:spPr>
         <p:txBody>
-          <a:bodyPr wrap="square" lIns="0" rIns="0" tIns="0" bIns="0" anchor="t">
+          <a:bodyPr wrap="square" lIns="0" tIns="0" rIns="0" bIns="0" anchor="t">
             <a:spAutoFit/>
           </a:bodyPr>
           <a:lstStyle/>
@@ -12334,21 +11811,21 @@
                 </a:solidFill>
                 <a:latin typeface="Calibri"/>
               </a:rPr>
-              <a:t>Common pattern</a:t>
+              <a:t>Farm A</a:t>
             </a:r>
           </a:p>
         </p:txBody>
       </p:sp>
       <p:sp>
         <p:nvSpPr>
-          <p:cNvPr id="34" name="TextBox 33"/>
+          <p:cNvPr id="6" name="TextBox 5"/>
           <p:cNvSpPr txBox="1"/>
           <p:nvPr/>
         </p:nvSpPr>
         <p:spPr>
           <a:xfrm>
-            <a:off x="11201400" y="5660136"/>
-            <a:ext cx="2651760" cy="1097279"/>
+            <a:off x="777240" y="2350008"/>
+            <a:ext cx="3810000" cy="3383279"/>
           </a:xfrm>
           <a:prstGeom prst="rect">
             <a:avLst/>
@@ -12356,7 +11833,7 @@
           <a:noFill/>
         </p:spPr>
         <p:txBody>
-          <a:bodyPr wrap="square" lIns="0" rIns="0" tIns="0" bIns="0" anchor="t">
+          <a:bodyPr wrap="square" lIns="0" tIns="0" rIns="0" bIns="0" anchor="t">
             <a:spAutoFit/>
           </a:bodyPr>
           <a:lstStyle/>
@@ -12369,59 +11846,160 @@
                 </a:solidFill>
                 <a:latin typeface="Calibri"/>
               </a:rPr>
-              <a:t>Every component gives a drifting signal days or weeks ahead. The platform catches that drift.</a:t>
+              <a:t>Hydraulic, gearbox, generator and transformer faults. Matches its documented fault list exactly. No pitch faults at all.</a:t>
             </a:r>
           </a:p>
         </p:txBody>
       </p:sp>
-    </p:spTree>
-  </p:cSld>
-  <p:clrMapOvr>
-    <a:masterClrMapping/>
-  </p:clrMapOvr>
-</p:sld>
-</file>
-
-<file path=ppt/slides/slide7.xml><?xml version="1.0" encoding="utf-8"?>
-<p:sld xmlns:a="http://schemas.openxmlformats.org/drawingml/2006/main" xmlns:p="http://schemas.openxmlformats.org/presentationml/2006/main" xmlns:r="http://schemas.openxmlformats.org/officeDocument/2006/relationships">
-  <p:cSld>
-    <p:spTree>
-      <p:nvGrpSpPr>
-        <p:cNvPr id="1" name=""/>
-        <p:cNvGrpSpPr/>
-        <p:nvPr/>
-      </p:nvGrpSpPr>
-      <p:grpSpPr/>
-      <p:sp>
-        <p:nvSpPr>
-          <p:cNvPr id="2" name="Title 1"/>
-          <p:cNvSpPr>
-            <a:spLocks noGrp="1"/>
-          </p:cNvSpPr>
-          <p:nvPr>
-            <p:ph type="ctrTitle"/>
-          </p:nvPr>
-        </p:nvSpPr>
-        <p:spPr/>
-        <p:txBody>
-          <a:bodyPr/>
-          <a:lstStyle/>
-          <a:p>
+      <p:sp>
+        <p:nvSpPr>
+          <p:cNvPr id="7" name="TextBox 6"/>
+          <p:cNvSpPr txBox="1"/>
+          <p:nvPr/>
+        </p:nvSpPr>
+        <p:spPr>
+          <a:xfrm>
+            <a:off x="777240" y="4023360"/>
+            <a:ext cx="1905000" cy="822960"/>
+          </a:xfrm>
+          <a:prstGeom prst="rect">
+            <a:avLst/>
+          </a:prstGeom>
+          <a:noFill/>
+        </p:spPr>
+        <p:txBody>
+          <a:bodyPr wrap="square" lIns="0" tIns="0" rIns="0" bIns="0" anchor="t">
+            <a:spAutoFit/>
+          </a:bodyPr>
+          <a:lstStyle/>
+          <a:p>
+            <a:pPr algn="l"/>
             <a:r>
-              <a:t>Each Farm Fails Differently</a:t>
+              <a:rPr sz="4400" b="1" i="0">
+                <a:solidFill>
+                  <a:srgbClr val="0089CF"/>
+                </a:solidFill>
+                <a:latin typeface="Calibri"/>
+              </a:rPr>
+              <a:t>5</a:t>
             </a:r>
           </a:p>
         </p:txBody>
       </p:sp>
       <p:sp>
         <p:nvSpPr>
-          <p:cNvPr id="3" name="Rounded Rectangle 2"/>
+          <p:cNvPr id="8" name="TextBox 7"/>
+          <p:cNvSpPr txBox="1"/>
+          <p:nvPr/>
+        </p:nvSpPr>
+        <p:spPr>
+          <a:xfrm>
+            <a:off x="777240" y="4892040"/>
+            <a:ext cx="1905000" cy="365760"/>
+          </a:xfrm>
+          <a:prstGeom prst="rect">
+            <a:avLst/>
+          </a:prstGeom>
+          <a:noFill/>
+        </p:spPr>
+        <p:txBody>
+          <a:bodyPr wrap="square" lIns="0" tIns="0" rIns="0" bIns="0" anchor="t">
+            <a:spAutoFit/>
+          </a:bodyPr>
+          <a:lstStyle/>
+          <a:p>
+            <a:pPr algn="l"/>
+            <a:r>
+              <a:rPr sz="1400" b="0" i="0">
+                <a:solidFill>
+                  <a:srgbClr val="595959"/>
+                </a:solidFill>
+                <a:latin typeface="Calibri"/>
+              </a:rPr>
+              <a:t>Turbines</a:t>
+            </a:r>
+          </a:p>
+        </p:txBody>
+      </p:sp>
+      <p:sp>
+        <p:nvSpPr>
+          <p:cNvPr id="9" name="TextBox 8"/>
+          <p:cNvSpPr txBox="1"/>
+          <p:nvPr/>
+        </p:nvSpPr>
+        <p:spPr>
+          <a:xfrm>
+            <a:off x="2682240" y="4023360"/>
+            <a:ext cx="1905000" cy="822960"/>
+          </a:xfrm>
+          <a:prstGeom prst="rect">
+            <a:avLst/>
+          </a:prstGeom>
+          <a:noFill/>
+        </p:spPr>
+        <p:txBody>
+          <a:bodyPr wrap="square" lIns="0" tIns="0" rIns="0" bIns="0" anchor="t">
+            <a:spAutoFit/>
+          </a:bodyPr>
+          <a:lstStyle/>
+          <a:p>
+            <a:pPr algn="l"/>
+            <a:r>
+              <a:rPr sz="4400" b="1" i="0">
+                <a:solidFill>
+                  <a:srgbClr val="0089CF"/>
+                </a:solidFill>
+                <a:latin typeface="Calibri"/>
+              </a:rPr>
+              <a:t>11</a:t>
+            </a:r>
+          </a:p>
+        </p:txBody>
+      </p:sp>
+      <p:sp>
+        <p:nvSpPr>
+          <p:cNvPr id="10" name="TextBox 9"/>
+          <p:cNvSpPr txBox="1"/>
+          <p:nvPr/>
+        </p:nvSpPr>
+        <p:spPr>
+          <a:xfrm>
+            <a:off x="2682240" y="4892040"/>
+            <a:ext cx="1905000" cy="365760"/>
+          </a:xfrm>
+          <a:prstGeom prst="rect">
+            <a:avLst/>
+          </a:prstGeom>
+          <a:noFill/>
+        </p:spPr>
+        <p:txBody>
+          <a:bodyPr wrap="square" lIns="0" tIns="0" rIns="0" bIns="0" anchor="t">
+            <a:spAutoFit/>
+          </a:bodyPr>
+          <a:lstStyle/>
+          <a:p>
+            <a:pPr algn="l"/>
+            <a:r>
+              <a:rPr sz="1400" b="0" i="0">
+                <a:solidFill>
+                  <a:srgbClr val="595959"/>
+                </a:solidFill>
+                <a:latin typeface="Calibri"/>
+              </a:rPr>
+              <a:t>Failure events</a:t>
+            </a:r>
+          </a:p>
+        </p:txBody>
+      </p:sp>
+      <p:sp>
+        <p:nvSpPr>
+          <p:cNvPr id="11" name="Rounded Rectangle 10"/>
           <p:cNvSpPr/>
           <p:nvPr/>
         </p:nvSpPr>
         <p:spPr>
           <a:xfrm>
-            <a:off x="548640" y="1691640"/>
+            <a:off x="5181600" y="1691640"/>
             <a:ext cx="4267200" cy="4206240"/>
           </a:xfrm>
           <a:prstGeom prst="roundRect">
@@ -12458,18 +12036,19 @@
           <a:lstStyle/>
           <a:p>
             <a:pPr algn="ctr"/>
-          </a:p>
-        </p:txBody>
-      </p:sp>
-      <p:sp>
-        <p:nvSpPr>
-          <p:cNvPr id="4" name="Rounded Rectangle 3"/>
+            <a:endParaRPr/>
+          </a:p>
+        </p:txBody>
+      </p:sp>
+      <p:sp>
+        <p:nvSpPr>
+          <p:cNvPr id="12" name="Rounded Rectangle 11"/>
           <p:cNvSpPr/>
           <p:nvPr/>
         </p:nvSpPr>
         <p:spPr>
           <a:xfrm>
-            <a:off x="777240" y="1920240"/>
+            <a:off x="5410200" y="1920240"/>
             <a:ext cx="365760" cy="274320"/>
           </a:xfrm>
           <a:prstGeom prst="roundRect">
@@ -12500,7 +12079,7 @@
           </a:fontRef>
         </p:style>
         <p:txBody>
-          <a:bodyPr rtlCol="0" anchor="ctr" lIns="0" rIns="0" tIns="0" bIns="0"/>
+          <a:bodyPr lIns="0" tIns="0" rIns="0" bIns="0" rtlCol="0" anchor="ctr"/>
           <a:lstStyle/>
           <a:p>
             <a:pPr algn="ctr"/>
@@ -12511,20 +12090,20 @@
                 </a:solidFill>
                 <a:latin typeface="Calibri"/>
               </a:rPr>
-              <a:t>A</a:t>
+              <a:t>B</a:t>
             </a:r>
           </a:p>
         </p:txBody>
       </p:sp>
       <p:sp>
         <p:nvSpPr>
-          <p:cNvPr id="5" name="TextBox 4"/>
+          <p:cNvPr id="13" name="TextBox 12"/>
           <p:cNvSpPr txBox="1"/>
           <p:nvPr/>
         </p:nvSpPr>
         <p:spPr>
           <a:xfrm>
-            <a:off x="1271016" y="1938528"/>
+            <a:off x="5903976" y="1938528"/>
             <a:ext cx="3307080" cy="274320"/>
           </a:xfrm>
           <a:prstGeom prst="rect">
@@ -12533,7 +12112,7 @@
           <a:noFill/>
         </p:spPr>
         <p:txBody>
-          <a:bodyPr wrap="square" lIns="0" rIns="0" tIns="0" bIns="0" anchor="t">
+          <a:bodyPr wrap="square" lIns="0" tIns="0" rIns="0" bIns="0" anchor="t">
             <a:spAutoFit/>
           </a:bodyPr>
           <a:lstStyle/>
@@ -12546,20 +12125,20 @@
                 </a:solidFill>
                 <a:latin typeface="Calibri"/>
               </a:rPr>
-              <a:t>Farm A</a:t>
+              <a:t>Farm B</a:t>
             </a:r>
           </a:p>
         </p:txBody>
       </p:sp>
       <p:sp>
         <p:nvSpPr>
-          <p:cNvPr id="6" name="TextBox 5"/>
+          <p:cNvPr id="14" name="TextBox 13"/>
           <p:cNvSpPr txBox="1"/>
           <p:nvPr/>
         </p:nvSpPr>
         <p:spPr>
           <a:xfrm>
-            <a:off x="777240" y="2350008"/>
+            <a:off x="5410200" y="2350008"/>
             <a:ext cx="3810000" cy="3383279"/>
           </a:xfrm>
           <a:prstGeom prst="rect">
@@ -12568,7 +12147,7 @@
           <a:noFill/>
         </p:spPr>
         <p:txBody>
-          <a:bodyPr wrap="square" lIns="0" rIns="0" tIns="0" bIns="0" anchor="t">
+          <a:bodyPr wrap="square" lIns="0" tIns="0" rIns="0" bIns="0" anchor="t">
             <a:spAutoFit/>
           </a:bodyPr>
           <a:lstStyle/>
@@ -12581,20 +12160,20 @@
                 </a:solidFill>
                 <a:latin typeface="Calibri"/>
               </a:rPr>
-              <a:t>Hydraulic, gearbox, generator and transformer faults. Matches its documented fault list exactly. No pitch faults at all.</a:t>
+              <a:t>Main bearing damage is the real issue and needs vibration sensors to catch. Some of its events still sit outside the 7 categories.</a:t>
             </a:r>
           </a:p>
         </p:txBody>
       </p:sp>
       <p:sp>
         <p:nvSpPr>
-          <p:cNvPr id="7" name="TextBox 6"/>
+          <p:cNvPr id="15" name="TextBox 14"/>
           <p:cNvSpPr txBox="1"/>
           <p:nvPr/>
         </p:nvSpPr>
         <p:spPr>
           <a:xfrm>
-            <a:off x="777240" y="4023360"/>
+            <a:off x="5410200" y="4023360"/>
             <a:ext cx="1905000" cy="822960"/>
           </a:xfrm>
           <a:prstGeom prst="rect">
@@ -12603,7 +12182,7 @@
           <a:noFill/>
         </p:spPr>
         <p:txBody>
-          <a:bodyPr wrap="square" lIns="0" rIns="0" tIns="0" bIns="0" anchor="t">
+          <a:bodyPr wrap="square" lIns="0" tIns="0" rIns="0" bIns="0" anchor="t">
             <a:spAutoFit/>
           </a:bodyPr>
           <a:lstStyle/>
@@ -12616,20 +12195,20 @@
                 </a:solidFill>
                 <a:latin typeface="Calibri"/>
               </a:rPr>
-              <a:t>5</a:t>
+              <a:t>9</a:t>
             </a:r>
           </a:p>
         </p:txBody>
       </p:sp>
       <p:sp>
         <p:nvSpPr>
-          <p:cNvPr id="8" name="TextBox 7"/>
+          <p:cNvPr id="16" name="TextBox 15"/>
           <p:cNvSpPr txBox="1"/>
           <p:nvPr/>
         </p:nvSpPr>
         <p:spPr>
           <a:xfrm>
-            <a:off x="777240" y="4892040"/>
+            <a:off x="5410200" y="4892040"/>
             <a:ext cx="1905000" cy="365760"/>
           </a:xfrm>
           <a:prstGeom prst="rect">
@@ -12638,7 +12217,7 @@
           <a:noFill/>
         </p:spPr>
         <p:txBody>
-          <a:bodyPr wrap="square" lIns="0" rIns="0" tIns="0" bIns="0" anchor="t">
+          <a:bodyPr wrap="square" lIns="0" tIns="0" rIns="0" bIns="0" anchor="t">
             <a:spAutoFit/>
           </a:bodyPr>
           <a:lstStyle/>
@@ -12658,13 +12237,13 @@
       </p:sp>
       <p:sp>
         <p:nvSpPr>
-          <p:cNvPr id="9" name="TextBox 8"/>
+          <p:cNvPr id="17" name="TextBox 16"/>
           <p:cNvSpPr txBox="1"/>
           <p:nvPr/>
         </p:nvSpPr>
         <p:spPr>
           <a:xfrm>
-            <a:off x="2682240" y="4023360"/>
+            <a:off x="7315200" y="4023360"/>
             <a:ext cx="1905000" cy="822960"/>
           </a:xfrm>
           <a:prstGeom prst="rect">
@@ -12673,7 +12252,7 @@
           <a:noFill/>
         </p:spPr>
         <p:txBody>
-          <a:bodyPr wrap="square" lIns="0" rIns="0" tIns="0" bIns="0" anchor="t">
+          <a:bodyPr wrap="square" lIns="0" tIns="0" rIns="0" bIns="0" anchor="t">
             <a:spAutoFit/>
           </a:bodyPr>
           <a:lstStyle/>
@@ -12686,20 +12265,20 @@
                 </a:solidFill>
                 <a:latin typeface="Calibri"/>
               </a:rPr>
-              <a:t>11</a:t>
+              <a:t>6</a:t>
             </a:r>
           </a:p>
         </p:txBody>
       </p:sp>
       <p:sp>
         <p:nvSpPr>
-          <p:cNvPr id="10" name="TextBox 9"/>
+          <p:cNvPr id="18" name="TextBox 17"/>
           <p:cNvSpPr txBox="1"/>
           <p:nvPr/>
         </p:nvSpPr>
         <p:spPr>
           <a:xfrm>
-            <a:off x="2682240" y="4892040"/>
+            <a:off x="7315200" y="4892040"/>
             <a:ext cx="1905000" cy="365760"/>
           </a:xfrm>
           <a:prstGeom prst="rect">
@@ -12708,7 +12287,7 @@
           <a:noFill/>
         </p:spPr>
         <p:txBody>
-          <a:bodyPr wrap="square" lIns="0" rIns="0" tIns="0" bIns="0" anchor="t">
+          <a:bodyPr wrap="square" lIns="0" tIns="0" rIns="0" bIns="0" anchor="t">
             <a:spAutoFit/>
           </a:bodyPr>
           <a:lstStyle/>
@@ -12728,13 +12307,13 @@
       </p:sp>
       <p:sp>
         <p:nvSpPr>
-          <p:cNvPr id="11" name="Rounded Rectangle 10"/>
+          <p:cNvPr id="19" name="Rounded Rectangle 18"/>
           <p:cNvSpPr/>
           <p:nvPr/>
         </p:nvSpPr>
         <p:spPr>
           <a:xfrm>
-            <a:off x="5181600" y="1691640"/>
+            <a:off x="9814560" y="1691640"/>
             <a:ext cx="4267200" cy="4206240"/>
           </a:xfrm>
           <a:prstGeom prst="roundRect">
@@ -12771,18 +12350,19 @@
           <a:lstStyle/>
           <a:p>
             <a:pPr algn="ctr"/>
-          </a:p>
-        </p:txBody>
-      </p:sp>
-      <p:sp>
-        <p:nvSpPr>
-          <p:cNvPr id="12" name="Rounded Rectangle 11"/>
+            <a:endParaRPr/>
+          </a:p>
+        </p:txBody>
+      </p:sp>
+      <p:sp>
+        <p:nvSpPr>
+          <p:cNvPr id="20" name="Rounded Rectangle 19"/>
           <p:cNvSpPr/>
           <p:nvPr/>
         </p:nvSpPr>
         <p:spPr>
           <a:xfrm>
-            <a:off x="5410200" y="1920240"/>
+            <a:off x="10043160" y="1920240"/>
             <a:ext cx="365760" cy="274320"/>
           </a:xfrm>
           <a:prstGeom prst="roundRect">
@@ -12813,7 +12393,7 @@
           </a:fontRef>
         </p:style>
         <p:txBody>
-          <a:bodyPr rtlCol="0" anchor="ctr" lIns="0" rIns="0" tIns="0" bIns="0"/>
+          <a:bodyPr lIns="0" tIns="0" rIns="0" bIns="0" rtlCol="0" anchor="ctr"/>
           <a:lstStyle/>
           <a:p>
             <a:pPr algn="ctr"/>
@@ -12824,20 +12404,20 @@
                 </a:solidFill>
                 <a:latin typeface="Calibri"/>
               </a:rPr>
-              <a:t>B</a:t>
+              <a:t>C</a:t>
             </a:r>
           </a:p>
         </p:txBody>
       </p:sp>
       <p:sp>
         <p:nvSpPr>
-          <p:cNvPr id="13" name="TextBox 12"/>
+          <p:cNvPr id="21" name="TextBox 20"/>
           <p:cNvSpPr txBox="1"/>
           <p:nvPr/>
         </p:nvSpPr>
         <p:spPr>
           <a:xfrm>
-            <a:off x="5903976" y="1938528"/>
+            <a:off x="10536936" y="1938528"/>
             <a:ext cx="3307080" cy="274320"/>
           </a:xfrm>
           <a:prstGeom prst="rect">
@@ -12846,7 +12426,7 @@
           <a:noFill/>
         </p:spPr>
         <p:txBody>
-          <a:bodyPr wrap="square" lIns="0" rIns="0" tIns="0" bIns="0" anchor="t">
+          <a:bodyPr wrap="square" lIns="0" tIns="0" rIns="0" bIns="0" anchor="t">
             <a:spAutoFit/>
           </a:bodyPr>
           <a:lstStyle/>
@@ -12859,20 +12439,20 @@
                 </a:solidFill>
                 <a:latin typeface="Calibri"/>
               </a:rPr>
-              <a:t>Farm B</a:t>
+              <a:t>Farm C</a:t>
             </a:r>
           </a:p>
         </p:txBody>
       </p:sp>
       <p:sp>
         <p:nvSpPr>
-          <p:cNvPr id="14" name="TextBox 13"/>
+          <p:cNvPr id="22" name="TextBox 21"/>
           <p:cNvSpPr txBox="1"/>
           <p:nvPr/>
         </p:nvSpPr>
         <p:spPr>
           <a:xfrm>
-            <a:off x="5410200" y="2350008"/>
+            <a:off x="10043160" y="2350008"/>
             <a:ext cx="3810000" cy="3383279"/>
           </a:xfrm>
           <a:prstGeom prst="rect">
@@ -12881,7 +12461,7 @@
           <a:noFill/>
         </p:spPr>
         <p:txBody>
-          <a:bodyPr wrap="square" lIns="0" rIns="0" tIns="0" bIns="0" anchor="t">
+          <a:bodyPr wrap="square" lIns="0" tIns="0" rIns="0" bIns="0" anchor="t">
             <a:spAutoFit/>
           </a:bodyPr>
           <a:lstStyle/>
@@ -12894,20 +12474,20 @@
                 </a:solidFill>
                 <a:latin typeface="Calibri"/>
               </a:rPr>
-              <a:t>Main bearing damage is the real issue and needs vibration sensors to catch. Some of its events still sit outside the 7 categories.</a:t>
+              <a:t>Pitch and blade-angle faults lead, with 8 events. It controls each of its three blades separately, so this fits.</a:t>
             </a:r>
           </a:p>
         </p:txBody>
       </p:sp>
       <p:sp>
         <p:nvSpPr>
-          <p:cNvPr id="15" name="TextBox 14"/>
+          <p:cNvPr id="23" name="TextBox 22"/>
           <p:cNvSpPr txBox="1"/>
           <p:nvPr/>
         </p:nvSpPr>
         <p:spPr>
           <a:xfrm>
-            <a:off x="5410200" y="4023360"/>
+            <a:off x="10043160" y="4023360"/>
             <a:ext cx="1905000" cy="822960"/>
           </a:xfrm>
           <a:prstGeom prst="rect">
@@ -12916,7 +12496,7 @@
           <a:noFill/>
         </p:spPr>
         <p:txBody>
-          <a:bodyPr wrap="square" lIns="0" rIns="0" tIns="0" bIns="0" anchor="t">
+          <a:bodyPr wrap="square" lIns="0" tIns="0" rIns="0" bIns="0" anchor="t">
             <a:spAutoFit/>
           </a:bodyPr>
           <a:lstStyle/>
@@ -12929,20 +12509,20 @@
                 </a:solidFill>
                 <a:latin typeface="Calibri"/>
               </a:rPr>
-              <a:t>9</a:t>
+              <a:t>22</a:t>
             </a:r>
           </a:p>
         </p:txBody>
       </p:sp>
       <p:sp>
         <p:nvSpPr>
-          <p:cNvPr id="16" name="TextBox 15"/>
+          <p:cNvPr id="24" name="TextBox 23"/>
           <p:cNvSpPr txBox="1"/>
           <p:nvPr/>
         </p:nvSpPr>
         <p:spPr>
           <a:xfrm>
-            <a:off x="5410200" y="4892040"/>
+            <a:off x="10043160" y="4892040"/>
             <a:ext cx="1905000" cy="365760"/>
           </a:xfrm>
           <a:prstGeom prst="rect">
@@ -12951,7 +12531,7 @@
           <a:noFill/>
         </p:spPr>
         <p:txBody>
-          <a:bodyPr wrap="square" lIns="0" rIns="0" tIns="0" bIns="0" anchor="t">
+          <a:bodyPr wrap="square" lIns="0" tIns="0" rIns="0" bIns="0" anchor="t">
             <a:spAutoFit/>
           </a:bodyPr>
           <a:lstStyle/>
@@ -12971,13 +12551,13 @@
       </p:sp>
       <p:sp>
         <p:nvSpPr>
-          <p:cNvPr id="17" name="TextBox 16"/>
+          <p:cNvPr id="25" name="TextBox 24"/>
           <p:cNvSpPr txBox="1"/>
           <p:nvPr/>
         </p:nvSpPr>
         <p:spPr>
           <a:xfrm>
-            <a:off x="7315200" y="4023360"/>
+            <a:off x="11948160" y="4023360"/>
             <a:ext cx="1905000" cy="822960"/>
           </a:xfrm>
           <a:prstGeom prst="rect">
@@ -12986,7 +12566,7 @@
           <a:noFill/>
         </p:spPr>
         <p:txBody>
-          <a:bodyPr wrap="square" lIns="0" rIns="0" tIns="0" bIns="0" anchor="t">
+          <a:bodyPr wrap="square" lIns="0" tIns="0" rIns="0" bIns="0" anchor="t">
             <a:spAutoFit/>
           </a:bodyPr>
           <a:lstStyle/>
@@ -12999,20 +12579,20 @@
                 </a:solidFill>
                 <a:latin typeface="Calibri"/>
               </a:rPr>
-              <a:t>6</a:t>
+              <a:t>27</a:t>
             </a:r>
           </a:p>
         </p:txBody>
       </p:sp>
       <p:sp>
         <p:nvSpPr>
-          <p:cNvPr id="18" name="TextBox 17"/>
+          <p:cNvPr id="26" name="TextBox 25"/>
           <p:cNvSpPr txBox="1"/>
           <p:nvPr/>
         </p:nvSpPr>
         <p:spPr>
           <a:xfrm>
-            <a:off x="7315200" y="4892040"/>
+            <a:off x="11948160" y="4892040"/>
             <a:ext cx="1905000" cy="365760"/>
           </a:xfrm>
           <a:prstGeom prst="rect">
@@ -13021,7 +12601,7 @@
           <a:noFill/>
         </p:spPr>
         <p:txBody>
-          <a:bodyPr wrap="square" lIns="0" rIns="0" tIns="0" bIns="0" anchor="t">
+          <a:bodyPr wrap="square" lIns="0" tIns="0" rIns="0" bIns="0" anchor="t">
             <a:spAutoFit/>
           </a:bodyPr>
           <a:lstStyle/>
@@ -13039,20 +12619,68 @@
           </a:p>
         </p:txBody>
       </p:sp>
-      <p:sp>
-        <p:nvSpPr>
-          <p:cNvPr id="19" name="Rounded Rectangle 18"/>
+    </p:spTree>
+  </p:cSld>
+  <p:clrMapOvr>
+    <a:masterClrMapping/>
+  </p:clrMapOvr>
+</p:sld>
+</file>
+
+<file path=ppt/slides/slide9.xml><?xml version="1.0" encoding="utf-8"?>
+<p:sld xmlns:a="http://schemas.openxmlformats.org/drawingml/2006/main" xmlns:r="http://schemas.openxmlformats.org/officeDocument/2006/relationships" xmlns:p="http://schemas.openxmlformats.org/presentationml/2006/main">
+  <p:cSld>
+    <p:spTree>
+      <p:nvGrpSpPr>
+        <p:cNvPr id="1" name=""/>
+        <p:cNvGrpSpPr/>
+        <p:nvPr/>
+      </p:nvGrpSpPr>
+      <p:grpSpPr>
+        <a:xfrm>
+          <a:off x="0" y="0"/>
+          <a:ext cx="0" cy="0"/>
+          <a:chOff x="0" y="0"/>
+          <a:chExt cx="0" cy="0"/>
+        </a:xfrm>
+      </p:grpSpPr>
+      <p:sp>
+        <p:nvSpPr>
+          <p:cNvPr id="2" name="Title 1"/>
+          <p:cNvSpPr>
+            <a:spLocks noGrp="1"/>
+          </p:cNvSpPr>
+          <p:nvPr>
+            <p:ph type="ctrTitle"/>
+          </p:nvPr>
+        </p:nvSpPr>
+        <p:spPr/>
+        <p:txBody>
+          <a:bodyPr/>
+          <a:lstStyle/>
+          <a:p>
+            <a:r>
+              <a:rPr lang="en-US" dirty="0"/>
+              <a:t>Solution</a:t>
+            </a:r>
+            <a:endParaRPr dirty="0"/>
+          </a:p>
+        </p:txBody>
+      </p:sp>
+      <p:sp>
+        <p:nvSpPr>
+          <p:cNvPr id="3" name="Rounded Rectangle 2"/>
           <p:cNvSpPr/>
           <p:nvPr/>
         </p:nvSpPr>
         <p:spPr>
           <a:xfrm>
-            <a:off x="9814560" y="1691640"/>
-            <a:ext cx="4267200" cy="4206240"/>
+            <a:off x="548640" y="1691640"/>
+            <a:ext cx="3108960" cy="2560320"/>
           </a:xfrm>
           <a:prstGeom prst="roundRect">
             <a:avLst>
-              <a:gd name="adj" fmla="val 3260"/>
+              <a:gd name="adj" fmla="val 5357"/>
             </a:avLst>
           </a:prstGeom>
           <a:solidFill>
@@ -13084,19 +12712,20 @@
           <a:lstStyle/>
           <a:p>
             <a:pPr algn="ctr"/>
-          </a:p>
-        </p:txBody>
-      </p:sp>
-      <p:sp>
-        <p:nvSpPr>
-          <p:cNvPr id="20" name="Rounded Rectangle 19"/>
+            <a:endParaRPr/>
+          </a:p>
+        </p:txBody>
+      </p:sp>
+      <p:sp>
+        <p:nvSpPr>
+          <p:cNvPr id="4" name="Rounded Rectangle 3"/>
           <p:cNvSpPr/>
           <p:nvPr/>
         </p:nvSpPr>
         <p:spPr>
           <a:xfrm>
-            <a:off x="10043160" y="1920240"/>
-            <a:ext cx="365760" cy="274320"/>
+            <a:off x="777240" y="1920240"/>
+            <a:ext cx="420624" cy="274320"/>
           </a:xfrm>
           <a:prstGeom prst="roundRect">
             <a:avLst>
@@ -13126,7 +12755,7 @@
           </a:fontRef>
         </p:style>
         <p:txBody>
-          <a:bodyPr rtlCol="0" anchor="ctr" lIns="0" rIns="0" tIns="0" bIns="0"/>
+          <a:bodyPr lIns="0" tIns="0" rIns="0" bIns="0" rtlCol="0" anchor="ctr"/>
           <a:lstStyle/>
           <a:p>
             <a:pPr algn="ctr"/>
@@ -13137,21 +12766,21 @@
                 </a:solidFill>
                 <a:latin typeface="Calibri"/>
               </a:rPr>
-              <a:t>C</a:t>
+              <a:t>S1</a:t>
             </a:r>
           </a:p>
         </p:txBody>
       </p:sp>
       <p:sp>
         <p:nvSpPr>
-          <p:cNvPr id="21" name="TextBox 20"/>
+          <p:cNvPr id="5" name="TextBox 4"/>
           <p:cNvSpPr txBox="1"/>
           <p:nvPr/>
         </p:nvSpPr>
         <p:spPr>
           <a:xfrm>
-            <a:off x="10536936" y="1938528"/>
-            <a:ext cx="3307080" cy="274320"/>
+            <a:off x="777240" y="2377440"/>
+            <a:ext cx="2651760" cy="594360"/>
           </a:xfrm>
           <a:prstGeom prst="rect">
             <a:avLst/>
@@ -13159,7 +12788,7 @@
           <a:noFill/>
         </p:spPr>
         <p:txBody>
-          <a:bodyPr wrap="square" lIns="0" rIns="0" tIns="0" bIns="0" anchor="t">
+          <a:bodyPr wrap="square" lIns="0" tIns="0" rIns="0" bIns="0" anchor="t">
             <a:spAutoFit/>
           </a:bodyPr>
           <a:lstStyle/>
@@ -13172,21 +12801,21 @@
                 </a:solidFill>
                 <a:latin typeface="Calibri"/>
               </a:rPr>
-              <a:t>Farm C</a:t>
+              <a:t>Collect</a:t>
             </a:r>
           </a:p>
         </p:txBody>
       </p:sp>
       <p:sp>
         <p:nvSpPr>
-          <p:cNvPr id="22" name="TextBox 21"/>
+          <p:cNvPr id="6" name="TextBox 5"/>
           <p:cNvSpPr txBox="1"/>
           <p:nvPr/>
         </p:nvSpPr>
         <p:spPr>
           <a:xfrm>
-            <a:off x="10043160" y="2350008"/>
-            <a:ext cx="3810000" cy="3383279"/>
+            <a:off x="777240" y="3017520"/>
+            <a:ext cx="2651760" cy="1097279"/>
           </a:xfrm>
           <a:prstGeom prst="rect">
             <a:avLst/>
@@ -13194,212 +12823,33 @@
           <a:noFill/>
         </p:spPr>
         <p:txBody>
-          <a:bodyPr wrap="square" lIns="0" rIns="0" tIns="0" bIns="0" anchor="t">
+          <a:bodyPr wrap="square" lIns="0" tIns="0" rIns="0" bIns="0" anchor="t">
             <a:spAutoFit/>
           </a:bodyPr>
           <a:lstStyle/>
           <a:p>
             <a:pPr algn="l"/>
             <a:r>
-              <a:rPr sz="1400" b="0" i="0">
+              <a:rPr sz="1400" b="0" i="0" dirty="0">
                 <a:solidFill>
                   <a:srgbClr val="595959"/>
                 </a:solidFill>
                 <a:latin typeface="Calibri"/>
               </a:rPr>
-              <a:t>Pitch and blade-angle faults lead, with 8 events. It controls each of its three blades separately, so this fits.</a:t>
+              <a:t>Each turbine sends temperature, pressure and vibration readings.</a:t>
             </a:r>
           </a:p>
         </p:txBody>
       </p:sp>
       <p:sp>
         <p:nvSpPr>
-          <p:cNvPr id="23" name="TextBox 22"/>
-          <p:cNvSpPr txBox="1"/>
-          <p:nvPr/>
-        </p:nvSpPr>
-        <p:spPr>
-          <a:xfrm>
-            <a:off x="10043160" y="4023360"/>
-            <a:ext cx="1905000" cy="822960"/>
-          </a:xfrm>
-          <a:prstGeom prst="rect">
-            <a:avLst/>
-          </a:prstGeom>
-          <a:noFill/>
-        </p:spPr>
-        <p:txBody>
-          <a:bodyPr wrap="square" lIns="0" rIns="0" tIns="0" bIns="0" anchor="t">
-            <a:spAutoFit/>
-          </a:bodyPr>
-          <a:lstStyle/>
-          <a:p>
-            <a:pPr algn="l"/>
-            <a:r>
-              <a:rPr sz="4400" b="1" i="0">
-                <a:solidFill>
-                  <a:srgbClr val="0089CF"/>
-                </a:solidFill>
-                <a:latin typeface="Calibri"/>
-              </a:rPr>
-              <a:t>22</a:t>
-            </a:r>
-          </a:p>
-        </p:txBody>
-      </p:sp>
-      <p:sp>
-        <p:nvSpPr>
-          <p:cNvPr id="24" name="TextBox 23"/>
-          <p:cNvSpPr txBox="1"/>
-          <p:nvPr/>
-        </p:nvSpPr>
-        <p:spPr>
-          <a:xfrm>
-            <a:off x="10043160" y="4892040"/>
-            <a:ext cx="1905000" cy="365760"/>
-          </a:xfrm>
-          <a:prstGeom prst="rect">
-            <a:avLst/>
-          </a:prstGeom>
-          <a:noFill/>
-        </p:spPr>
-        <p:txBody>
-          <a:bodyPr wrap="square" lIns="0" rIns="0" tIns="0" bIns="0" anchor="t">
-            <a:spAutoFit/>
-          </a:bodyPr>
-          <a:lstStyle/>
-          <a:p>
-            <a:pPr algn="l"/>
-            <a:r>
-              <a:rPr sz="1400" b="0" i="0">
-                <a:solidFill>
-                  <a:srgbClr val="595959"/>
-                </a:solidFill>
-                <a:latin typeface="Calibri"/>
-              </a:rPr>
-              <a:t>Turbines</a:t>
-            </a:r>
-          </a:p>
-        </p:txBody>
-      </p:sp>
-      <p:sp>
-        <p:nvSpPr>
-          <p:cNvPr id="25" name="TextBox 24"/>
-          <p:cNvSpPr txBox="1"/>
-          <p:nvPr/>
-        </p:nvSpPr>
-        <p:spPr>
-          <a:xfrm>
-            <a:off x="11948160" y="4023360"/>
-            <a:ext cx="1905000" cy="822960"/>
-          </a:xfrm>
-          <a:prstGeom prst="rect">
-            <a:avLst/>
-          </a:prstGeom>
-          <a:noFill/>
-        </p:spPr>
-        <p:txBody>
-          <a:bodyPr wrap="square" lIns="0" rIns="0" tIns="0" bIns="0" anchor="t">
-            <a:spAutoFit/>
-          </a:bodyPr>
-          <a:lstStyle/>
-          <a:p>
-            <a:pPr algn="l"/>
-            <a:r>
-              <a:rPr sz="4400" b="1" i="0">
-                <a:solidFill>
-                  <a:srgbClr val="0089CF"/>
-                </a:solidFill>
-                <a:latin typeface="Calibri"/>
-              </a:rPr>
-              <a:t>27</a:t>
-            </a:r>
-          </a:p>
-        </p:txBody>
-      </p:sp>
-      <p:sp>
-        <p:nvSpPr>
-          <p:cNvPr id="26" name="TextBox 25"/>
-          <p:cNvSpPr txBox="1"/>
-          <p:nvPr/>
-        </p:nvSpPr>
-        <p:spPr>
-          <a:xfrm>
-            <a:off x="11948160" y="4892040"/>
-            <a:ext cx="1905000" cy="365760"/>
-          </a:xfrm>
-          <a:prstGeom prst="rect">
-            <a:avLst/>
-          </a:prstGeom>
-          <a:noFill/>
-        </p:spPr>
-        <p:txBody>
-          <a:bodyPr wrap="square" lIns="0" rIns="0" tIns="0" bIns="0" anchor="t">
-            <a:spAutoFit/>
-          </a:bodyPr>
-          <a:lstStyle/>
-          <a:p>
-            <a:pPr algn="l"/>
-            <a:r>
-              <a:rPr sz="1400" b="0" i="0">
-                <a:solidFill>
-                  <a:srgbClr val="595959"/>
-                </a:solidFill>
-                <a:latin typeface="Calibri"/>
-              </a:rPr>
-              <a:t>Failure events</a:t>
-            </a:r>
-          </a:p>
-        </p:txBody>
-      </p:sp>
-    </p:spTree>
-  </p:cSld>
-  <p:clrMapOvr>
-    <a:masterClrMapping/>
-  </p:clrMapOvr>
-</p:sld>
-</file>
-
-<file path=ppt/slides/slide8.xml><?xml version="1.0" encoding="utf-8"?>
-<p:sld xmlns:a="http://schemas.openxmlformats.org/drawingml/2006/main" xmlns:p="http://schemas.openxmlformats.org/presentationml/2006/main" xmlns:r="http://schemas.openxmlformats.org/officeDocument/2006/relationships">
-  <p:cSld>
-    <p:spTree>
-      <p:nvGrpSpPr>
-        <p:cNvPr id="1" name=""/>
-        <p:cNvGrpSpPr/>
-        <p:nvPr/>
-      </p:nvGrpSpPr>
-      <p:grpSpPr/>
-      <p:sp>
-        <p:nvSpPr>
-          <p:cNvPr id="2" name="Title 1"/>
-          <p:cNvSpPr>
-            <a:spLocks noGrp="1"/>
-          </p:cNvSpPr>
-          <p:nvPr>
-            <p:ph type="ctrTitle"/>
-          </p:nvPr>
-        </p:nvSpPr>
-        <p:spPr/>
-        <p:txBody>
-          <a:bodyPr/>
-          <a:lstStyle/>
-          <a:p>
-            <a:r>
-              <a:t>How It Works</a:t>
-            </a:r>
-          </a:p>
-        </p:txBody>
-      </p:sp>
-      <p:sp>
-        <p:nvSpPr>
-          <p:cNvPr id="3" name="Rounded Rectangle 2"/>
+          <p:cNvPr id="7" name="Rounded Rectangle 6"/>
           <p:cNvSpPr/>
           <p:nvPr/>
         </p:nvSpPr>
         <p:spPr>
           <a:xfrm>
-            <a:off x="548640" y="1691640"/>
+            <a:off x="4023360" y="1691640"/>
             <a:ext cx="3108960" cy="2560320"/>
           </a:xfrm>
           <a:prstGeom prst="roundRect">
@@ -13436,18 +12886,19 @@
           <a:lstStyle/>
           <a:p>
             <a:pPr algn="ctr"/>
-          </a:p>
-        </p:txBody>
-      </p:sp>
-      <p:sp>
-        <p:nvSpPr>
-          <p:cNvPr id="4" name="Rounded Rectangle 3"/>
+            <a:endParaRPr/>
+          </a:p>
+        </p:txBody>
+      </p:sp>
+      <p:sp>
+        <p:nvSpPr>
+          <p:cNvPr id="8" name="Rounded Rectangle 7"/>
           <p:cNvSpPr/>
           <p:nvPr/>
         </p:nvSpPr>
         <p:spPr>
           <a:xfrm>
-            <a:off x="777240" y="1920240"/>
+            <a:off x="4251960" y="1920240"/>
             <a:ext cx="420624" cy="274320"/>
           </a:xfrm>
           <a:prstGeom prst="roundRect">
@@ -13478,7 +12929,7 @@
           </a:fontRef>
         </p:style>
         <p:txBody>
-          <a:bodyPr rtlCol="0" anchor="ctr" lIns="0" rIns="0" tIns="0" bIns="0"/>
+          <a:bodyPr lIns="0" tIns="0" rIns="0" bIns="0" rtlCol="0" anchor="ctr"/>
           <a:lstStyle/>
           <a:p>
             <a:pPr algn="ctr"/>
@@ -13489,20 +12940,20 @@
                 </a:solidFill>
                 <a:latin typeface="Calibri"/>
               </a:rPr>
-              <a:t>S1</a:t>
+              <a:t>S2</a:t>
             </a:r>
           </a:p>
         </p:txBody>
       </p:sp>
       <p:sp>
         <p:nvSpPr>
-          <p:cNvPr id="5" name="TextBox 4"/>
+          <p:cNvPr id="9" name="TextBox 8"/>
           <p:cNvSpPr txBox="1"/>
           <p:nvPr/>
         </p:nvSpPr>
         <p:spPr>
           <a:xfrm>
-            <a:off x="777240" y="2377440"/>
+            <a:off x="4251960" y="2377440"/>
             <a:ext cx="2651760" cy="594360"/>
           </a:xfrm>
           <a:prstGeom prst="rect">
@@ -13511,7 +12962,7 @@
           <a:noFill/>
         </p:spPr>
         <p:txBody>
-          <a:bodyPr wrap="square" lIns="0" rIns="0" tIns="0" bIns="0" anchor="t">
+          <a:bodyPr wrap="square" lIns="0" tIns="0" rIns="0" bIns="0" anchor="t">
             <a:spAutoFit/>
           </a:bodyPr>
           <a:lstStyle/>
@@ -13524,20 +12975,20 @@
                 </a:solidFill>
                 <a:latin typeface="Calibri"/>
               </a:rPr>
-              <a:t>Collect</a:t>
+              <a:t>Clean</a:t>
             </a:r>
           </a:p>
         </p:txBody>
       </p:sp>
       <p:sp>
         <p:nvSpPr>
-          <p:cNvPr id="6" name="TextBox 5"/>
+          <p:cNvPr id="10" name="TextBox 9"/>
           <p:cNvSpPr txBox="1"/>
           <p:nvPr/>
         </p:nvSpPr>
         <p:spPr>
           <a:xfrm>
-            <a:off x="777240" y="3017520"/>
+            <a:off x="4251960" y="3017520"/>
             <a:ext cx="2651760" cy="1097279"/>
           </a:xfrm>
           <a:prstGeom prst="rect">
@@ -13546,7 +12997,7 @@
           <a:noFill/>
         </p:spPr>
         <p:txBody>
-          <a:bodyPr wrap="square" lIns="0" rIns="0" tIns="0" bIns="0" anchor="t">
+          <a:bodyPr wrap="square" lIns="0" tIns="0" rIns="0" bIns="0" anchor="t">
             <a:spAutoFit/>
           </a:bodyPr>
           <a:lstStyle/>
@@ -13559,20 +13010,20 @@
                 </a:solidFill>
                 <a:latin typeface="Calibri"/>
               </a:rPr>
-              <a:t>Each turbine sends temperature, pressure and vibration readings.</a:t>
+              <a:t>Readings are checked, cleaned and grouped by component (bronze, silver, gold).</a:t>
             </a:r>
           </a:p>
         </p:txBody>
       </p:sp>
       <p:sp>
         <p:nvSpPr>
-          <p:cNvPr id="7" name="Rounded Rectangle 6"/>
+          <p:cNvPr id="11" name="Rounded Rectangle 10"/>
           <p:cNvSpPr/>
           <p:nvPr/>
         </p:nvSpPr>
         <p:spPr>
           <a:xfrm>
-            <a:off x="4023360" y="1691640"/>
+            <a:off x="7498080" y="1691640"/>
             <a:ext cx="3108960" cy="2560320"/>
           </a:xfrm>
           <a:prstGeom prst="roundRect">
@@ -13609,18 +13060,19 @@
           <a:lstStyle/>
           <a:p>
             <a:pPr algn="ctr"/>
-          </a:p>
-        </p:txBody>
-      </p:sp>
-      <p:sp>
-        <p:nvSpPr>
-          <p:cNvPr id="8" name="Rounded Rectangle 7"/>
+            <a:endParaRPr/>
+          </a:p>
+        </p:txBody>
+      </p:sp>
+      <p:sp>
+        <p:nvSpPr>
+          <p:cNvPr id="12" name="Rounded Rectangle 11"/>
           <p:cNvSpPr/>
           <p:nvPr/>
         </p:nvSpPr>
         <p:spPr>
           <a:xfrm>
-            <a:off x="4251960" y="1920240"/>
+            <a:off x="7726680" y="1920240"/>
             <a:ext cx="420624" cy="274320"/>
           </a:xfrm>
           <a:prstGeom prst="roundRect">
@@ -13651,7 +13103,7 @@
           </a:fontRef>
         </p:style>
         <p:txBody>
-          <a:bodyPr rtlCol="0" anchor="ctr" lIns="0" rIns="0" tIns="0" bIns="0"/>
+          <a:bodyPr lIns="0" tIns="0" rIns="0" bIns="0" rtlCol="0" anchor="ctr"/>
           <a:lstStyle/>
           <a:p>
             <a:pPr algn="ctr"/>
@@ -13662,20 +13114,20 @@
                 </a:solidFill>
                 <a:latin typeface="Calibri"/>
               </a:rPr>
-              <a:t>S2</a:t>
+              <a:t>S3</a:t>
             </a:r>
           </a:p>
         </p:txBody>
       </p:sp>
       <p:sp>
         <p:nvSpPr>
-          <p:cNvPr id="9" name="TextBox 8"/>
+          <p:cNvPr id="13" name="TextBox 12"/>
           <p:cNvSpPr txBox="1"/>
           <p:nvPr/>
         </p:nvSpPr>
         <p:spPr>
           <a:xfrm>
-            <a:off x="4251960" y="2377440"/>
+            <a:off x="7726680" y="2377440"/>
             <a:ext cx="2651760" cy="594360"/>
           </a:xfrm>
           <a:prstGeom prst="rect">
@@ -13684,7 +13136,7 @@
           <a:noFill/>
         </p:spPr>
         <p:txBody>
-          <a:bodyPr wrap="square" lIns="0" rIns="0" tIns="0" bIns="0" anchor="t">
+          <a:bodyPr wrap="square" lIns="0" tIns="0" rIns="0" bIns="0" anchor="t">
             <a:spAutoFit/>
           </a:bodyPr>
           <a:lstStyle/>
@@ -13697,20 +13149,20 @@
                 </a:solidFill>
                 <a:latin typeface="Calibri"/>
               </a:rPr>
-              <a:t>Clean</a:t>
+              <a:t>Predict</a:t>
             </a:r>
           </a:p>
         </p:txBody>
       </p:sp>
       <p:sp>
         <p:nvSpPr>
-          <p:cNvPr id="10" name="TextBox 9"/>
+          <p:cNvPr id="14" name="TextBox 13"/>
           <p:cNvSpPr txBox="1"/>
           <p:nvPr/>
         </p:nvSpPr>
         <p:spPr>
           <a:xfrm>
-            <a:off x="4251960" y="3017520"/>
+            <a:off x="7726680" y="3017520"/>
             <a:ext cx="2651760" cy="1097279"/>
           </a:xfrm>
           <a:prstGeom prst="rect">
@@ -13719,7 +13171,7 @@
           <a:noFill/>
         </p:spPr>
         <p:txBody>
-          <a:bodyPr wrap="square" lIns="0" rIns="0" tIns="0" bIns="0" anchor="t">
+          <a:bodyPr wrap="square" lIns="0" tIns="0" rIns="0" bIns="0" anchor="t">
             <a:spAutoFit/>
           </a:bodyPr>
           <a:lstStyle/>
@@ -13732,20 +13184,20 @@
                 </a:solidFill>
                 <a:latin typeface="Calibri"/>
               </a:rPr>
-              <a:t>Readings are checked, cleaned and grouped by component (bronze, silver, gold).</a:t>
+              <a:t>Trained models flag faults and estimate remaining life.</a:t>
             </a:r>
           </a:p>
         </p:txBody>
       </p:sp>
       <p:sp>
         <p:nvSpPr>
-          <p:cNvPr id="11" name="Rounded Rectangle 10"/>
+          <p:cNvPr id="15" name="Rounded Rectangle 14"/>
           <p:cNvSpPr/>
           <p:nvPr/>
         </p:nvSpPr>
         <p:spPr>
           <a:xfrm>
-            <a:off x="7498080" y="1691640"/>
+            <a:off x="10972800" y="1691640"/>
             <a:ext cx="3108960" cy="2560320"/>
           </a:xfrm>
           <a:prstGeom prst="roundRect">
@@ -13782,18 +13234,19 @@
           <a:lstStyle/>
           <a:p>
             <a:pPr algn="ctr"/>
-          </a:p>
-        </p:txBody>
-      </p:sp>
-      <p:sp>
-        <p:nvSpPr>
-          <p:cNvPr id="12" name="Rounded Rectangle 11"/>
+            <a:endParaRPr/>
+          </a:p>
+        </p:txBody>
+      </p:sp>
+      <p:sp>
+        <p:nvSpPr>
+          <p:cNvPr id="16" name="Rounded Rectangle 15"/>
           <p:cNvSpPr/>
           <p:nvPr/>
         </p:nvSpPr>
         <p:spPr>
           <a:xfrm>
-            <a:off x="7726680" y="1920240"/>
+            <a:off x="11201400" y="1920240"/>
             <a:ext cx="420624" cy="274320"/>
           </a:xfrm>
           <a:prstGeom prst="roundRect">
@@ -13824,7 +13277,7 @@
           </a:fontRef>
         </p:style>
         <p:txBody>
-          <a:bodyPr rtlCol="0" anchor="ctr" lIns="0" rIns="0" tIns="0" bIns="0"/>
+          <a:bodyPr lIns="0" tIns="0" rIns="0" bIns="0" rtlCol="0" anchor="ctr"/>
           <a:lstStyle/>
           <a:p>
             <a:pPr algn="ctr"/>
@@ -13835,20 +13288,20 @@
                 </a:solidFill>
                 <a:latin typeface="Calibri"/>
               </a:rPr>
-              <a:t>S3</a:t>
+              <a:t>S4</a:t>
             </a:r>
           </a:p>
         </p:txBody>
       </p:sp>
       <p:sp>
         <p:nvSpPr>
-          <p:cNvPr id="13" name="TextBox 12"/>
+          <p:cNvPr id="17" name="TextBox 16"/>
           <p:cNvSpPr txBox="1"/>
           <p:nvPr/>
         </p:nvSpPr>
         <p:spPr>
           <a:xfrm>
-            <a:off x="7726680" y="2377440"/>
+            <a:off x="11201400" y="2377440"/>
             <a:ext cx="2651760" cy="594360"/>
           </a:xfrm>
           <a:prstGeom prst="rect">
@@ -13857,7 +13310,7 @@
           <a:noFill/>
         </p:spPr>
         <p:txBody>
-          <a:bodyPr wrap="square" lIns="0" rIns="0" tIns="0" bIns="0" anchor="t">
+          <a:bodyPr wrap="square" lIns="0" tIns="0" rIns="0" bIns="0" anchor="t">
             <a:spAutoFit/>
           </a:bodyPr>
           <a:lstStyle/>
@@ -13870,20 +13323,20 @@
                 </a:solidFill>
                 <a:latin typeface="Calibri"/>
               </a:rPr>
-              <a:t>Predict</a:t>
+              <a:t>Show</a:t>
             </a:r>
           </a:p>
         </p:txBody>
       </p:sp>
       <p:sp>
         <p:nvSpPr>
-          <p:cNvPr id="14" name="TextBox 13"/>
+          <p:cNvPr id="18" name="TextBox 17"/>
           <p:cNvSpPr txBox="1"/>
           <p:nvPr/>
         </p:nvSpPr>
         <p:spPr>
           <a:xfrm>
-            <a:off x="7726680" y="3017520"/>
+            <a:off x="11201400" y="3017520"/>
             <a:ext cx="2651760" cy="1097279"/>
           </a:xfrm>
           <a:prstGeom prst="rect">
@@ -13892,7 +13345,7 @@
           <a:noFill/>
         </p:spPr>
         <p:txBody>
-          <a:bodyPr wrap="square" lIns="0" rIns="0" tIns="0" bIns="0" anchor="t">
+          <a:bodyPr wrap="square" lIns="0" tIns="0" rIns="0" bIns="0" anchor="t">
             <a:spAutoFit/>
           </a:bodyPr>
           <a:lstStyle/>
@@ -13905,1572 +13358,7 @@
                 </a:solidFill>
                 <a:latin typeface="Calibri"/>
               </a:rPr>
-              <a:t>Trained models flag faults and estimate remaining life.</a:t>
-            </a:r>
-          </a:p>
-        </p:txBody>
-      </p:sp>
-      <p:sp>
-        <p:nvSpPr>
-          <p:cNvPr id="15" name="Rounded Rectangle 14"/>
-          <p:cNvSpPr/>
-          <p:nvPr/>
-        </p:nvSpPr>
-        <p:spPr>
-          <a:xfrm>
-            <a:off x="10972800" y="1691640"/>
-            <a:ext cx="3108960" cy="2560320"/>
-          </a:xfrm>
-          <a:prstGeom prst="roundRect">
-            <a:avLst>
-              <a:gd name="adj" fmla="val 5357"/>
-            </a:avLst>
-          </a:prstGeom>
-          <a:solidFill>
-            <a:srgbClr val="FFFFFF"/>
-          </a:solidFill>
-          <a:ln w="9525">
-            <a:solidFill>
-              <a:srgbClr val="C8DFF2"/>
-            </a:solidFill>
-          </a:ln>
-          <a:effectLst/>
-        </p:spPr>
-        <p:style>
-          <a:lnRef idx="1">
-            <a:schemeClr val="accent1"/>
-          </a:lnRef>
-          <a:fillRef idx="3">
-            <a:schemeClr val="accent1"/>
-          </a:fillRef>
-          <a:effectRef idx="2">
-            <a:schemeClr val="accent1"/>
-          </a:effectRef>
-          <a:fontRef idx="minor">
-            <a:schemeClr val="lt1"/>
-          </a:fontRef>
-        </p:style>
-        <p:txBody>
-          <a:bodyPr rtlCol="0" anchor="ctr"/>
-          <a:lstStyle/>
-          <a:p>
-            <a:pPr algn="ctr"/>
-          </a:p>
-        </p:txBody>
-      </p:sp>
-      <p:sp>
-        <p:nvSpPr>
-          <p:cNvPr id="16" name="Rounded Rectangle 15"/>
-          <p:cNvSpPr/>
-          <p:nvPr/>
-        </p:nvSpPr>
-        <p:spPr>
-          <a:xfrm>
-            <a:off x="11201400" y="1920240"/>
-            <a:ext cx="420624" cy="274320"/>
-          </a:xfrm>
-          <a:prstGeom prst="roundRect">
-            <a:avLst>
-              <a:gd name="adj" fmla="val 16666"/>
-            </a:avLst>
-          </a:prstGeom>
-          <a:solidFill>
-            <a:srgbClr val="002060"/>
-          </a:solidFill>
-          <a:ln>
-            <a:noFill/>
-          </a:ln>
-          <a:effectLst/>
-        </p:spPr>
-        <p:style>
-          <a:lnRef idx="1">
-            <a:schemeClr val="accent1"/>
-          </a:lnRef>
-          <a:fillRef idx="3">
-            <a:schemeClr val="accent1"/>
-          </a:fillRef>
-          <a:effectRef idx="2">
-            <a:schemeClr val="accent1"/>
-          </a:effectRef>
-          <a:fontRef idx="minor">
-            <a:schemeClr val="lt1"/>
-          </a:fontRef>
-        </p:style>
-        <p:txBody>
-          <a:bodyPr rtlCol="0" anchor="ctr" lIns="0" rIns="0" tIns="0" bIns="0"/>
-          <a:lstStyle/>
-          <a:p>
-            <a:pPr algn="ctr"/>
-            <a:r>
-              <a:rPr sz="1200" b="1">
-                <a:solidFill>
-                  <a:srgbClr val="FFFFFF"/>
-                </a:solidFill>
-                <a:latin typeface="Calibri"/>
-              </a:rPr>
-              <a:t>S4</a:t>
-            </a:r>
-          </a:p>
-        </p:txBody>
-      </p:sp>
-      <p:sp>
-        <p:nvSpPr>
-          <p:cNvPr id="17" name="TextBox 16"/>
-          <p:cNvSpPr txBox="1"/>
-          <p:nvPr/>
-        </p:nvSpPr>
-        <p:spPr>
-          <a:xfrm>
-            <a:off x="11201400" y="2377440"/>
-            <a:ext cx="2651760" cy="594360"/>
-          </a:xfrm>
-          <a:prstGeom prst="rect">
-            <a:avLst/>
-          </a:prstGeom>
-          <a:noFill/>
-        </p:spPr>
-        <p:txBody>
-          <a:bodyPr wrap="square" lIns="0" rIns="0" tIns="0" bIns="0" anchor="t">
-            <a:spAutoFit/>
-          </a:bodyPr>
-          <a:lstStyle/>
-          <a:p>
-            <a:pPr algn="l"/>
-            <a:r>
-              <a:rPr sz="1600" b="1" i="0">
-                <a:solidFill>
-                  <a:srgbClr val="002060"/>
-                </a:solidFill>
-                <a:latin typeface="Calibri"/>
-              </a:rPr>
-              <a:t>Show</a:t>
-            </a:r>
-          </a:p>
-        </p:txBody>
-      </p:sp>
-      <p:sp>
-        <p:nvSpPr>
-          <p:cNvPr id="18" name="TextBox 17"/>
-          <p:cNvSpPr txBox="1"/>
-          <p:nvPr/>
-        </p:nvSpPr>
-        <p:spPr>
-          <a:xfrm>
-            <a:off x="11201400" y="3017520"/>
-            <a:ext cx="2651760" cy="1097279"/>
-          </a:xfrm>
-          <a:prstGeom prst="rect">
-            <a:avLst/>
-          </a:prstGeom>
-          <a:noFill/>
-        </p:spPr>
-        <p:txBody>
-          <a:bodyPr wrap="square" lIns="0" rIns="0" tIns="0" bIns="0" anchor="t">
-            <a:spAutoFit/>
-          </a:bodyPr>
-          <a:lstStyle/>
-          <a:p>
-            <a:pPr algn="l"/>
-            <a:r>
-              <a:rPr sz="1400" b="0" i="0">
-                <a:solidFill>
-                  <a:srgbClr val="595959"/>
-                </a:solidFill>
-                <a:latin typeface="Calibri"/>
-              </a:rPr>
               <a:t>Dashboard shows fleet health, forecasts and alerts in one place.</a:t>
-            </a:r>
-          </a:p>
-        </p:txBody>
-      </p:sp>
-      <p:sp>
-        <p:nvSpPr>
-          <p:cNvPr id="19" name="TextBox 18"/>
-          <p:cNvSpPr txBox="1"/>
-          <p:nvPr/>
-        </p:nvSpPr>
-        <p:spPr>
-          <a:xfrm>
-            <a:off x="548640" y="4663440"/>
-            <a:ext cx="13533120" cy="365760"/>
-          </a:xfrm>
-          <a:prstGeom prst="rect">
-            <a:avLst/>
-          </a:prstGeom>
-          <a:noFill/>
-        </p:spPr>
-        <p:txBody>
-          <a:bodyPr wrap="square" lIns="0" rIns="0" tIns="0" bIns="0" anchor="t">
-            <a:spAutoFit/>
-          </a:bodyPr>
-          <a:lstStyle/>
-          <a:p>
-            <a:pPr algn="l"/>
-            <a:r>
-              <a:rPr sz="1800" b="1" i="0">
-                <a:solidFill>
-                  <a:srgbClr val="002060"/>
-                </a:solidFill>
-                <a:latin typeface="Calibri"/>
-              </a:rPr>
-              <a:t>Live demo screens</a:t>
-            </a:r>
-          </a:p>
-        </p:txBody>
-      </p:sp>
-      <p:sp>
-        <p:nvSpPr>
-          <p:cNvPr id="20" name="Rounded Rectangle 19"/>
-          <p:cNvSpPr/>
-          <p:nvPr/>
-        </p:nvSpPr>
-        <p:spPr>
-          <a:xfrm>
-            <a:off x="548640" y="5120640"/>
-            <a:ext cx="3108960" cy="1463040"/>
-          </a:xfrm>
-          <a:prstGeom prst="roundRect">
-            <a:avLst>
-              <a:gd name="adj" fmla="val 9374"/>
-            </a:avLst>
-          </a:prstGeom>
-          <a:solidFill>
-            <a:srgbClr val="FFFFFF"/>
-          </a:solidFill>
-          <a:ln w="9525">
-            <a:solidFill>
-              <a:srgbClr val="C8DFF2"/>
-            </a:solidFill>
-          </a:ln>
-          <a:effectLst/>
-        </p:spPr>
-        <p:style>
-          <a:lnRef idx="1">
-            <a:schemeClr val="accent1"/>
-          </a:lnRef>
-          <a:fillRef idx="3">
-            <a:schemeClr val="accent1"/>
-          </a:fillRef>
-          <a:effectRef idx="2">
-            <a:schemeClr val="accent1"/>
-          </a:effectRef>
-          <a:fontRef idx="minor">
-            <a:schemeClr val="lt1"/>
-          </a:fontRef>
-        </p:style>
-        <p:txBody>
-          <a:bodyPr rtlCol="0" anchor="ctr"/>
-          <a:lstStyle/>
-          <a:p>
-            <a:pPr algn="ctr"/>
-          </a:p>
-        </p:txBody>
-      </p:sp>
-      <p:sp>
-        <p:nvSpPr>
-          <p:cNvPr id="21" name="Rounded Rectangle 20"/>
-          <p:cNvSpPr/>
-          <p:nvPr/>
-        </p:nvSpPr>
-        <p:spPr>
-          <a:xfrm>
-            <a:off x="777240" y="5349240"/>
-            <a:ext cx="420624" cy="274320"/>
-          </a:xfrm>
-          <a:prstGeom prst="roundRect">
-            <a:avLst>
-              <a:gd name="adj" fmla="val 16666"/>
-            </a:avLst>
-          </a:prstGeom>
-          <a:solidFill>
-            <a:srgbClr val="002060"/>
-          </a:solidFill>
-          <a:ln>
-            <a:noFill/>
-          </a:ln>
-          <a:effectLst/>
-        </p:spPr>
-        <p:style>
-          <a:lnRef idx="1">
-            <a:schemeClr val="accent1"/>
-          </a:lnRef>
-          <a:fillRef idx="3">
-            <a:schemeClr val="accent1"/>
-          </a:fillRef>
-          <a:effectRef idx="2">
-            <a:schemeClr val="accent1"/>
-          </a:effectRef>
-          <a:fontRef idx="minor">
-            <a:schemeClr val="lt1"/>
-          </a:fontRef>
-        </p:style>
-        <p:txBody>
-          <a:bodyPr rtlCol="0" anchor="ctr" lIns="0" rIns="0" tIns="0" bIns="0"/>
-          <a:lstStyle/>
-          <a:p>
-            <a:pPr algn="ctr"/>
-            <a:r>
-              <a:rPr sz="1200" b="1">
-                <a:solidFill>
-                  <a:srgbClr val="FFFFFF"/>
-                </a:solidFill>
-                <a:latin typeface="Calibri"/>
-              </a:rPr>
-              <a:t>D1</a:t>
-            </a:r>
-          </a:p>
-        </p:txBody>
-      </p:sp>
-      <p:sp>
-        <p:nvSpPr>
-          <p:cNvPr id="22" name="TextBox 21"/>
-          <p:cNvSpPr txBox="1"/>
-          <p:nvPr/>
-        </p:nvSpPr>
-        <p:spPr>
-          <a:xfrm>
-            <a:off x="1325880" y="5367527"/>
-            <a:ext cx="2093976" cy="274320"/>
-          </a:xfrm>
-          <a:prstGeom prst="rect">
-            <a:avLst/>
-          </a:prstGeom>
-          <a:noFill/>
-        </p:spPr>
-        <p:txBody>
-          <a:bodyPr wrap="square" lIns="0" rIns="0" tIns="0" bIns="0" anchor="t">
-            <a:spAutoFit/>
-          </a:bodyPr>
-          <a:lstStyle/>
-          <a:p>
-            <a:pPr algn="l"/>
-            <a:r>
-              <a:rPr sz="1600" b="1" i="0">
-                <a:solidFill>
-                  <a:srgbClr val="002060"/>
-                </a:solidFill>
-                <a:latin typeface="Calibri"/>
-              </a:rPr>
-              <a:t>Fleet Overview</a:t>
-            </a:r>
-          </a:p>
-        </p:txBody>
-      </p:sp>
-      <p:sp>
-        <p:nvSpPr>
-          <p:cNvPr id="23" name="TextBox 22"/>
-          <p:cNvSpPr txBox="1"/>
-          <p:nvPr/>
-        </p:nvSpPr>
-        <p:spPr>
-          <a:xfrm>
-            <a:off x="777240" y="5779007"/>
-            <a:ext cx="2651760" cy="640080"/>
-          </a:xfrm>
-          <a:prstGeom prst="rect">
-            <a:avLst/>
-          </a:prstGeom>
-          <a:noFill/>
-        </p:spPr>
-        <p:txBody>
-          <a:bodyPr wrap="square" lIns="0" rIns="0" tIns="0" bIns="0" anchor="t">
-            <a:spAutoFit/>
-          </a:bodyPr>
-          <a:lstStyle/>
-          <a:p>
-            <a:pPr algn="l"/>
-            <a:r>
-              <a:rPr sz="1400" b="0" i="0">
-                <a:solidFill>
-                  <a:srgbClr val="595959"/>
-                </a:solidFill>
-                <a:latin typeface="Calibri"/>
-              </a:rPr>
-              <a:t>All turbines at a glance</a:t>
-            </a:r>
-          </a:p>
-        </p:txBody>
-      </p:sp>
-      <p:sp>
-        <p:nvSpPr>
-          <p:cNvPr id="24" name="Rounded Rectangle 23"/>
-          <p:cNvSpPr/>
-          <p:nvPr/>
-        </p:nvSpPr>
-        <p:spPr>
-          <a:xfrm>
-            <a:off x="4023360" y="5120640"/>
-            <a:ext cx="3108960" cy="1463040"/>
-          </a:xfrm>
-          <a:prstGeom prst="roundRect">
-            <a:avLst>
-              <a:gd name="adj" fmla="val 9374"/>
-            </a:avLst>
-          </a:prstGeom>
-          <a:solidFill>
-            <a:srgbClr val="FFFFFF"/>
-          </a:solidFill>
-          <a:ln w="9525">
-            <a:solidFill>
-              <a:srgbClr val="C8DFF2"/>
-            </a:solidFill>
-          </a:ln>
-          <a:effectLst/>
-        </p:spPr>
-        <p:style>
-          <a:lnRef idx="1">
-            <a:schemeClr val="accent1"/>
-          </a:lnRef>
-          <a:fillRef idx="3">
-            <a:schemeClr val="accent1"/>
-          </a:fillRef>
-          <a:effectRef idx="2">
-            <a:schemeClr val="accent1"/>
-          </a:effectRef>
-          <a:fontRef idx="minor">
-            <a:schemeClr val="lt1"/>
-          </a:fontRef>
-        </p:style>
-        <p:txBody>
-          <a:bodyPr rtlCol="0" anchor="ctr"/>
-          <a:lstStyle/>
-          <a:p>
-            <a:pPr algn="ctr"/>
-          </a:p>
-        </p:txBody>
-      </p:sp>
-      <p:sp>
-        <p:nvSpPr>
-          <p:cNvPr id="25" name="Rounded Rectangle 24"/>
-          <p:cNvSpPr/>
-          <p:nvPr/>
-        </p:nvSpPr>
-        <p:spPr>
-          <a:xfrm>
-            <a:off x="4251960" y="5349240"/>
-            <a:ext cx="420624" cy="274320"/>
-          </a:xfrm>
-          <a:prstGeom prst="roundRect">
-            <a:avLst>
-              <a:gd name="adj" fmla="val 16666"/>
-            </a:avLst>
-          </a:prstGeom>
-          <a:solidFill>
-            <a:srgbClr val="002060"/>
-          </a:solidFill>
-          <a:ln>
-            <a:noFill/>
-          </a:ln>
-          <a:effectLst/>
-        </p:spPr>
-        <p:style>
-          <a:lnRef idx="1">
-            <a:schemeClr val="accent1"/>
-          </a:lnRef>
-          <a:fillRef idx="3">
-            <a:schemeClr val="accent1"/>
-          </a:fillRef>
-          <a:effectRef idx="2">
-            <a:schemeClr val="accent1"/>
-          </a:effectRef>
-          <a:fontRef idx="minor">
-            <a:schemeClr val="lt1"/>
-          </a:fontRef>
-        </p:style>
-        <p:txBody>
-          <a:bodyPr rtlCol="0" anchor="ctr" lIns="0" rIns="0" tIns="0" bIns="0"/>
-          <a:lstStyle/>
-          <a:p>
-            <a:pPr algn="ctr"/>
-            <a:r>
-              <a:rPr sz="1200" b="1">
-                <a:solidFill>
-                  <a:srgbClr val="FFFFFF"/>
-                </a:solidFill>
-                <a:latin typeface="Calibri"/>
-              </a:rPr>
-              <a:t>D2</a:t>
-            </a:r>
-          </a:p>
-        </p:txBody>
-      </p:sp>
-      <p:sp>
-        <p:nvSpPr>
-          <p:cNvPr id="26" name="TextBox 25"/>
-          <p:cNvSpPr txBox="1"/>
-          <p:nvPr/>
-        </p:nvSpPr>
-        <p:spPr>
-          <a:xfrm>
-            <a:off x="4800600" y="5367527"/>
-            <a:ext cx="2093976" cy="274320"/>
-          </a:xfrm>
-          <a:prstGeom prst="rect">
-            <a:avLst/>
-          </a:prstGeom>
-          <a:noFill/>
-        </p:spPr>
-        <p:txBody>
-          <a:bodyPr wrap="square" lIns="0" rIns="0" tIns="0" bIns="0" anchor="t">
-            <a:spAutoFit/>
-          </a:bodyPr>
-          <a:lstStyle/>
-          <a:p>
-            <a:pPr algn="l"/>
-            <a:r>
-              <a:rPr sz="1600" b="1" i="0">
-                <a:solidFill>
-                  <a:srgbClr val="002060"/>
-                </a:solidFill>
-                <a:latin typeface="Calibri"/>
-              </a:rPr>
-              <a:t>Asset Detail</a:t>
-            </a:r>
-          </a:p>
-        </p:txBody>
-      </p:sp>
-      <p:sp>
-        <p:nvSpPr>
-          <p:cNvPr id="27" name="TextBox 26"/>
-          <p:cNvSpPr txBox="1"/>
-          <p:nvPr/>
-        </p:nvSpPr>
-        <p:spPr>
-          <a:xfrm>
-            <a:off x="4251960" y="5779007"/>
-            <a:ext cx="2651760" cy="640080"/>
-          </a:xfrm>
-          <a:prstGeom prst="rect">
-            <a:avLst/>
-          </a:prstGeom>
-          <a:noFill/>
-        </p:spPr>
-        <p:txBody>
-          <a:bodyPr wrap="square" lIns="0" rIns="0" tIns="0" bIns="0" anchor="t">
-            <a:spAutoFit/>
-          </a:bodyPr>
-          <a:lstStyle/>
-          <a:p>
-            <a:pPr algn="l"/>
-            <a:r>
-              <a:rPr sz="1400" b="0" i="0">
-                <a:solidFill>
-                  <a:srgbClr val="595959"/>
-                </a:solidFill>
-                <a:latin typeface="Calibri"/>
-              </a:rPr>
-              <a:t>One turbine's sensor history</a:t>
-            </a:r>
-          </a:p>
-        </p:txBody>
-      </p:sp>
-      <p:sp>
-        <p:nvSpPr>
-          <p:cNvPr id="28" name="Rounded Rectangle 27"/>
-          <p:cNvSpPr/>
-          <p:nvPr/>
-        </p:nvSpPr>
-        <p:spPr>
-          <a:xfrm>
-            <a:off x="7498080" y="5120640"/>
-            <a:ext cx="3108960" cy="1463040"/>
-          </a:xfrm>
-          <a:prstGeom prst="roundRect">
-            <a:avLst>
-              <a:gd name="adj" fmla="val 9374"/>
-            </a:avLst>
-          </a:prstGeom>
-          <a:solidFill>
-            <a:srgbClr val="FFFFFF"/>
-          </a:solidFill>
-          <a:ln w="9525">
-            <a:solidFill>
-              <a:srgbClr val="C8DFF2"/>
-            </a:solidFill>
-          </a:ln>
-          <a:effectLst/>
-        </p:spPr>
-        <p:style>
-          <a:lnRef idx="1">
-            <a:schemeClr val="accent1"/>
-          </a:lnRef>
-          <a:fillRef idx="3">
-            <a:schemeClr val="accent1"/>
-          </a:fillRef>
-          <a:effectRef idx="2">
-            <a:schemeClr val="accent1"/>
-          </a:effectRef>
-          <a:fontRef idx="minor">
-            <a:schemeClr val="lt1"/>
-          </a:fontRef>
-        </p:style>
-        <p:txBody>
-          <a:bodyPr rtlCol="0" anchor="ctr"/>
-          <a:lstStyle/>
-          <a:p>
-            <a:pPr algn="ctr"/>
-          </a:p>
-        </p:txBody>
-      </p:sp>
-      <p:sp>
-        <p:nvSpPr>
-          <p:cNvPr id="29" name="Rounded Rectangle 28"/>
-          <p:cNvSpPr/>
-          <p:nvPr/>
-        </p:nvSpPr>
-        <p:spPr>
-          <a:xfrm>
-            <a:off x="7726680" y="5349240"/>
-            <a:ext cx="420624" cy="274320"/>
-          </a:xfrm>
-          <a:prstGeom prst="roundRect">
-            <a:avLst>
-              <a:gd name="adj" fmla="val 16666"/>
-            </a:avLst>
-          </a:prstGeom>
-          <a:solidFill>
-            <a:srgbClr val="002060"/>
-          </a:solidFill>
-          <a:ln>
-            <a:noFill/>
-          </a:ln>
-          <a:effectLst/>
-        </p:spPr>
-        <p:style>
-          <a:lnRef idx="1">
-            <a:schemeClr val="accent1"/>
-          </a:lnRef>
-          <a:fillRef idx="3">
-            <a:schemeClr val="accent1"/>
-          </a:fillRef>
-          <a:effectRef idx="2">
-            <a:schemeClr val="accent1"/>
-          </a:effectRef>
-          <a:fontRef idx="minor">
-            <a:schemeClr val="lt1"/>
-          </a:fontRef>
-        </p:style>
-        <p:txBody>
-          <a:bodyPr rtlCol="0" anchor="ctr" lIns="0" rIns="0" tIns="0" bIns="0"/>
-          <a:lstStyle/>
-          <a:p>
-            <a:pPr algn="ctr"/>
-            <a:r>
-              <a:rPr sz="1200" b="1">
-                <a:solidFill>
-                  <a:srgbClr val="FFFFFF"/>
-                </a:solidFill>
-                <a:latin typeface="Calibri"/>
-              </a:rPr>
-              <a:t>D3</a:t>
-            </a:r>
-          </a:p>
-        </p:txBody>
-      </p:sp>
-      <p:sp>
-        <p:nvSpPr>
-          <p:cNvPr id="30" name="TextBox 29"/>
-          <p:cNvSpPr txBox="1"/>
-          <p:nvPr/>
-        </p:nvSpPr>
-        <p:spPr>
-          <a:xfrm>
-            <a:off x="8275320" y="5367527"/>
-            <a:ext cx="2093976" cy="274320"/>
-          </a:xfrm>
-          <a:prstGeom prst="rect">
-            <a:avLst/>
-          </a:prstGeom>
-          <a:noFill/>
-        </p:spPr>
-        <p:txBody>
-          <a:bodyPr wrap="square" lIns="0" rIns="0" tIns="0" bIns="0" anchor="t">
-            <a:spAutoFit/>
-          </a:bodyPr>
-          <a:lstStyle/>
-          <a:p>
-            <a:pPr algn="l"/>
-            <a:r>
-              <a:rPr sz="1600" b="1" i="0">
-                <a:solidFill>
-                  <a:srgbClr val="002060"/>
-                </a:solidFill>
-                <a:latin typeface="Calibri"/>
-              </a:rPr>
-              <a:t>Forecasts &amp; RUL</a:t>
-            </a:r>
-          </a:p>
-        </p:txBody>
-      </p:sp>
-      <p:sp>
-        <p:nvSpPr>
-          <p:cNvPr id="31" name="TextBox 30"/>
-          <p:cNvSpPr txBox="1"/>
-          <p:nvPr/>
-        </p:nvSpPr>
-        <p:spPr>
-          <a:xfrm>
-            <a:off x="7726680" y="5779007"/>
-            <a:ext cx="2651760" cy="640080"/>
-          </a:xfrm>
-          <a:prstGeom prst="rect">
-            <a:avLst/>
-          </a:prstGeom>
-          <a:noFill/>
-        </p:spPr>
-        <p:txBody>
-          <a:bodyPr wrap="square" lIns="0" rIns="0" tIns="0" bIns="0" anchor="t">
-            <a:spAutoFit/>
-          </a:bodyPr>
-          <a:lstStyle/>
-          <a:p>
-            <a:pPr algn="l"/>
-            <a:r>
-              <a:rPr sz="1400" b="0" i="0">
-                <a:solidFill>
-                  <a:srgbClr val="595959"/>
-                </a:solidFill>
-                <a:latin typeface="Calibri"/>
-              </a:rPr>
-              <a:t>Where a component is heading</a:t>
-            </a:r>
-          </a:p>
-        </p:txBody>
-      </p:sp>
-      <p:sp>
-        <p:nvSpPr>
-          <p:cNvPr id="32" name="Rounded Rectangle 31"/>
-          <p:cNvSpPr/>
-          <p:nvPr/>
-        </p:nvSpPr>
-        <p:spPr>
-          <a:xfrm>
-            <a:off x="10972800" y="5120640"/>
-            <a:ext cx="3108960" cy="1463040"/>
-          </a:xfrm>
-          <a:prstGeom prst="roundRect">
-            <a:avLst>
-              <a:gd name="adj" fmla="val 9374"/>
-            </a:avLst>
-          </a:prstGeom>
-          <a:solidFill>
-            <a:srgbClr val="FFFFFF"/>
-          </a:solidFill>
-          <a:ln w="9525">
-            <a:solidFill>
-              <a:srgbClr val="C8DFF2"/>
-            </a:solidFill>
-          </a:ln>
-          <a:effectLst/>
-        </p:spPr>
-        <p:style>
-          <a:lnRef idx="1">
-            <a:schemeClr val="accent1"/>
-          </a:lnRef>
-          <a:fillRef idx="3">
-            <a:schemeClr val="accent1"/>
-          </a:fillRef>
-          <a:effectRef idx="2">
-            <a:schemeClr val="accent1"/>
-          </a:effectRef>
-          <a:fontRef idx="minor">
-            <a:schemeClr val="lt1"/>
-          </a:fontRef>
-        </p:style>
-        <p:txBody>
-          <a:bodyPr rtlCol="0" anchor="ctr"/>
-          <a:lstStyle/>
-          <a:p>
-            <a:pPr algn="ctr"/>
-          </a:p>
-        </p:txBody>
-      </p:sp>
-      <p:sp>
-        <p:nvSpPr>
-          <p:cNvPr id="33" name="Rounded Rectangle 32"/>
-          <p:cNvSpPr/>
-          <p:nvPr/>
-        </p:nvSpPr>
-        <p:spPr>
-          <a:xfrm>
-            <a:off x="11201400" y="5349240"/>
-            <a:ext cx="420624" cy="274320"/>
-          </a:xfrm>
-          <a:prstGeom prst="roundRect">
-            <a:avLst>
-              <a:gd name="adj" fmla="val 16666"/>
-            </a:avLst>
-          </a:prstGeom>
-          <a:solidFill>
-            <a:srgbClr val="002060"/>
-          </a:solidFill>
-          <a:ln>
-            <a:noFill/>
-          </a:ln>
-          <a:effectLst/>
-        </p:spPr>
-        <p:style>
-          <a:lnRef idx="1">
-            <a:schemeClr val="accent1"/>
-          </a:lnRef>
-          <a:fillRef idx="3">
-            <a:schemeClr val="accent1"/>
-          </a:fillRef>
-          <a:effectRef idx="2">
-            <a:schemeClr val="accent1"/>
-          </a:effectRef>
-          <a:fontRef idx="minor">
-            <a:schemeClr val="lt1"/>
-          </a:fontRef>
-        </p:style>
-        <p:txBody>
-          <a:bodyPr rtlCol="0" anchor="ctr" lIns="0" rIns="0" tIns="0" bIns="0"/>
-          <a:lstStyle/>
-          <a:p>
-            <a:pPr algn="ctr"/>
-            <a:r>
-              <a:rPr sz="1200" b="1">
-                <a:solidFill>
-                  <a:srgbClr val="FFFFFF"/>
-                </a:solidFill>
-                <a:latin typeface="Calibri"/>
-              </a:rPr>
-              <a:t>D4</a:t>
-            </a:r>
-          </a:p>
-        </p:txBody>
-      </p:sp>
-      <p:sp>
-        <p:nvSpPr>
-          <p:cNvPr id="34" name="TextBox 33"/>
-          <p:cNvSpPr txBox="1"/>
-          <p:nvPr/>
-        </p:nvSpPr>
-        <p:spPr>
-          <a:xfrm>
-            <a:off x="11750040" y="5367527"/>
-            <a:ext cx="2093976" cy="274320"/>
-          </a:xfrm>
-          <a:prstGeom prst="rect">
-            <a:avLst/>
-          </a:prstGeom>
-          <a:noFill/>
-        </p:spPr>
-        <p:txBody>
-          <a:bodyPr wrap="square" lIns="0" rIns="0" tIns="0" bIns="0" anchor="t">
-            <a:spAutoFit/>
-          </a:bodyPr>
-          <a:lstStyle/>
-          <a:p>
-            <a:pPr algn="l"/>
-            <a:r>
-              <a:rPr sz="1600" b="1" i="0">
-                <a:solidFill>
-                  <a:srgbClr val="002060"/>
-                </a:solidFill>
-                <a:latin typeface="Calibri"/>
-              </a:rPr>
-              <a:t>Alerts</a:t>
-            </a:r>
-          </a:p>
-        </p:txBody>
-      </p:sp>
-      <p:sp>
-        <p:nvSpPr>
-          <p:cNvPr id="35" name="TextBox 34"/>
-          <p:cNvSpPr txBox="1"/>
-          <p:nvPr/>
-        </p:nvSpPr>
-        <p:spPr>
-          <a:xfrm>
-            <a:off x="11201400" y="5779007"/>
-            <a:ext cx="2651760" cy="640080"/>
-          </a:xfrm>
-          <a:prstGeom prst="rect">
-            <a:avLst/>
-          </a:prstGeom>
-          <a:noFill/>
-        </p:spPr>
-        <p:txBody>
-          <a:bodyPr wrap="square" lIns="0" rIns="0" tIns="0" bIns="0" anchor="t">
-            <a:spAutoFit/>
-          </a:bodyPr>
-          <a:lstStyle/>
-          <a:p>
-            <a:pPr algn="l"/>
-            <a:r>
-              <a:rPr sz="1400" b="0" i="0">
-                <a:solidFill>
-                  <a:srgbClr val="595959"/>
-                </a:solidFill>
-                <a:latin typeface="Calibri"/>
-              </a:rPr>
-              <a:t>What's flagged and why</a:t>
-            </a:r>
-          </a:p>
-        </p:txBody>
-      </p:sp>
-    </p:spTree>
-  </p:cSld>
-  <p:clrMapOvr>
-    <a:masterClrMapping/>
-  </p:clrMapOvr>
-</p:sld>
-</file>
-
-<file path=ppt/slides/slide9.xml><?xml version="1.0" encoding="utf-8"?>
-<p:sld xmlns:a="http://schemas.openxmlformats.org/drawingml/2006/main" xmlns:p="http://schemas.openxmlformats.org/presentationml/2006/main" xmlns:r="http://schemas.openxmlformats.org/officeDocument/2006/relationships">
-  <p:cSld>
-    <p:spTree>
-      <p:nvGrpSpPr>
-        <p:cNvPr id="1" name=""/>
-        <p:cNvGrpSpPr/>
-        <p:nvPr/>
-      </p:nvGrpSpPr>
-      <p:grpSpPr/>
-      <p:sp>
-        <p:nvSpPr>
-          <p:cNvPr id="2" name="Title 1"/>
-          <p:cNvSpPr>
-            <a:spLocks noGrp="1"/>
-          </p:cNvSpPr>
-          <p:nvPr>
-            <p:ph type="ctrTitle"/>
-          </p:nvPr>
-        </p:nvSpPr>
-        <p:spPr/>
-        <p:txBody>
-          <a:bodyPr/>
-          <a:lstStyle/>
-          <a:p>
-            <a:r>
-              <a:t>Status and Roadmap</a:t>
-            </a:r>
-          </a:p>
-        </p:txBody>
-      </p:sp>
-      <p:sp>
-        <p:nvSpPr>
-          <p:cNvPr id="3" name="Rounded Rectangle 2"/>
-          <p:cNvSpPr/>
-          <p:nvPr/>
-        </p:nvSpPr>
-        <p:spPr>
-          <a:xfrm>
-            <a:off x="548640" y="1892807"/>
-            <a:ext cx="4267200" cy="3931920"/>
-          </a:xfrm>
-          <a:prstGeom prst="roundRect">
-            <a:avLst>
-              <a:gd name="adj" fmla="val 6976"/>
-            </a:avLst>
-          </a:prstGeom>
-          <a:solidFill>
-            <a:srgbClr val="EAF4FC"/>
-          </a:solidFill>
-          <a:ln w="12700">
-            <a:solidFill>
-              <a:srgbClr val="0089CF"/>
-            </a:solidFill>
-          </a:ln>
-          <a:effectLst/>
-        </p:spPr>
-        <p:style>
-          <a:lnRef idx="1">
-            <a:schemeClr val="accent1"/>
-          </a:lnRef>
-          <a:fillRef idx="3">
-            <a:schemeClr val="accent1"/>
-          </a:fillRef>
-          <a:effectRef idx="2">
-            <a:schemeClr val="accent1"/>
-          </a:effectRef>
-          <a:fontRef idx="minor">
-            <a:schemeClr val="lt1"/>
-          </a:fontRef>
-        </p:style>
-        <p:txBody>
-          <a:bodyPr rtlCol="0" anchor="ctr"/>
-          <a:lstStyle/>
-          <a:p>
-            <a:pPr algn="ctr"/>
-          </a:p>
-        </p:txBody>
-      </p:sp>
-      <p:sp>
-        <p:nvSpPr>
-          <p:cNvPr id="4" name="Rounded Rectangle 3"/>
-          <p:cNvSpPr/>
-          <p:nvPr/>
-        </p:nvSpPr>
-        <p:spPr>
-          <a:xfrm>
-            <a:off x="731520" y="2075688"/>
-            <a:ext cx="3901440" cy="457200"/>
-          </a:xfrm>
-          <a:prstGeom prst="roundRect">
-            <a:avLst>
-              <a:gd name="adj" fmla="val 10000"/>
-            </a:avLst>
-          </a:prstGeom>
-          <a:solidFill>
-            <a:srgbClr val="00679B"/>
-          </a:solidFill>
-          <a:ln>
-            <a:noFill/>
-          </a:ln>
-          <a:effectLst/>
-        </p:spPr>
-        <p:style>
-          <a:lnRef idx="1">
-            <a:schemeClr val="accent1"/>
-          </a:lnRef>
-          <a:fillRef idx="3">
-            <a:schemeClr val="accent1"/>
-          </a:fillRef>
-          <a:effectRef idx="2">
-            <a:schemeClr val="accent1"/>
-          </a:effectRef>
-          <a:fontRef idx="minor">
-            <a:schemeClr val="lt1"/>
-          </a:fontRef>
-        </p:style>
-        <p:txBody>
-          <a:bodyPr rtlCol="0" anchor="ctr"/>
-          <a:lstStyle/>
-          <a:p>
-            <a:pPr algn="ctr"/>
-          </a:p>
-        </p:txBody>
-      </p:sp>
-      <p:sp>
-        <p:nvSpPr>
-          <p:cNvPr id="5" name="TextBox 4"/>
-          <p:cNvSpPr txBox="1"/>
-          <p:nvPr/>
-        </p:nvSpPr>
-        <p:spPr>
-          <a:xfrm>
-            <a:off x="731520" y="2075688"/>
-            <a:ext cx="3901440" cy="457200"/>
-          </a:xfrm>
-          <a:prstGeom prst="rect">
-            <a:avLst/>
-          </a:prstGeom>
-          <a:noFill/>
-        </p:spPr>
-        <p:txBody>
-          <a:bodyPr wrap="square" lIns="0" rIns="0" tIns="0" bIns="0" anchor="ctr">
-            <a:spAutoFit/>
-          </a:bodyPr>
-          <a:lstStyle/>
-          <a:p>
-            <a:pPr algn="ctr"/>
-            <a:r>
-              <a:rPr sz="1600" b="1" i="0">
-                <a:solidFill>
-                  <a:srgbClr val="FFFFFF"/>
-                </a:solidFill>
-                <a:latin typeface="Calibri"/>
-              </a:rPr>
-              <a:t>Today</a:t>
-            </a:r>
-          </a:p>
-        </p:txBody>
-      </p:sp>
-      <p:sp>
-        <p:nvSpPr>
-          <p:cNvPr id="6" name="TextBox 5"/>
-          <p:cNvSpPr txBox="1"/>
-          <p:nvPr/>
-        </p:nvSpPr>
-        <p:spPr>
-          <a:xfrm>
-            <a:off x="868680" y="2807208"/>
-            <a:ext cx="3627120" cy="2743200"/>
-          </a:xfrm>
-          <a:prstGeom prst="rect">
-            <a:avLst/>
-          </a:prstGeom>
-          <a:noFill/>
-        </p:spPr>
-        <p:txBody>
-          <a:bodyPr wrap="square" lIns="0" rIns="0" tIns="0" bIns="0" anchor="t">
-            <a:spAutoFit/>
-          </a:bodyPr>
-          <a:lstStyle/>
-          <a:p>
-            <a:pPr algn="l" marL="274320" indent="-274320">
-              <a:spcAft>
-                <a:spcPts val="800"/>
-              </a:spcAft>
-              <a:buChar char="•"/>
-            </a:pPr>
-            <a:r>
-              <a:rPr sz="1500" b="0" i="0">
-                <a:solidFill>
-                  <a:srgbClr val="595959"/>
-                </a:solidFill>
-                <a:latin typeface="Calibri"/>
-              </a:rPr>
-              <a:t>Full stack running locally on Docker</a:t>
-            </a:r>
-          </a:p>
-          <a:p>
-            <a:pPr algn="l" marL="274320" indent="-274320">
-              <a:spcAft>
-                <a:spcPts val="800"/>
-              </a:spcAft>
-              <a:buChar char="•"/>
-            </a:pPr>
-            <a:r>
-              <a:rPr sz="1500" b="0" i="0">
-                <a:solidFill>
-                  <a:srgbClr val="595959"/>
-                </a:solidFill>
-                <a:latin typeface="Calibri"/>
-              </a:rPr>
-              <a:t>Real pipeline and model training on all 3 farms</a:t>
-            </a:r>
-          </a:p>
-          <a:p>
-            <a:pPr algn="l" marL="274320" indent="-274320">
-              <a:spcAft>
-                <a:spcPts val="800"/>
-              </a:spcAft>
-              <a:buChar char="•"/>
-            </a:pPr>
-            <a:r>
-              <a:rPr sz="1500" b="0" i="0">
-                <a:solidFill>
-                  <a:srgbClr val="595959"/>
-                </a:solidFill>
-                <a:latin typeface="Calibri"/>
-              </a:rPr>
-              <a:t>Dashboard with RUL, forecasts and alerts</a:t>
-            </a:r>
-          </a:p>
-          <a:p>
-            <a:pPr algn="l" marL="274320" indent="-274320">
-              <a:spcAft>
-                <a:spcPts val="800"/>
-              </a:spcAft>
-              <a:buChar char="•"/>
-            </a:pPr>
-            <a:r>
-              <a:rPr sz="1500" b="0" i="0">
-                <a:solidFill>
-                  <a:srgbClr val="595959"/>
-                </a:solidFill>
-                <a:latin typeface="Calibri"/>
-              </a:rPr>
-              <a:t>Digital twin shows live data (not a physics model)</a:t>
-            </a:r>
-          </a:p>
-        </p:txBody>
-      </p:sp>
-      <p:sp>
-        <p:nvSpPr>
-          <p:cNvPr id="7" name="Rounded Rectangle 6"/>
-          <p:cNvSpPr/>
-          <p:nvPr/>
-        </p:nvSpPr>
-        <p:spPr>
-          <a:xfrm>
-            <a:off x="5181600" y="1892807"/>
-            <a:ext cx="4267200" cy="3931920"/>
-          </a:xfrm>
-          <a:prstGeom prst="roundRect">
-            <a:avLst>
-              <a:gd name="adj" fmla="val 6976"/>
-            </a:avLst>
-          </a:prstGeom>
-          <a:solidFill>
-            <a:srgbClr val="EAF4FC"/>
-          </a:solidFill>
-          <a:ln w="12700">
-            <a:solidFill>
-              <a:srgbClr val="0089CF"/>
-            </a:solidFill>
-          </a:ln>
-          <a:effectLst/>
-        </p:spPr>
-        <p:style>
-          <a:lnRef idx="1">
-            <a:schemeClr val="accent1"/>
-          </a:lnRef>
-          <a:fillRef idx="3">
-            <a:schemeClr val="accent1"/>
-          </a:fillRef>
-          <a:effectRef idx="2">
-            <a:schemeClr val="accent1"/>
-          </a:effectRef>
-          <a:fontRef idx="minor">
-            <a:schemeClr val="lt1"/>
-          </a:fontRef>
-        </p:style>
-        <p:txBody>
-          <a:bodyPr rtlCol="0" anchor="ctr"/>
-          <a:lstStyle/>
-          <a:p>
-            <a:pPr algn="ctr"/>
-          </a:p>
-        </p:txBody>
-      </p:sp>
-      <p:sp>
-        <p:nvSpPr>
-          <p:cNvPr id="8" name="Rounded Rectangle 7"/>
-          <p:cNvSpPr/>
-          <p:nvPr/>
-        </p:nvSpPr>
-        <p:spPr>
-          <a:xfrm>
-            <a:off x="5364480" y="2075688"/>
-            <a:ext cx="3901440" cy="457200"/>
-          </a:xfrm>
-          <a:prstGeom prst="roundRect">
-            <a:avLst>
-              <a:gd name="adj" fmla="val 10000"/>
-            </a:avLst>
-          </a:prstGeom>
-          <a:solidFill>
-            <a:srgbClr val="00679B"/>
-          </a:solidFill>
-          <a:ln>
-            <a:noFill/>
-          </a:ln>
-          <a:effectLst/>
-        </p:spPr>
-        <p:style>
-          <a:lnRef idx="1">
-            <a:schemeClr val="accent1"/>
-          </a:lnRef>
-          <a:fillRef idx="3">
-            <a:schemeClr val="accent1"/>
-          </a:fillRef>
-          <a:effectRef idx="2">
-            <a:schemeClr val="accent1"/>
-          </a:effectRef>
-          <a:fontRef idx="minor">
-            <a:schemeClr val="lt1"/>
-          </a:fontRef>
-        </p:style>
-        <p:txBody>
-          <a:bodyPr rtlCol="0" anchor="ctr"/>
-          <a:lstStyle/>
-          <a:p>
-            <a:pPr algn="ctr"/>
-          </a:p>
-        </p:txBody>
-      </p:sp>
-      <p:sp>
-        <p:nvSpPr>
-          <p:cNvPr id="9" name="TextBox 8"/>
-          <p:cNvSpPr txBox="1"/>
-          <p:nvPr/>
-        </p:nvSpPr>
-        <p:spPr>
-          <a:xfrm>
-            <a:off x="5364480" y="2075688"/>
-            <a:ext cx="3901440" cy="457200"/>
-          </a:xfrm>
-          <a:prstGeom prst="rect">
-            <a:avLst/>
-          </a:prstGeom>
-          <a:noFill/>
-        </p:spPr>
-        <p:txBody>
-          <a:bodyPr wrap="square" lIns="0" rIns="0" tIns="0" bIns="0" anchor="ctr">
-            <a:spAutoFit/>
-          </a:bodyPr>
-          <a:lstStyle/>
-          <a:p>
-            <a:pPr algn="ctr"/>
-            <a:r>
-              <a:rPr sz="1600" b="1" i="0">
-                <a:solidFill>
-                  <a:srgbClr val="FFFFFF"/>
-                </a:solidFill>
-                <a:latin typeface="Calibri"/>
-              </a:rPr>
-              <a:t>Next</a:t>
-            </a:r>
-          </a:p>
-        </p:txBody>
-      </p:sp>
-      <p:sp>
-        <p:nvSpPr>
-          <p:cNvPr id="10" name="TextBox 9"/>
-          <p:cNvSpPr txBox="1"/>
-          <p:nvPr/>
-        </p:nvSpPr>
-        <p:spPr>
-          <a:xfrm>
-            <a:off x="5501640" y="2807208"/>
-            <a:ext cx="3627120" cy="2743200"/>
-          </a:xfrm>
-          <a:prstGeom prst="rect">
-            <a:avLst/>
-          </a:prstGeom>
-          <a:noFill/>
-        </p:spPr>
-        <p:txBody>
-          <a:bodyPr wrap="square" lIns="0" rIns="0" tIns="0" bIns="0" anchor="t">
-            <a:spAutoFit/>
-          </a:bodyPr>
-          <a:lstStyle/>
-          <a:p>
-            <a:pPr algn="l" marL="274320" indent="-274320">
-              <a:spcAft>
-                <a:spcPts val="800"/>
-              </a:spcAft>
-              <a:buChar char="•"/>
-            </a:pPr>
-            <a:r>
-              <a:rPr sz="1500" b="0" i="0">
-                <a:solidFill>
-                  <a:srgbClr val="595959"/>
-                </a:solidFill>
-                <a:latin typeface="Calibri"/>
-              </a:rPr>
-              <a:t>Deploy the pipeline to AWS</a:t>
-            </a:r>
-          </a:p>
-          <a:p>
-            <a:pPr algn="l" marL="274320" indent="-274320">
-              <a:spcAft>
-                <a:spcPts val="800"/>
-              </a:spcAft>
-              <a:buChar char="•"/>
-            </a:pPr>
-            <a:r>
-              <a:rPr sz="1500" b="0" i="0">
-                <a:solidFill>
-                  <a:srgbClr val="595959"/>
-                </a:solidFill>
-                <a:latin typeface="Calibri"/>
-              </a:rPr>
-              <a:t>Retrain as new fault events come in</a:t>
-            </a:r>
-          </a:p>
-          <a:p>
-            <a:pPr algn="l" marL="274320" indent="-274320">
-              <a:spcAft>
-                <a:spcPts val="800"/>
-              </a:spcAft>
-              <a:buChar char="•"/>
-            </a:pPr>
-            <a:r>
-              <a:rPr sz="1500" b="0" i="0">
-                <a:solidFill>
-                  <a:srgbClr val="595959"/>
-                </a:solidFill>
-                <a:latin typeface="Calibri"/>
-              </a:rPr>
-              <a:t>Better vibration features for Farm B bearings</a:t>
-            </a:r>
-          </a:p>
-        </p:txBody>
-      </p:sp>
-      <p:sp>
-        <p:nvSpPr>
-          <p:cNvPr id="11" name="Rounded Rectangle 10"/>
-          <p:cNvSpPr/>
-          <p:nvPr/>
-        </p:nvSpPr>
-        <p:spPr>
-          <a:xfrm>
-            <a:off x="9814560" y="1892807"/>
-            <a:ext cx="4267200" cy="3931920"/>
-          </a:xfrm>
-          <a:prstGeom prst="roundRect">
-            <a:avLst>
-              <a:gd name="adj" fmla="val 6976"/>
-            </a:avLst>
-          </a:prstGeom>
-          <a:solidFill>
-            <a:srgbClr val="EAF4FC"/>
-          </a:solidFill>
-          <a:ln w="12700">
-            <a:solidFill>
-              <a:srgbClr val="0089CF"/>
-            </a:solidFill>
-          </a:ln>
-          <a:effectLst/>
-        </p:spPr>
-        <p:style>
-          <a:lnRef idx="1">
-            <a:schemeClr val="accent1"/>
-          </a:lnRef>
-          <a:fillRef idx="3">
-            <a:schemeClr val="accent1"/>
-          </a:fillRef>
-          <a:effectRef idx="2">
-            <a:schemeClr val="accent1"/>
-          </a:effectRef>
-          <a:fontRef idx="minor">
-            <a:schemeClr val="lt1"/>
-          </a:fontRef>
-        </p:style>
-        <p:txBody>
-          <a:bodyPr rtlCol="0" anchor="ctr"/>
-          <a:lstStyle/>
-          <a:p>
-            <a:pPr algn="ctr"/>
-          </a:p>
-        </p:txBody>
-      </p:sp>
-      <p:sp>
-        <p:nvSpPr>
-          <p:cNvPr id="12" name="Rounded Rectangle 11"/>
-          <p:cNvSpPr/>
-          <p:nvPr/>
-        </p:nvSpPr>
-        <p:spPr>
-          <a:xfrm>
-            <a:off x="9997440" y="2075688"/>
-            <a:ext cx="3901440" cy="457200"/>
-          </a:xfrm>
-          <a:prstGeom prst="roundRect">
-            <a:avLst>
-              <a:gd name="adj" fmla="val 10000"/>
-            </a:avLst>
-          </a:prstGeom>
-          <a:solidFill>
-            <a:srgbClr val="002060"/>
-          </a:solidFill>
-          <a:ln>
-            <a:noFill/>
-          </a:ln>
-          <a:effectLst/>
-        </p:spPr>
-        <p:style>
-          <a:lnRef idx="1">
-            <a:schemeClr val="accent1"/>
-          </a:lnRef>
-          <a:fillRef idx="3">
-            <a:schemeClr val="accent1"/>
-          </a:fillRef>
-          <a:effectRef idx="2">
-            <a:schemeClr val="accent1"/>
-          </a:effectRef>
-          <a:fontRef idx="minor">
-            <a:schemeClr val="lt1"/>
-          </a:fontRef>
-        </p:style>
-        <p:txBody>
-          <a:bodyPr rtlCol="0" anchor="ctr"/>
-          <a:lstStyle/>
-          <a:p>
-            <a:pPr algn="ctr"/>
-          </a:p>
-        </p:txBody>
-      </p:sp>
-      <p:sp>
-        <p:nvSpPr>
-          <p:cNvPr id="13" name="TextBox 12"/>
-          <p:cNvSpPr txBox="1"/>
-          <p:nvPr/>
-        </p:nvSpPr>
-        <p:spPr>
-          <a:xfrm>
-            <a:off x="9997440" y="2075688"/>
-            <a:ext cx="3901440" cy="457200"/>
-          </a:xfrm>
-          <a:prstGeom prst="rect">
-            <a:avLst/>
-          </a:prstGeom>
-          <a:noFill/>
-        </p:spPr>
-        <p:txBody>
-          <a:bodyPr wrap="square" lIns="0" rIns="0" tIns="0" bIns="0" anchor="ctr">
-            <a:spAutoFit/>
-          </a:bodyPr>
-          <a:lstStyle/>
-          <a:p>
-            <a:pPr algn="ctr"/>
-            <a:r>
-              <a:rPr sz="1600" b="1" i="0">
-                <a:solidFill>
-                  <a:srgbClr val="FFFFFF"/>
-                </a:solidFill>
-                <a:latin typeface="Calibri"/>
-              </a:rPr>
-              <a:t>Future Phase</a:t>
-            </a:r>
-          </a:p>
-        </p:txBody>
-      </p:sp>
-      <p:sp>
-        <p:nvSpPr>
-          <p:cNvPr id="14" name="TextBox 13"/>
-          <p:cNvSpPr txBox="1"/>
-          <p:nvPr/>
-        </p:nvSpPr>
-        <p:spPr>
-          <a:xfrm>
-            <a:off x="10134600" y="2807208"/>
-            <a:ext cx="3627120" cy="2743200"/>
-          </a:xfrm>
-          <a:prstGeom prst="rect">
-            <a:avLst/>
-          </a:prstGeom>
-          <a:noFill/>
-        </p:spPr>
-        <p:txBody>
-          <a:bodyPr wrap="square" lIns="0" rIns="0" tIns="0" bIns="0" anchor="t">
-            <a:spAutoFit/>
-          </a:bodyPr>
-          <a:lstStyle/>
-          <a:p>
-            <a:pPr algn="l" marL="274320" indent="-274320">
-              <a:spcAft>
-                <a:spcPts val="800"/>
-              </a:spcAft>
-              <a:buChar char="•"/>
-            </a:pPr>
-            <a:r>
-              <a:rPr sz="1500" b="0" i="0">
-                <a:solidFill>
-                  <a:srgbClr val="595959"/>
-                </a:solidFill>
-                <a:latin typeface="Calibri"/>
-              </a:rPr>
-              <a:t>Work orders linked to alerts</a:t>
-            </a:r>
-          </a:p>
-          <a:p>
-            <a:pPr algn="l" marL="274320" indent="-274320">
-              <a:spcAft>
-                <a:spcPts val="800"/>
-              </a:spcAft>
-              <a:buChar char="•"/>
-            </a:pPr>
-            <a:r>
-              <a:rPr sz="1500" b="0" i="0">
-                <a:solidFill>
-                  <a:srgbClr val="595959"/>
-                </a:solidFill>
-                <a:latin typeface="Calibri"/>
-              </a:rPr>
-              <a:t>Maintenance scheduling from RUL</a:t>
-            </a:r>
-          </a:p>
-          <a:p>
-            <a:pPr algn="l" marL="274320" indent="-274320">
-              <a:spcAft>
-                <a:spcPts val="800"/>
-              </a:spcAft>
-              <a:buChar char="•"/>
-            </a:pPr>
-            <a:r>
-              <a:rPr sz="1500" b="0" i="0">
-                <a:solidFill>
-                  <a:srgbClr val="595959"/>
-                </a:solidFill>
-                <a:latin typeface="Calibri"/>
-              </a:rPr>
-              <a:t>More sensor types and farms</a:t>
             </a:r>
           </a:p>
         </p:txBody>
